--- a/AirSentinel_MasterDoc.pptx
+++ b/AirSentinel_MasterDoc.pptx
@@ -5,22 +5,22 @@
     <p:sldMasterId id="2147483648" r:id="rId1"/>
   </p:sldMasterIdLst>
   <p:sldIdLst>
-    <p:sldId id="256" r:id="rId2"/>
-    <p:sldId id="257" r:id="rId3"/>
-    <p:sldId id="258" r:id="rId4"/>
-    <p:sldId id="259" r:id="rId5"/>
-    <p:sldId id="260" r:id="rId6"/>
-    <p:sldId id="261" r:id="rId7"/>
-    <p:sldId id="262" r:id="rId8"/>
-    <p:sldId id="263" r:id="rId9"/>
-    <p:sldId id="264" r:id="rId10"/>
-    <p:sldId id="265" r:id="rId11"/>
-    <p:sldId id="266" r:id="rId12"/>
-    <p:sldId id="267" r:id="rId13"/>
-    <p:sldId id="268" r:id="rId14"/>
-    <p:sldId id="269" r:id="rId15"/>
+    <p:sldId id="256" r:id="rId7"/>
+    <p:sldId id="257" r:id="rId8"/>
+    <p:sldId id="258" r:id="rId9"/>
+    <p:sldId id="259" r:id="rId10"/>
+    <p:sldId id="260" r:id="rId11"/>
+    <p:sldId id="261" r:id="rId12"/>
+    <p:sldId id="262" r:id="rId13"/>
+    <p:sldId id="263" r:id="rId14"/>
+    <p:sldId id="264" r:id="rId15"/>
+    <p:sldId id="265" r:id="rId16"/>
+    <p:sldId id="266" r:id="rId17"/>
+    <p:sldId id="267" r:id="rId18"/>
+    <p:sldId id="268" r:id="rId19"/>
+    <p:sldId id="269" r:id="rId20"/>
   </p:sldIdLst>
-  <p:sldSz cx="12192000" cy="6858000"/>
+  <p:sldSz cx="12191695" cy="6858000" type="screen4x3"/>
   <p:notesSz cx="6858000" cy="9144000"/>
   <p:defaultTextStyle>
     <a:defPPr>
@@ -117,52 +117,7 @@
       </a:defRPr>
     </a:lvl9pPr>
   </p:defaultTextStyle>
-  <p:extLst>
-    <p:ext uri="{EFAFB233-063F-42B5-8137-9DF3F51BA10A}">
-      <p15:sldGuideLst xmlns:p15="http://schemas.microsoft.com/office/powerpoint/2012/main">
-        <p15:guide id="1" orient="horz" pos="2160">
-          <p15:clr>
-            <a:srgbClr val="A4A3A4"/>
-          </p15:clr>
-        </p15:guide>
-        <p15:guide id="2" pos="2880">
-          <p15:clr>
-            <a:srgbClr val="A4A3A4"/>
-          </p15:clr>
-        </p15:guide>
-      </p15:sldGuideLst>
-    </p:ext>
-  </p:extLst>
 </p:presentation>
-</file>
-
-<file path=ppt/changesInfos/changesInfo1.xml><?xml version="1.0" encoding="utf-8"?>
-<pc:chgInfo xmlns:a="http://schemas.openxmlformats.org/drawingml/2006/main" xmlns:r="http://schemas.openxmlformats.org/officeDocument/2006/relationships" xmlns:ac="http://schemas.microsoft.com/office/drawing/2013/main/command" xmlns:pc="http://schemas.microsoft.com/office/powerpoint/2013/main/command">
-  <pc:docChgLst>
-    <pc:chgData name="Bhavika Singh" userId="96d6e211-7330-4025-bc5d-4aead89c3475" providerId="ADAL" clId="{3559BA2C-0C97-4AA1-864E-17BFD22D3B0E}"/>
-    <pc:docChg chg="mod modSld">
-      <pc:chgData name="Bhavika Singh" userId="96d6e211-7330-4025-bc5d-4aead89c3475" providerId="ADAL" clId="{3559BA2C-0C97-4AA1-864E-17BFD22D3B0E}" dt="2026-07-21T07:12:05.757" v="2" actId="33475"/>
-      <pc:docMkLst>
-        <pc:docMk/>
-      </pc:docMkLst>
-      <pc:sldChg chg="modSp mod">
-        <pc:chgData name="Bhavika Singh" userId="96d6e211-7330-4025-bc5d-4aead89c3475" providerId="ADAL" clId="{3559BA2C-0C97-4AA1-864E-17BFD22D3B0E}" dt="2026-07-21T07:11:58.272" v="1" actId="1035"/>
-        <pc:sldMkLst>
-          <pc:docMk/>
-          <pc:sldMk cId="0" sldId="262"/>
-        </pc:sldMkLst>
-        <pc:spChg chg="mod">
-          <ac:chgData name="Bhavika Singh" userId="96d6e211-7330-4025-bc5d-4aead89c3475" providerId="ADAL" clId="{3559BA2C-0C97-4AA1-864E-17BFD22D3B0E}" dt="2026-07-21T07:11:58.272" v="1" actId="1035"/>
-          <ac:spMkLst>
-            <pc:docMk/>
-            <pc:sldMk cId="0" sldId="262"/>
-            <ac:spMk id="2" creationId="{00000000-0000-0000-0000-000000000000}"/>
-          </ac:spMkLst>
-        </pc:spChg>
-      </pc:sldChg>
-    </pc:docChg>
-  </pc:docChgLst>
-</pc:chgInfo>
 </file>
 
 <file path=ppt/slideLayouts/slideLayout1.xml><?xml version="1.0" encoding="utf-8"?>
@@ -203,9 +158,10 @@
           <a:lstStyle/>
           <a:p>
             <a:r>
-              <a:rPr lang="en-US"/>
+              <a:rPr lang="en-US" smtClean="0"/>
               <a:t>Click to edit Master title style</a:t>
             </a:r>
+            <a:endParaRPr lang="en-US"/>
           </a:p>
         </p:txBody>
       </p:sp>
@@ -321,9 +277,10 @@
           </a:lstStyle>
           <a:p>
             <a:r>
-              <a:rPr lang="en-US"/>
+              <a:rPr lang="en-US" smtClean="0"/>
               <a:t>Click to edit Master subtitle style</a:t>
             </a:r>
+            <a:endParaRPr lang="en-US"/>
           </a:p>
         </p:txBody>
       </p:sp>
@@ -344,7 +301,7 @@
           <a:p>
             <a:fld id="{5BCAD085-E8A6-8845-BD4E-CB4CCA059FC4}" type="datetimeFigureOut">
               <a:rPr lang="en-US" smtClean="0"/>
-              <a:t>7/21/2026</a:t>
+              <a:t>1/27/13</a:t>
             </a:fld>
             <a:endParaRPr lang="en-US"/>
           </a:p>
@@ -438,9 +395,10 @@
           <a:lstStyle/>
           <a:p>
             <a:r>
-              <a:rPr lang="en-US"/>
+              <a:rPr lang="en-US" smtClean="0"/>
               <a:t>Click to edit Master title style</a:t>
             </a:r>
+            <a:endParaRPr lang="en-US"/>
           </a:p>
         </p:txBody>
       </p:sp>
@@ -461,37 +419,38 @@
           <a:p>
             <a:pPr lvl="0"/>
             <a:r>
-              <a:rPr lang="en-US"/>
+              <a:rPr lang="en-US" smtClean="0"/>
               <a:t>Click to edit Master text styles</a:t>
             </a:r>
           </a:p>
           <a:p>
             <a:pPr lvl="1"/>
             <a:r>
-              <a:rPr lang="en-US"/>
+              <a:rPr lang="en-US" smtClean="0"/>
               <a:t>Second level</a:t>
             </a:r>
           </a:p>
           <a:p>
             <a:pPr lvl="2"/>
             <a:r>
-              <a:rPr lang="en-US"/>
+              <a:rPr lang="en-US" smtClean="0"/>
               <a:t>Third level</a:t>
             </a:r>
           </a:p>
           <a:p>
             <a:pPr lvl="3"/>
             <a:r>
-              <a:rPr lang="en-US"/>
+              <a:rPr lang="en-US" smtClean="0"/>
               <a:t>Fourth level</a:t>
             </a:r>
           </a:p>
           <a:p>
             <a:pPr lvl="4"/>
             <a:r>
-              <a:rPr lang="en-US"/>
+              <a:rPr lang="en-US" smtClean="0"/>
               <a:t>Fifth level</a:t>
             </a:r>
+            <a:endParaRPr lang="en-US"/>
           </a:p>
         </p:txBody>
       </p:sp>
@@ -512,7 +471,7 @@
           <a:p>
             <a:fld id="{5BCAD085-E8A6-8845-BD4E-CB4CCA059FC4}" type="datetimeFigureOut">
               <a:rPr lang="en-US" smtClean="0"/>
-              <a:t>7/21/2026</a:t>
+              <a:t>1/27/13</a:t>
             </a:fld>
             <a:endParaRPr lang="en-US"/>
           </a:p>
@@ -611,9 +570,10 @@
           <a:lstStyle/>
           <a:p>
             <a:r>
-              <a:rPr lang="en-US"/>
+              <a:rPr lang="en-US" smtClean="0"/>
               <a:t>Click to edit Master title style</a:t>
             </a:r>
+            <a:endParaRPr lang="en-US"/>
           </a:p>
         </p:txBody>
       </p:sp>
@@ -639,37 +599,38 @@
           <a:p>
             <a:pPr lvl="0"/>
             <a:r>
-              <a:rPr lang="en-US"/>
+              <a:rPr lang="en-US" smtClean="0"/>
               <a:t>Click to edit Master text styles</a:t>
             </a:r>
           </a:p>
           <a:p>
             <a:pPr lvl="1"/>
             <a:r>
-              <a:rPr lang="en-US"/>
+              <a:rPr lang="en-US" smtClean="0"/>
               <a:t>Second level</a:t>
             </a:r>
           </a:p>
           <a:p>
             <a:pPr lvl="2"/>
             <a:r>
-              <a:rPr lang="en-US"/>
+              <a:rPr lang="en-US" smtClean="0"/>
               <a:t>Third level</a:t>
             </a:r>
           </a:p>
           <a:p>
             <a:pPr lvl="3"/>
             <a:r>
-              <a:rPr lang="en-US"/>
+              <a:rPr lang="en-US" smtClean="0"/>
               <a:t>Fourth level</a:t>
             </a:r>
           </a:p>
           <a:p>
             <a:pPr lvl="4"/>
             <a:r>
-              <a:rPr lang="en-US"/>
+              <a:rPr lang="en-US" smtClean="0"/>
               <a:t>Fifth level</a:t>
             </a:r>
+            <a:endParaRPr lang="en-US"/>
           </a:p>
         </p:txBody>
       </p:sp>
@@ -690,7 +651,7 @@
           <a:p>
             <a:fld id="{5BCAD085-E8A6-8845-BD4E-CB4CCA059FC4}" type="datetimeFigureOut">
               <a:rPr lang="en-US" smtClean="0"/>
-              <a:t>7/21/2026</a:t>
+              <a:t>1/27/13</a:t>
             </a:fld>
             <a:endParaRPr lang="en-US"/>
           </a:p>
@@ -784,9 +745,10 @@
           <a:lstStyle/>
           <a:p>
             <a:r>
-              <a:rPr lang="en-US"/>
+              <a:rPr lang="en-US" smtClean="0"/>
               <a:t>Click to edit Master title style</a:t>
             </a:r>
+            <a:endParaRPr lang="en-US"/>
           </a:p>
         </p:txBody>
       </p:sp>
@@ -807,37 +769,38 @@
           <a:p>
             <a:pPr lvl="0"/>
             <a:r>
-              <a:rPr lang="en-US"/>
+              <a:rPr lang="en-US" smtClean="0"/>
               <a:t>Click to edit Master text styles</a:t>
             </a:r>
           </a:p>
           <a:p>
             <a:pPr lvl="1"/>
             <a:r>
-              <a:rPr lang="en-US"/>
+              <a:rPr lang="en-US" smtClean="0"/>
               <a:t>Second level</a:t>
             </a:r>
           </a:p>
           <a:p>
             <a:pPr lvl="2"/>
             <a:r>
-              <a:rPr lang="en-US"/>
+              <a:rPr lang="en-US" smtClean="0"/>
               <a:t>Third level</a:t>
             </a:r>
           </a:p>
           <a:p>
             <a:pPr lvl="3"/>
             <a:r>
-              <a:rPr lang="en-US"/>
+              <a:rPr lang="en-US" smtClean="0"/>
               <a:t>Fourth level</a:t>
             </a:r>
           </a:p>
           <a:p>
             <a:pPr lvl="4"/>
             <a:r>
-              <a:rPr lang="en-US"/>
+              <a:rPr lang="en-US" smtClean="0"/>
               <a:t>Fifth level</a:t>
             </a:r>
+            <a:endParaRPr lang="en-US"/>
           </a:p>
         </p:txBody>
       </p:sp>
@@ -858,7 +821,7 @@
           <a:p>
             <a:fld id="{5BCAD085-E8A6-8845-BD4E-CB4CCA059FC4}" type="datetimeFigureOut">
               <a:rPr lang="en-US" smtClean="0"/>
-              <a:t>7/21/2026</a:t>
+              <a:t>1/27/13</a:t>
             </a:fld>
             <a:endParaRPr lang="en-US"/>
           </a:p>
@@ -961,9 +924,10 @@
           </a:lstStyle>
           <a:p>
             <a:r>
-              <a:rPr lang="en-US"/>
+              <a:rPr lang="en-US" smtClean="0"/>
               <a:t>Click to edit Master title style</a:t>
             </a:r>
+            <a:endParaRPr lang="en-US"/>
           </a:p>
         </p:txBody>
       </p:sp>
@@ -1080,7 +1044,7 @@
           <a:p>
             <a:pPr lvl="0"/>
             <a:r>
-              <a:rPr lang="en-US"/>
+              <a:rPr lang="en-US" smtClean="0"/>
               <a:t>Click to edit Master text styles</a:t>
             </a:r>
           </a:p>
@@ -1103,7 +1067,7 @@
           <a:p>
             <a:fld id="{5BCAD085-E8A6-8845-BD4E-CB4CCA059FC4}" type="datetimeFigureOut">
               <a:rPr lang="en-US" smtClean="0"/>
-              <a:t>7/21/2026</a:t>
+              <a:t>1/27/13</a:t>
             </a:fld>
             <a:endParaRPr lang="en-US"/>
           </a:p>
@@ -1197,9 +1161,10 @@
           <a:lstStyle/>
           <a:p>
             <a:r>
-              <a:rPr lang="en-US"/>
+              <a:rPr lang="en-US" smtClean="0"/>
               <a:t>Click to edit Master title style</a:t>
             </a:r>
+            <a:endParaRPr lang="en-US"/>
           </a:p>
         </p:txBody>
       </p:sp>
@@ -1253,37 +1218,38 @@
           <a:p>
             <a:pPr lvl="0"/>
             <a:r>
-              <a:rPr lang="en-US"/>
+              <a:rPr lang="en-US" smtClean="0"/>
               <a:t>Click to edit Master text styles</a:t>
             </a:r>
           </a:p>
           <a:p>
             <a:pPr lvl="1"/>
             <a:r>
-              <a:rPr lang="en-US"/>
+              <a:rPr lang="en-US" smtClean="0"/>
               <a:t>Second level</a:t>
             </a:r>
           </a:p>
           <a:p>
             <a:pPr lvl="2"/>
             <a:r>
-              <a:rPr lang="en-US"/>
+              <a:rPr lang="en-US" smtClean="0"/>
               <a:t>Third level</a:t>
             </a:r>
           </a:p>
           <a:p>
             <a:pPr lvl="3"/>
             <a:r>
-              <a:rPr lang="en-US"/>
+              <a:rPr lang="en-US" smtClean="0"/>
               <a:t>Fourth level</a:t>
             </a:r>
           </a:p>
           <a:p>
             <a:pPr lvl="4"/>
             <a:r>
-              <a:rPr lang="en-US"/>
+              <a:rPr lang="en-US" smtClean="0"/>
               <a:t>Fifth level</a:t>
             </a:r>
+            <a:endParaRPr lang="en-US"/>
           </a:p>
         </p:txBody>
       </p:sp>
@@ -1337,37 +1303,38 @@
           <a:p>
             <a:pPr lvl="0"/>
             <a:r>
-              <a:rPr lang="en-US"/>
+              <a:rPr lang="en-US" smtClean="0"/>
               <a:t>Click to edit Master text styles</a:t>
             </a:r>
           </a:p>
           <a:p>
             <a:pPr lvl="1"/>
             <a:r>
-              <a:rPr lang="en-US"/>
+              <a:rPr lang="en-US" smtClean="0"/>
               <a:t>Second level</a:t>
             </a:r>
           </a:p>
           <a:p>
             <a:pPr lvl="2"/>
             <a:r>
-              <a:rPr lang="en-US"/>
+              <a:rPr lang="en-US" smtClean="0"/>
               <a:t>Third level</a:t>
             </a:r>
           </a:p>
           <a:p>
             <a:pPr lvl="3"/>
             <a:r>
-              <a:rPr lang="en-US"/>
+              <a:rPr lang="en-US" smtClean="0"/>
               <a:t>Fourth level</a:t>
             </a:r>
           </a:p>
           <a:p>
             <a:pPr lvl="4"/>
             <a:r>
-              <a:rPr lang="en-US"/>
+              <a:rPr lang="en-US" smtClean="0"/>
               <a:t>Fifth level</a:t>
             </a:r>
+            <a:endParaRPr lang="en-US"/>
           </a:p>
         </p:txBody>
       </p:sp>
@@ -1388,7 +1355,7 @@
           <a:p>
             <a:fld id="{5BCAD085-E8A6-8845-BD4E-CB4CCA059FC4}" type="datetimeFigureOut">
               <a:rPr lang="en-US" smtClean="0"/>
-              <a:t>7/21/2026</a:t>
+              <a:t>1/27/13</a:t>
             </a:fld>
             <a:endParaRPr lang="en-US"/>
           </a:p>
@@ -1486,9 +1453,10 @@
           </a:lstStyle>
           <a:p>
             <a:r>
-              <a:rPr lang="en-US"/>
+              <a:rPr lang="en-US" smtClean="0"/>
               <a:t>Click to edit Master title style</a:t>
             </a:r>
+            <a:endParaRPr lang="en-US"/>
           </a:p>
         </p:txBody>
       </p:sp>
@@ -1551,7 +1519,7 @@
           <a:p>
             <a:pPr lvl="0"/>
             <a:r>
-              <a:rPr lang="en-US"/>
+              <a:rPr lang="en-US" smtClean="0"/>
               <a:t>Click to edit Master text styles</a:t>
             </a:r>
           </a:p>
@@ -1607,37 +1575,38 @@
           <a:p>
             <a:pPr lvl="0"/>
             <a:r>
-              <a:rPr lang="en-US"/>
+              <a:rPr lang="en-US" smtClean="0"/>
               <a:t>Click to edit Master text styles</a:t>
             </a:r>
           </a:p>
           <a:p>
             <a:pPr lvl="1"/>
             <a:r>
-              <a:rPr lang="en-US"/>
+              <a:rPr lang="en-US" smtClean="0"/>
               <a:t>Second level</a:t>
             </a:r>
           </a:p>
           <a:p>
             <a:pPr lvl="2"/>
             <a:r>
-              <a:rPr lang="en-US"/>
+              <a:rPr lang="en-US" smtClean="0"/>
               <a:t>Third level</a:t>
             </a:r>
           </a:p>
           <a:p>
             <a:pPr lvl="3"/>
             <a:r>
-              <a:rPr lang="en-US"/>
+              <a:rPr lang="en-US" smtClean="0"/>
               <a:t>Fourth level</a:t>
             </a:r>
           </a:p>
           <a:p>
             <a:pPr lvl="4"/>
             <a:r>
-              <a:rPr lang="en-US"/>
+              <a:rPr lang="en-US" smtClean="0"/>
               <a:t>Fifth level</a:t>
             </a:r>
+            <a:endParaRPr lang="en-US"/>
           </a:p>
         </p:txBody>
       </p:sp>
@@ -1700,7 +1669,7 @@
           <a:p>
             <a:pPr lvl="0"/>
             <a:r>
-              <a:rPr lang="en-US"/>
+              <a:rPr lang="en-US" smtClean="0"/>
               <a:t>Click to edit Master text styles</a:t>
             </a:r>
           </a:p>
@@ -1756,37 +1725,38 @@
           <a:p>
             <a:pPr lvl="0"/>
             <a:r>
-              <a:rPr lang="en-US"/>
+              <a:rPr lang="en-US" smtClean="0"/>
               <a:t>Click to edit Master text styles</a:t>
             </a:r>
           </a:p>
           <a:p>
             <a:pPr lvl="1"/>
             <a:r>
-              <a:rPr lang="en-US"/>
+              <a:rPr lang="en-US" smtClean="0"/>
               <a:t>Second level</a:t>
             </a:r>
           </a:p>
           <a:p>
             <a:pPr lvl="2"/>
             <a:r>
-              <a:rPr lang="en-US"/>
+              <a:rPr lang="en-US" smtClean="0"/>
               <a:t>Third level</a:t>
             </a:r>
           </a:p>
           <a:p>
             <a:pPr lvl="3"/>
             <a:r>
-              <a:rPr lang="en-US"/>
+              <a:rPr lang="en-US" smtClean="0"/>
               <a:t>Fourth level</a:t>
             </a:r>
           </a:p>
           <a:p>
             <a:pPr lvl="4"/>
             <a:r>
-              <a:rPr lang="en-US"/>
+              <a:rPr lang="en-US" smtClean="0"/>
               <a:t>Fifth level</a:t>
             </a:r>
+            <a:endParaRPr lang="en-US"/>
           </a:p>
         </p:txBody>
       </p:sp>
@@ -1807,7 +1777,7 @@
           <a:p>
             <a:fld id="{5BCAD085-E8A6-8845-BD4E-CB4CCA059FC4}" type="datetimeFigureOut">
               <a:rPr lang="en-US" smtClean="0"/>
-              <a:t>7/21/2026</a:t>
+              <a:t>1/27/13</a:t>
             </a:fld>
             <a:endParaRPr lang="en-US"/>
           </a:p>
@@ -1901,9 +1871,10 @@
           <a:lstStyle/>
           <a:p>
             <a:r>
-              <a:rPr lang="en-US"/>
+              <a:rPr lang="en-US" smtClean="0"/>
               <a:t>Click to edit Master title style</a:t>
             </a:r>
+            <a:endParaRPr lang="en-US"/>
           </a:p>
         </p:txBody>
       </p:sp>
@@ -1924,7 +1895,7 @@
           <a:p>
             <a:fld id="{5BCAD085-E8A6-8845-BD4E-CB4CCA059FC4}" type="datetimeFigureOut">
               <a:rPr lang="en-US" smtClean="0"/>
-              <a:t>7/21/2026</a:t>
+              <a:t>1/27/13</a:t>
             </a:fld>
             <a:endParaRPr lang="en-US"/>
           </a:p>
@@ -2019,7 +1990,7 @@
           <a:p>
             <a:fld id="{5BCAD085-E8A6-8845-BD4E-CB4CCA059FC4}" type="datetimeFigureOut">
               <a:rPr lang="en-US" smtClean="0"/>
-              <a:t>7/21/2026</a:t>
+              <a:t>1/27/13</a:t>
             </a:fld>
             <a:endParaRPr lang="en-US"/>
           </a:p>
@@ -2122,9 +2093,10 @@
           </a:lstStyle>
           <a:p>
             <a:r>
-              <a:rPr lang="en-US"/>
+              <a:rPr lang="en-US" smtClean="0"/>
               <a:t>Click to edit Master title style</a:t>
             </a:r>
+            <a:endParaRPr lang="en-US"/>
           </a:p>
         </p:txBody>
       </p:sp>
@@ -2178,37 +2150,38 @@
           <a:p>
             <a:pPr lvl="0"/>
             <a:r>
-              <a:rPr lang="en-US"/>
+              <a:rPr lang="en-US" smtClean="0"/>
               <a:t>Click to edit Master text styles</a:t>
             </a:r>
           </a:p>
           <a:p>
             <a:pPr lvl="1"/>
             <a:r>
-              <a:rPr lang="en-US"/>
+              <a:rPr lang="en-US" smtClean="0"/>
               <a:t>Second level</a:t>
             </a:r>
           </a:p>
           <a:p>
             <a:pPr lvl="2"/>
             <a:r>
-              <a:rPr lang="en-US"/>
+              <a:rPr lang="en-US" smtClean="0"/>
               <a:t>Third level</a:t>
             </a:r>
           </a:p>
           <a:p>
             <a:pPr lvl="3"/>
             <a:r>
-              <a:rPr lang="en-US"/>
+              <a:rPr lang="en-US" smtClean="0"/>
               <a:t>Fourth level</a:t>
             </a:r>
           </a:p>
           <a:p>
             <a:pPr lvl="4"/>
             <a:r>
-              <a:rPr lang="en-US"/>
+              <a:rPr lang="en-US" smtClean="0"/>
               <a:t>Fifth level</a:t>
             </a:r>
+            <a:endParaRPr lang="en-US"/>
           </a:p>
         </p:txBody>
       </p:sp>
@@ -2271,7 +2244,7 @@
           <a:p>
             <a:pPr lvl="0"/>
             <a:r>
-              <a:rPr lang="en-US"/>
+              <a:rPr lang="en-US" smtClean="0"/>
               <a:t>Click to edit Master text styles</a:t>
             </a:r>
           </a:p>
@@ -2294,7 +2267,7 @@
           <a:p>
             <a:fld id="{5BCAD085-E8A6-8845-BD4E-CB4CCA059FC4}" type="datetimeFigureOut">
               <a:rPr lang="en-US" smtClean="0"/>
-              <a:t>7/21/2026</a:t>
+              <a:t>1/27/13</a:t>
             </a:fld>
             <a:endParaRPr lang="en-US"/>
           </a:p>
@@ -2397,9 +2370,10 @@
           </a:lstStyle>
           <a:p>
             <a:r>
-              <a:rPr lang="en-US"/>
+              <a:rPr lang="en-US" smtClean="0"/>
               <a:t>Click to edit Master title style</a:t>
             </a:r>
+            <a:endParaRPr lang="en-US"/>
           </a:p>
         </p:txBody>
       </p:sp>
@@ -2523,7 +2497,7 @@
           <a:p>
             <a:pPr lvl="0"/>
             <a:r>
-              <a:rPr lang="en-US"/>
+              <a:rPr lang="en-US" smtClean="0"/>
               <a:t>Click to edit Master text styles</a:t>
             </a:r>
           </a:p>
@@ -2546,7 +2520,7 @@
           <a:p>
             <a:fld id="{5BCAD085-E8A6-8845-BD4E-CB4CCA059FC4}" type="datetimeFigureOut">
               <a:rPr lang="en-US" smtClean="0"/>
-              <a:t>7/21/2026</a:t>
+              <a:t>1/27/13</a:t>
             </a:fld>
             <a:endParaRPr lang="en-US"/>
           </a:p>
@@ -2655,9 +2629,10 @@
           <a:lstStyle/>
           <a:p>
             <a:r>
-              <a:rPr lang="en-US"/>
+              <a:rPr lang="en-US" smtClean="0"/>
               <a:t>Click to edit Master title style</a:t>
             </a:r>
+            <a:endParaRPr lang="en-US"/>
           </a:p>
         </p:txBody>
       </p:sp>
@@ -2688,37 +2663,38 @@
           <a:p>
             <a:pPr lvl="0"/>
             <a:r>
-              <a:rPr lang="en-US"/>
+              <a:rPr lang="en-US" smtClean="0"/>
               <a:t>Click to edit Master text styles</a:t>
             </a:r>
           </a:p>
           <a:p>
             <a:pPr lvl="1"/>
             <a:r>
-              <a:rPr lang="en-US"/>
+              <a:rPr lang="en-US" smtClean="0"/>
               <a:t>Second level</a:t>
             </a:r>
           </a:p>
           <a:p>
             <a:pPr lvl="2"/>
             <a:r>
-              <a:rPr lang="en-US"/>
+              <a:rPr lang="en-US" smtClean="0"/>
               <a:t>Third level</a:t>
             </a:r>
           </a:p>
           <a:p>
             <a:pPr lvl="3"/>
             <a:r>
-              <a:rPr lang="en-US"/>
+              <a:rPr lang="en-US" smtClean="0"/>
               <a:t>Fourth level</a:t>
             </a:r>
           </a:p>
           <a:p>
             <a:pPr lvl="4"/>
             <a:r>
-              <a:rPr lang="en-US"/>
+              <a:rPr lang="en-US" smtClean="0"/>
               <a:t>Fifth level</a:t>
             </a:r>
+            <a:endParaRPr lang="en-US"/>
           </a:p>
         </p:txBody>
       </p:sp>
@@ -2757,7 +2733,7 @@
           <a:p>
             <a:fld id="{5BCAD085-E8A6-8845-BD4E-CB4CCA059FC4}" type="datetimeFigureOut">
               <a:rPr lang="en-US" smtClean="0"/>
-              <a:t>7/21/2026</a:t>
+              <a:t>1/27/13</a:t>
             </a:fld>
             <a:endParaRPr lang="en-US"/>
           </a:p>
@@ -3116,7 +3092,7 @@
 </file>
 
 <file path=ppt/slides/slide1.xml><?xml version="1.0" encoding="utf-8"?>
-<p:sld xmlns:a="http://schemas.openxmlformats.org/drawingml/2006/main" xmlns:r="http://schemas.openxmlformats.org/officeDocument/2006/relationships" xmlns:p="http://schemas.openxmlformats.org/presentationml/2006/main">
+<p:sld xmlns:a="http://schemas.openxmlformats.org/drawingml/2006/main" xmlns:p="http://schemas.openxmlformats.org/presentationml/2006/main" xmlns:r="http://schemas.openxmlformats.org/officeDocument/2006/relationships">
   <p:cSld>
     <p:spTree>
       <p:nvGrpSpPr>
@@ -3124,14 +3100,7 @@
         <p:cNvGrpSpPr/>
         <p:nvPr/>
       </p:nvGrpSpPr>
-      <p:grpSpPr>
-        <a:xfrm>
-          <a:off x="0" y="0"/>
-          <a:ext cx="0" cy="0"/>
-          <a:chOff x="0" y="0"/>
-          <a:chExt cx="0" cy="0"/>
-        </a:xfrm>
-      </p:grpSpPr>
+      <p:grpSpPr/>
       <p:sp>
         <p:nvSpPr>
           <p:cNvPr id="2" name="Rectangle 1"/>
@@ -3173,7 +3142,6 @@
           <a:lstStyle/>
           <a:p>
             <a:pPr algn="ctr"/>
-            <a:endParaRPr/>
           </a:p>
         </p:txBody>
       </p:sp>
@@ -3194,7 +3162,7 @@
           <a:noFill/>
         </p:spPr>
         <p:txBody>
-          <a:bodyPr wrap="square" lIns="0" tIns="0" rIns="0" bIns="0" anchor="t">
+          <a:bodyPr wrap="square" anchor="t" lIns="0" rIns="0" tIns="0" bIns="0">
             <a:spAutoFit/>
           </a:bodyPr>
           <a:lstStyle/>
@@ -3233,7 +3201,7 @@
           <a:noFill/>
         </p:spPr>
         <p:txBody>
-          <a:bodyPr wrap="square" lIns="0" tIns="0" rIns="0" bIns="0" anchor="t">
+          <a:bodyPr wrap="square" anchor="t" lIns="0" rIns="0" tIns="0" bIns="0">
             <a:spAutoFit/>
           </a:bodyPr>
           <a:lstStyle/>
@@ -3272,7 +3240,7 @@
           <a:noFill/>
         </p:spPr>
         <p:txBody>
-          <a:bodyPr wrap="square" lIns="0" tIns="0" rIns="0" bIns="0" anchor="t">
+          <a:bodyPr wrap="square" anchor="t" lIns="0" rIns="0" tIns="0" bIns="0">
             <a:spAutoFit/>
           </a:bodyPr>
           <a:lstStyle/>
@@ -3349,7 +3317,7 @@
           </a:fontRef>
         </p:style>
         <p:txBody>
-          <a:bodyPr wrap="none" lIns="50800" tIns="12700" rIns="50800" bIns="12700" rtlCol="0" anchor="ctr"/>
+          <a:bodyPr rtlCol="0" anchor="ctr" wrap="none" lIns="50800" rIns="50800" tIns="12700" bIns="12700"/>
           <a:lstStyle/>
           <a:p>
             <a:pPr algn="ctr"/>
@@ -3404,7 +3372,7 @@
           </a:fontRef>
         </p:style>
         <p:txBody>
-          <a:bodyPr wrap="none" lIns="50800" tIns="12700" rIns="50800" bIns="12700" rtlCol="0" anchor="ctr"/>
+          <a:bodyPr rtlCol="0" anchor="ctr" wrap="none" lIns="50800" rIns="50800" tIns="12700" bIns="12700"/>
           <a:lstStyle/>
           <a:p>
             <a:pPr algn="ctr"/>
@@ -3459,7 +3427,7 @@
           </a:fontRef>
         </p:style>
         <p:txBody>
-          <a:bodyPr wrap="none" lIns="50800" tIns="12700" rIns="50800" bIns="12700" rtlCol="0" anchor="ctr"/>
+          <a:bodyPr rtlCol="0" anchor="ctr" wrap="none" lIns="50800" rIns="50800" tIns="12700" bIns="12700"/>
           <a:lstStyle/>
           <a:p>
             <a:pPr algn="ctr"/>
@@ -3492,7 +3460,7 @@
           <a:noFill/>
         </p:spPr>
         <p:txBody>
-          <a:bodyPr wrap="square" lIns="0" tIns="0" rIns="0" bIns="0" anchor="t">
+          <a:bodyPr wrap="square" anchor="t" lIns="0" rIns="0" tIns="0" bIns="0">
             <a:spAutoFit/>
           </a:bodyPr>
           <a:lstStyle/>
@@ -3531,7 +3499,7 @@
           <a:noFill/>
         </p:spPr>
         <p:txBody>
-          <a:bodyPr wrap="square" lIns="0" tIns="0" rIns="0" bIns="0" anchor="t">
+          <a:bodyPr wrap="square" anchor="t" lIns="0" rIns="0" tIns="0" bIns="0">
             <a:spAutoFit/>
           </a:bodyPr>
           <a:lstStyle/>
@@ -3562,7 +3530,7 @@
 </file>
 
 <file path=ppt/slides/slide10.xml><?xml version="1.0" encoding="utf-8"?>
-<p:sld xmlns:a="http://schemas.openxmlformats.org/drawingml/2006/main" xmlns:r="http://schemas.openxmlformats.org/officeDocument/2006/relationships" xmlns:p="http://schemas.openxmlformats.org/presentationml/2006/main">
+<p:sld xmlns:a="http://schemas.openxmlformats.org/drawingml/2006/main" xmlns:p="http://schemas.openxmlformats.org/presentationml/2006/main" xmlns:r="http://schemas.openxmlformats.org/officeDocument/2006/relationships">
   <p:cSld>
     <p:spTree>
       <p:nvGrpSpPr>
@@ -3570,14 +3538,7 @@
         <p:cNvGrpSpPr/>
         <p:nvPr/>
       </p:nvGrpSpPr>
-      <p:grpSpPr>
-        <a:xfrm>
-          <a:off x="0" y="0"/>
-          <a:ext cx="0" cy="0"/>
-          <a:chOff x="0" y="0"/>
-          <a:chExt cx="0" cy="0"/>
-        </a:xfrm>
-      </p:grpSpPr>
+      <p:grpSpPr/>
       <p:sp>
         <p:nvSpPr>
           <p:cNvPr id="2" name="Rectangle 1"/>
@@ -3619,7 +3580,6 @@
           <a:lstStyle/>
           <a:p>
             <a:pPr algn="ctr"/>
-            <a:endParaRPr/>
           </a:p>
         </p:txBody>
       </p:sp>
@@ -3640,7 +3600,7 @@
           <a:noFill/>
         </p:spPr>
         <p:txBody>
-          <a:bodyPr wrap="square" lIns="0" tIns="0" rIns="0" bIns="0" anchor="t">
+          <a:bodyPr wrap="square" anchor="t" lIns="0" rIns="0" tIns="0" bIns="0">
             <a:spAutoFit/>
           </a:bodyPr>
           <a:lstStyle/>
@@ -3679,7 +3639,7 @@
           <a:noFill/>
         </p:spPr>
         <p:txBody>
-          <a:bodyPr wrap="square" lIns="0" tIns="0" rIns="0" bIns="0" anchor="t">
+          <a:bodyPr wrap="square" anchor="t" lIns="0" rIns="0" tIns="0" bIns="0">
             <a:spAutoFit/>
           </a:bodyPr>
           <a:lstStyle/>
@@ -3746,7 +3706,6 @@
           <a:lstStyle/>
           <a:p>
             <a:pPr algn="ctr"/>
-            <a:endParaRPr/>
           </a:p>
         </p:txBody>
       </p:sp>
@@ -3793,7 +3752,6 @@
           <a:lstStyle/>
           <a:p>
             <a:pPr algn="ctr"/>
-            <a:endParaRPr/>
           </a:p>
         </p:txBody>
       </p:sp>
@@ -3814,7 +3772,7 @@
           <a:noFill/>
         </p:spPr>
         <p:txBody>
-          <a:bodyPr wrap="square" lIns="0" tIns="0" rIns="0" bIns="0" anchor="t">
+          <a:bodyPr wrap="square" anchor="t" lIns="0" rIns="0" tIns="0" bIns="0">
             <a:spAutoFit/>
           </a:bodyPr>
           <a:lstStyle/>
@@ -3853,7 +3811,7 @@
           <a:noFill/>
         </p:spPr>
         <p:txBody>
-          <a:bodyPr wrap="square" lIns="0" tIns="0" rIns="0" bIns="0" anchor="t">
+          <a:bodyPr wrap="square" anchor="t" lIns="0" rIns="0" tIns="0" bIns="0">
             <a:spAutoFit/>
           </a:bodyPr>
           <a:lstStyle/>
@@ -3892,7 +3850,7 @@
           <a:noFill/>
         </p:spPr>
         <p:txBody>
-          <a:bodyPr wrap="square" lIns="0" tIns="0" rIns="0" bIns="0">
+          <a:bodyPr wrap="square" lIns="0" rIns="0" tIns="0" bIns="0">
             <a:spAutoFit/>
           </a:bodyPr>
           <a:lstStyle/>
@@ -4027,7 +3985,6 @@
           <a:lstStyle/>
           <a:p>
             <a:pPr algn="ctr"/>
-            <a:endParaRPr/>
           </a:p>
         </p:txBody>
       </p:sp>
@@ -4074,7 +4031,6 @@
           <a:lstStyle/>
           <a:p>
             <a:pPr algn="ctr"/>
-            <a:endParaRPr/>
           </a:p>
         </p:txBody>
       </p:sp>
@@ -4095,7 +4051,7 @@
           <a:noFill/>
         </p:spPr>
         <p:txBody>
-          <a:bodyPr wrap="square" lIns="0" tIns="0" rIns="0" bIns="0" anchor="t">
+          <a:bodyPr wrap="square" anchor="t" lIns="0" rIns="0" tIns="0" bIns="0">
             <a:spAutoFit/>
           </a:bodyPr>
           <a:lstStyle/>
@@ -4134,7 +4090,7 @@
           <a:noFill/>
         </p:spPr>
         <p:txBody>
-          <a:bodyPr wrap="square" lIns="0" tIns="0" rIns="0" bIns="0" anchor="t">
+          <a:bodyPr wrap="square" anchor="t" lIns="0" rIns="0" tIns="0" bIns="0">
             <a:spAutoFit/>
           </a:bodyPr>
           <a:lstStyle/>
@@ -4173,7 +4129,7 @@
           <a:noFill/>
         </p:spPr>
         <p:txBody>
-          <a:bodyPr wrap="square" lIns="0" tIns="0" rIns="0" bIns="0">
+          <a:bodyPr wrap="square" lIns="0" rIns="0" tIns="0" bIns="0">
             <a:spAutoFit/>
           </a:bodyPr>
           <a:lstStyle/>
@@ -4308,7 +4264,6 @@
           <a:lstStyle/>
           <a:p>
             <a:pPr algn="ctr"/>
-            <a:endParaRPr/>
           </a:p>
         </p:txBody>
       </p:sp>
@@ -4355,7 +4310,6 @@
           <a:lstStyle/>
           <a:p>
             <a:pPr algn="ctr"/>
-            <a:endParaRPr/>
           </a:p>
         </p:txBody>
       </p:sp>
@@ -4376,7 +4330,7 @@
           <a:noFill/>
         </p:spPr>
         <p:txBody>
-          <a:bodyPr wrap="square" lIns="0" tIns="0" rIns="0" bIns="0" anchor="t">
+          <a:bodyPr wrap="square" anchor="t" lIns="0" rIns="0" tIns="0" bIns="0">
             <a:spAutoFit/>
           </a:bodyPr>
           <a:lstStyle/>
@@ -4415,7 +4369,7 @@
           <a:noFill/>
         </p:spPr>
         <p:txBody>
-          <a:bodyPr wrap="square" lIns="0" tIns="0" rIns="0" bIns="0" anchor="t">
+          <a:bodyPr wrap="square" anchor="t" lIns="0" rIns="0" tIns="0" bIns="0">
             <a:spAutoFit/>
           </a:bodyPr>
           <a:lstStyle/>
@@ -4454,7 +4408,7 @@
           <a:noFill/>
         </p:spPr>
         <p:txBody>
-          <a:bodyPr wrap="square" lIns="0" tIns="0" rIns="0" bIns="0">
+          <a:bodyPr wrap="square" lIns="0" rIns="0" tIns="0" bIns="0">
             <a:spAutoFit/>
           </a:bodyPr>
           <a:lstStyle/>
@@ -4589,7 +4543,6 @@
           <a:lstStyle/>
           <a:p>
             <a:pPr algn="ctr"/>
-            <a:endParaRPr/>
           </a:p>
         </p:txBody>
       </p:sp>
@@ -4636,7 +4589,6 @@
           <a:lstStyle/>
           <a:p>
             <a:pPr algn="ctr"/>
-            <a:endParaRPr/>
           </a:p>
         </p:txBody>
       </p:sp>
@@ -4657,7 +4609,7 @@
           <a:noFill/>
         </p:spPr>
         <p:txBody>
-          <a:bodyPr wrap="square" lIns="0" tIns="0" rIns="0" bIns="0" anchor="t">
+          <a:bodyPr wrap="square" anchor="t" lIns="0" rIns="0" tIns="0" bIns="0">
             <a:spAutoFit/>
           </a:bodyPr>
           <a:lstStyle/>
@@ -4696,7 +4648,7 @@
           <a:noFill/>
         </p:spPr>
         <p:txBody>
-          <a:bodyPr wrap="square" lIns="0" tIns="0" rIns="0" bIns="0" anchor="t">
+          <a:bodyPr wrap="square" anchor="t" lIns="0" rIns="0" tIns="0" bIns="0">
             <a:spAutoFit/>
           </a:bodyPr>
           <a:lstStyle/>
@@ -4735,7 +4687,7 @@
           <a:noFill/>
         </p:spPr>
         <p:txBody>
-          <a:bodyPr wrap="square" lIns="0" tIns="0" rIns="0" bIns="0">
+          <a:bodyPr wrap="square" lIns="0" rIns="0" tIns="0" bIns="0">
             <a:spAutoFit/>
           </a:bodyPr>
           <a:lstStyle/>
@@ -4870,7 +4822,6 @@
           <a:lstStyle/>
           <a:p>
             <a:pPr algn="ctr"/>
-            <a:endParaRPr/>
           </a:p>
         </p:txBody>
       </p:sp>
@@ -4917,7 +4868,6 @@
           <a:lstStyle/>
           <a:p>
             <a:pPr algn="ctr"/>
-            <a:endParaRPr/>
           </a:p>
         </p:txBody>
       </p:sp>
@@ -4938,7 +4888,7 @@
           <a:noFill/>
         </p:spPr>
         <p:txBody>
-          <a:bodyPr wrap="square" lIns="0" tIns="0" rIns="0" bIns="0" anchor="t">
+          <a:bodyPr wrap="square" anchor="t" lIns="0" rIns="0" tIns="0" bIns="0">
             <a:spAutoFit/>
           </a:bodyPr>
           <a:lstStyle/>
@@ -4977,7 +4927,7 @@
           <a:noFill/>
         </p:spPr>
         <p:txBody>
-          <a:bodyPr wrap="square" lIns="0" tIns="0" rIns="0" bIns="0" anchor="t">
+          <a:bodyPr wrap="square" anchor="t" lIns="0" rIns="0" tIns="0" bIns="0">
             <a:spAutoFit/>
           </a:bodyPr>
           <a:lstStyle/>
@@ -5016,7 +4966,7 @@
           <a:noFill/>
         </p:spPr>
         <p:txBody>
-          <a:bodyPr wrap="square" lIns="0" tIns="0" rIns="0" bIns="0">
+          <a:bodyPr wrap="square" lIns="0" rIns="0" tIns="0" bIns="0">
             <a:spAutoFit/>
           </a:bodyPr>
           <a:lstStyle/>
@@ -5123,7 +5073,7 @@
           <a:noFill/>
         </p:spPr>
         <p:txBody>
-          <a:bodyPr wrap="square" lIns="0" tIns="0" rIns="0" bIns="0" anchor="t">
+          <a:bodyPr wrap="square" anchor="t" lIns="0" rIns="0" tIns="0" bIns="0">
             <a:spAutoFit/>
           </a:bodyPr>
           <a:lstStyle/>
@@ -5162,7 +5112,7 @@
           <a:noFill/>
         </p:spPr>
         <p:txBody>
-          <a:bodyPr wrap="square" lIns="0" tIns="0" rIns="0" bIns="0" anchor="t">
+          <a:bodyPr wrap="square" anchor="t" lIns="0" rIns="0" tIns="0" bIns="0">
             <a:spAutoFit/>
           </a:bodyPr>
           <a:lstStyle/>
@@ -5193,7 +5143,7 @@
 </file>
 
 <file path=ppt/slides/slide11.xml><?xml version="1.0" encoding="utf-8"?>
-<p:sld xmlns:a="http://schemas.openxmlformats.org/drawingml/2006/main" xmlns:r="http://schemas.openxmlformats.org/officeDocument/2006/relationships" xmlns:p="http://schemas.openxmlformats.org/presentationml/2006/main">
+<p:sld xmlns:a="http://schemas.openxmlformats.org/drawingml/2006/main" xmlns:p="http://schemas.openxmlformats.org/presentationml/2006/main" xmlns:r="http://schemas.openxmlformats.org/officeDocument/2006/relationships">
   <p:cSld>
     <p:spTree>
       <p:nvGrpSpPr>
@@ -5201,14 +5151,7 @@
         <p:cNvGrpSpPr/>
         <p:nvPr/>
       </p:nvGrpSpPr>
-      <p:grpSpPr>
-        <a:xfrm>
-          <a:off x="0" y="0"/>
-          <a:ext cx="0" cy="0"/>
-          <a:chOff x="0" y="0"/>
-          <a:chExt cx="0" cy="0"/>
-        </a:xfrm>
-      </p:grpSpPr>
+      <p:grpSpPr/>
       <p:sp>
         <p:nvSpPr>
           <p:cNvPr id="2" name="Rectangle 1"/>
@@ -5250,7 +5193,6 @@
           <a:lstStyle/>
           <a:p>
             <a:pPr algn="ctr"/>
-            <a:endParaRPr/>
           </a:p>
         </p:txBody>
       </p:sp>
@@ -5271,7 +5213,7 @@
           <a:noFill/>
         </p:spPr>
         <p:txBody>
-          <a:bodyPr wrap="square" lIns="0" tIns="0" rIns="0" bIns="0" anchor="t">
+          <a:bodyPr wrap="square" anchor="t" lIns="0" rIns="0" tIns="0" bIns="0">
             <a:spAutoFit/>
           </a:bodyPr>
           <a:lstStyle/>
@@ -5310,7 +5252,7 @@
           <a:noFill/>
         </p:spPr>
         <p:txBody>
-          <a:bodyPr wrap="square" lIns="0" tIns="0" rIns="0" bIns="0" anchor="t">
+          <a:bodyPr wrap="square" anchor="t" lIns="0" rIns="0" tIns="0" bIns="0">
             <a:spAutoFit/>
           </a:bodyPr>
           <a:lstStyle/>
@@ -5349,7 +5291,7 @@
           <a:noFill/>
         </p:spPr>
         <p:txBody>
-          <a:bodyPr wrap="square" lIns="0" tIns="0" rIns="0" bIns="0" anchor="t">
+          <a:bodyPr wrap="square" anchor="t" lIns="0" rIns="0" tIns="0" bIns="0">
             <a:spAutoFit/>
           </a:bodyPr>
           <a:lstStyle/>
@@ -5388,7 +5330,7 @@
           <a:noFill/>
         </p:spPr>
         <p:txBody>
-          <a:bodyPr wrap="square" lIns="0" tIns="0" rIns="0" bIns="0">
+          <a:bodyPr wrap="square" lIns="0" rIns="0" tIns="0" bIns="0">
             <a:spAutoFit/>
           </a:bodyPr>
           <a:lstStyle/>
@@ -5521,7 +5463,6 @@
           <a:lstStyle/>
           <a:p>
             <a:pPr algn="ctr"/>
-            <a:endParaRPr/>
           </a:p>
         </p:txBody>
       </p:sp>
@@ -5542,7 +5483,7 @@
           <a:noFill/>
         </p:spPr>
         <p:txBody>
-          <a:bodyPr wrap="square" lIns="0" tIns="0" rIns="0" bIns="0" anchor="t">
+          <a:bodyPr wrap="square" anchor="t" lIns="0" rIns="0" tIns="0" bIns="0">
             <a:spAutoFit/>
           </a:bodyPr>
           <a:lstStyle/>
@@ -5581,7 +5522,7 @@
           <a:noFill/>
         </p:spPr>
         <p:txBody>
-          <a:bodyPr wrap="square" lIns="0" tIns="0" rIns="0" bIns="0" anchor="t">
+          <a:bodyPr wrap="square" anchor="t" lIns="0" rIns="0" tIns="0" bIns="0">
             <a:spAutoFit/>
           </a:bodyPr>
           <a:lstStyle/>
@@ -5620,7 +5561,7 @@
           <a:noFill/>
         </p:spPr>
         <p:txBody>
-          <a:bodyPr wrap="square" lIns="0" tIns="0" rIns="0" bIns="0" anchor="t">
+          <a:bodyPr wrap="square" anchor="t" lIns="0" rIns="0" tIns="0" bIns="0">
             <a:spAutoFit/>
           </a:bodyPr>
           <a:lstStyle/>
@@ -5659,7 +5600,7 @@
           <a:noFill/>
         </p:spPr>
         <p:txBody>
-          <a:bodyPr wrap="square" lIns="0" tIns="0" rIns="0" bIns="0">
+          <a:bodyPr wrap="square" lIns="0" rIns="0" tIns="0" bIns="0">
             <a:spAutoFit/>
           </a:bodyPr>
           <a:lstStyle/>
@@ -5766,7 +5707,7 @@
           <a:noFill/>
         </p:spPr>
         <p:txBody>
-          <a:bodyPr wrap="square" lIns="0" tIns="0" rIns="0" bIns="0" anchor="t">
+          <a:bodyPr wrap="square" anchor="t" lIns="0" rIns="0" tIns="0" bIns="0">
             <a:spAutoFit/>
           </a:bodyPr>
           <a:lstStyle/>
@@ -5833,7 +5774,6 @@
           <a:lstStyle/>
           <a:p>
             <a:pPr algn="ctr"/>
-            <a:endParaRPr/>
           </a:p>
         </p:txBody>
       </p:sp>
@@ -5876,7 +5816,7 @@
           </a:fontRef>
         </p:style>
         <p:txBody>
-          <a:bodyPr wrap="none" lIns="50800" tIns="12700" rIns="50800" bIns="12700" rtlCol="0" anchor="ctr"/>
+          <a:bodyPr rtlCol="0" anchor="ctr" wrap="none" lIns="50800" rIns="50800" tIns="12700" bIns="12700"/>
           <a:lstStyle/>
           <a:p>
             <a:pPr algn="ctr"/>
@@ -5909,7 +5849,7 @@
           <a:noFill/>
         </p:spPr>
         <p:txBody>
-          <a:bodyPr wrap="square" lIns="0" tIns="0" rIns="0" bIns="0" anchor="t">
+          <a:bodyPr wrap="square" anchor="t" lIns="0" rIns="0" tIns="0" bIns="0">
             <a:spAutoFit/>
           </a:bodyPr>
           <a:lstStyle/>
@@ -6012,7 +5952,6 @@
           <a:lstStyle/>
           <a:p>
             <a:pPr algn="ctr"/>
-            <a:endParaRPr/>
           </a:p>
         </p:txBody>
       </p:sp>
@@ -6055,7 +5994,7 @@
           </a:fontRef>
         </p:style>
         <p:txBody>
-          <a:bodyPr wrap="none" lIns="50800" tIns="12700" rIns="50800" bIns="12700" rtlCol="0" anchor="ctr"/>
+          <a:bodyPr rtlCol="0" anchor="ctr" wrap="none" lIns="50800" rIns="50800" tIns="12700" bIns="12700"/>
           <a:lstStyle/>
           <a:p>
             <a:pPr algn="ctr"/>
@@ -6088,7 +6027,7 @@
           <a:noFill/>
         </p:spPr>
         <p:txBody>
-          <a:bodyPr wrap="square" lIns="0" tIns="0" rIns="0" bIns="0" anchor="t">
+          <a:bodyPr wrap="square" anchor="t" lIns="0" rIns="0" tIns="0" bIns="0">
             <a:spAutoFit/>
           </a:bodyPr>
           <a:lstStyle/>
@@ -6191,7 +6130,6 @@
           <a:lstStyle/>
           <a:p>
             <a:pPr algn="ctr"/>
-            <a:endParaRPr/>
           </a:p>
         </p:txBody>
       </p:sp>
@@ -6234,7 +6172,7 @@
           </a:fontRef>
         </p:style>
         <p:txBody>
-          <a:bodyPr wrap="none" lIns="50800" tIns="12700" rIns="50800" bIns="12700" rtlCol="0" anchor="ctr"/>
+          <a:bodyPr rtlCol="0" anchor="ctr" wrap="none" lIns="50800" rIns="50800" tIns="12700" bIns="12700"/>
           <a:lstStyle/>
           <a:p>
             <a:pPr algn="ctr"/>
@@ -6267,7 +6205,7 @@
           <a:noFill/>
         </p:spPr>
         <p:txBody>
-          <a:bodyPr wrap="square" lIns="0" tIns="0" rIns="0" bIns="0" anchor="t">
+          <a:bodyPr wrap="square" anchor="t" lIns="0" rIns="0" tIns="0" bIns="0">
             <a:spAutoFit/>
           </a:bodyPr>
           <a:lstStyle/>
@@ -6370,7 +6308,6 @@
           <a:lstStyle/>
           <a:p>
             <a:pPr algn="ctr"/>
-            <a:endParaRPr/>
           </a:p>
         </p:txBody>
       </p:sp>
@@ -6413,7 +6350,7 @@
           </a:fontRef>
         </p:style>
         <p:txBody>
-          <a:bodyPr wrap="none" lIns="50800" tIns="12700" rIns="50800" bIns="12700" rtlCol="0" anchor="ctr"/>
+          <a:bodyPr rtlCol="0" anchor="ctr" wrap="none" lIns="50800" rIns="50800" tIns="12700" bIns="12700"/>
           <a:lstStyle/>
           <a:p>
             <a:pPr algn="ctr"/>
@@ -6446,7 +6383,7 @@
           <a:noFill/>
         </p:spPr>
         <p:txBody>
-          <a:bodyPr wrap="square" lIns="0" tIns="0" rIns="0" bIns="0" anchor="t">
+          <a:bodyPr wrap="square" anchor="t" lIns="0" rIns="0" tIns="0" bIns="0">
             <a:spAutoFit/>
           </a:bodyPr>
           <a:lstStyle/>
@@ -6485,7 +6422,7 @@
           <a:noFill/>
         </p:spPr>
         <p:txBody>
-          <a:bodyPr wrap="square" lIns="0" tIns="0" rIns="0" bIns="0" anchor="t">
+          <a:bodyPr wrap="square" anchor="t" lIns="0" rIns="0" tIns="0" bIns="0">
             <a:spAutoFit/>
           </a:bodyPr>
           <a:lstStyle/>
@@ -6524,7 +6461,7 @@
           <a:noFill/>
         </p:spPr>
         <p:txBody>
-          <a:bodyPr wrap="square" lIns="0" tIns="0" rIns="0" bIns="0" anchor="t">
+          <a:bodyPr wrap="square" anchor="t" lIns="0" rIns="0" tIns="0" bIns="0">
             <a:spAutoFit/>
           </a:bodyPr>
           <a:lstStyle/>
@@ -6555,7 +6492,7 @@
 </file>
 
 <file path=ppt/slides/slide12.xml><?xml version="1.0" encoding="utf-8"?>
-<p:sld xmlns:a="http://schemas.openxmlformats.org/drawingml/2006/main" xmlns:r="http://schemas.openxmlformats.org/officeDocument/2006/relationships" xmlns:p="http://schemas.openxmlformats.org/presentationml/2006/main">
+<p:sld xmlns:a="http://schemas.openxmlformats.org/drawingml/2006/main" xmlns:p="http://schemas.openxmlformats.org/presentationml/2006/main" xmlns:r="http://schemas.openxmlformats.org/officeDocument/2006/relationships">
   <p:cSld>
     <p:spTree>
       <p:nvGrpSpPr>
@@ -6563,14 +6500,7 @@
         <p:cNvGrpSpPr/>
         <p:nvPr/>
       </p:nvGrpSpPr>
-      <p:grpSpPr>
-        <a:xfrm>
-          <a:off x="0" y="0"/>
-          <a:ext cx="0" cy="0"/>
-          <a:chOff x="0" y="0"/>
-          <a:chExt cx="0" cy="0"/>
-        </a:xfrm>
-      </p:grpSpPr>
+      <p:grpSpPr/>
       <p:sp>
         <p:nvSpPr>
           <p:cNvPr id="2" name="Rectangle 1"/>
@@ -6612,7 +6542,6 @@
           <a:lstStyle/>
           <a:p>
             <a:pPr algn="ctr"/>
-            <a:endParaRPr/>
           </a:p>
         </p:txBody>
       </p:sp>
@@ -6633,7 +6562,7 @@
           <a:noFill/>
         </p:spPr>
         <p:txBody>
-          <a:bodyPr wrap="square" lIns="0" tIns="0" rIns="0" bIns="0" anchor="t">
+          <a:bodyPr wrap="square" anchor="t" lIns="0" rIns="0" tIns="0" bIns="0">
             <a:spAutoFit/>
           </a:bodyPr>
           <a:lstStyle/>
@@ -6672,7 +6601,7 @@
           <a:noFill/>
         </p:spPr>
         <p:txBody>
-          <a:bodyPr wrap="square" lIns="0" tIns="0" rIns="0" bIns="0" anchor="t">
+          <a:bodyPr wrap="square" anchor="t" lIns="0" rIns="0" tIns="0" bIns="0">
             <a:spAutoFit/>
           </a:bodyPr>
           <a:lstStyle/>
@@ -6711,7 +6640,7 @@
           <a:noFill/>
         </p:spPr>
         <p:txBody>
-          <a:bodyPr wrap="square" lIns="0" tIns="0" rIns="0" bIns="0" anchor="t">
+          <a:bodyPr wrap="square" anchor="t" lIns="0" rIns="0" tIns="0" bIns="0">
             <a:spAutoFit/>
           </a:bodyPr>
           <a:lstStyle/>
@@ -6776,7 +6705,6 @@
           <a:lstStyle/>
           <a:p>
             <a:pPr algn="ctr"/>
-            <a:endParaRPr/>
           </a:p>
         </p:txBody>
       </p:sp>
@@ -6797,7 +6725,7 @@
           <a:noFill/>
         </p:spPr>
         <p:txBody>
-          <a:bodyPr wrap="square" lIns="0" tIns="0" rIns="0" bIns="0" anchor="t">
+          <a:bodyPr wrap="square" anchor="t" lIns="0" rIns="0" tIns="0" bIns="0">
             <a:spAutoFit/>
           </a:bodyPr>
           <a:lstStyle/>
@@ -6868,7 +6796,7 @@
           <a:noFill/>
         </p:spPr>
         <p:txBody>
-          <a:bodyPr wrap="square" lIns="0" tIns="0" rIns="0" bIns="0" anchor="t">
+          <a:bodyPr wrap="square" anchor="t" lIns="0" rIns="0" tIns="0" bIns="0">
             <a:spAutoFit/>
           </a:bodyPr>
           <a:lstStyle/>
@@ -6931,7 +6859,6 @@
           <a:lstStyle/>
           <a:p>
             <a:pPr algn="ctr"/>
-            <a:endParaRPr/>
           </a:p>
         </p:txBody>
       </p:sp>
@@ -6952,7 +6879,7 @@
           <a:noFill/>
         </p:spPr>
         <p:txBody>
-          <a:bodyPr wrap="square" lIns="0" tIns="0" rIns="0" bIns="0" anchor="ctr">
+          <a:bodyPr wrap="square" anchor="ctr" lIns="0" rIns="0" tIns="0" bIns="0">
             <a:spAutoFit/>
           </a:bodyPr>
           <a:lstStyle/>
@@ -6991,7 +6918,7 @@
           <a:noFill/>
         </p:spPr>
         <p:txBody>
-          <a:bodyPr wrap="square" lIns="0" tIns="0" rIns="0" bIns="0" anchor="ctr">
+          <a:bodyPr wrap="square" anchor="ctr" lIns="0" rIns="0" tIns="0" bIns="0">
             <a:spAutoFit/>
           </a:bodyPr>
           <a:lstStyle/>
@@ -7054,7 +6981,6 @@
           <a:lstStyle/>
           <a:p>
             <a:pPr algn="ctr"/>
-            <a:endParaRPr/>
           </a:p>
         </p:txBody>
       </p:sp>
@@ -7075,7 +7001,7 @@
           <a:noFill/>
         </p:spPr>
         <p:txBody>
-          <a:bodyPr wrap="square" lIns="0" tIns="0" rIns="0" bIns="0" anchor="ctr">
+          <a:bodyPr wrap="square" anchor="ctr" lIns="0" rIns="0" tIns="0" bIns="0">
             <a:spAutoFit/>
           </a:bodyPr>
           <a:lstStyle/>
@@ -7114,7 +7040,7 @@
           <a:noFill/>
         </p:spPr>
         <p:txBody>
-          <a:bodyPr wrap="square" lIns="0" tIns="0" rIns="0" bIns="0" anchor="ctr">
+          <a:bodyPr wrap="square" anchor="ctr" lIns="0" rIns="0" tIns="0" bIns="0">
             <a:spAutoFit/>
           </a:bodyPr>
           <a:lstStyle/>
@@ -7177,7 +7103,6 @@
           <a:lstStyle/>
           <a:p>
             <a:pPr algn="ctr"/>
-            <a:endParaRPr/>
           </a:p>
         </p:txBody>
       </p:sp>
@@ -7198,7 +7123,7 @@
           <a:noFill/>
         </p:spPr>
         <p:txBody>
-          <a:bodyPr wrap="square" lIns="0" tIns="0" rIns="0" bIns="0" anchor="ctr">
+          <a:bodyPr wrap="square" anchor="ctr" lIns="0" rIns="0" tIns="0" bIns="0">
             <a:spAutoFit/>
           </a:bodyPr>
           <a:lstStyle/>
@@ -7237,7 +7162,7 @@
           <a:noFill/>
         </p:spPr>
         <p:txBody>
-          <a:bodyPr wrap="square" lIns="0" tIns="0" rIns="0" bIns="0" anchor="ctr">
+          <a:bodyPr wrap="square" anchor="ctr" lIns="0" rIns="0" tIns="0" bIns="0">
             <a:spAutoFit/>
           </a:bodyPr>
           <a:lstStyle/>
@@ -7276,7 +7201,7 @@
           <a:noFill/>
         </p:spPr>
         <p:txBody>
-          <a:bodyPr wrap="square" lIns="0" tIns="0" rIns="0" bIns="0" anchor="t">
+          <a:bodyPr wrap="square" anchor="t" lIns="0" rIns="0" tIns="0" bIns="0">
             <a:spAutoFit/>
           </a:bodyPr>
           <a:lstStyle/>
@@ -7315,7 +7240,7 @@
           <a:noFill/>
         </p:spPr>
         <p:txBody>
-          <a:bodyPr wrap="square" lIns="0" tIns="0" rIns="0" bIns="0" anchor="t">
+          <a:bodyPr wrap="square" anchor="t" lIns="0" rIns="0" tIns="0" bIns="0">
             <a:spAutoFit/>
           </a:bodyPr>
           <a:lstStyle/>
@@ -7354,7 +7279,7 @@
           <a:noFill/>
         </p:spPr>
         <p:txBody>
-          <a:bodyPr wrap="square" lIns="0" tIns="0" rIns="0" bIns="0">
+          <a:bodyPr wrap="square" lIns="0" rIns="0" tIns="0" bIns="0">
             <a:spAutoFit/>
           </a:bodyPr>
           <a:lstStyle/>
@@ -7517,7 +7442,7 @@
           <a:noFill/>
         </p:spPr>
         <p:txBody>
-          <a:bodyPr wrap="square" lIns="0" tIns="0" rIns="0" bIns="0" anchor="t">
+          <a:bodyPr wrap="square" anchor="t" lIns="0" rIns="0" tIns="0" bIns="0">
             <a:spAutoFit/>
           </a:bodyPr>
           <a:lstStyle/>
@@ -7556,7 +7481,7 @@
           <a:noFill/>
         </p:spPr>
         <p:txBody>
-          <a:bodyPr wrap="square" lIns="0" tIns="0" rIns="0" bIns="0" anchor="t">
+          <a:bodyPr wrap="square" anchor="t" lIns="0" rIns="0" tIns="0" bIns="0">
             <a:spAutoFit/>
           </a:bodyPr>
           <a:lstStyle/>
@@ -7587,7 +7512,7 @@
 </file>
 
 <file path=ppt/slides/slide13.xml><?xml version="1.0" encoding="utf-8"?>
-<p:sld xmlns:a="http://schemas.openxmlformats.org/drawingml/2006/main" xmlns:r="http://schemas.openxmlformats.org/officeDocument/2006/relationships" xmlns:p="http://schemas.openxmlformats.org/presentationml/2006/main">
+<p:sld xmlns:a="http://schemas.openxmlformats.org/drawingml/2006/main" xmlns:p="http://schemas.openxmlformats.org/presentationml/2006/main" xmlns:r="http://schemas.openxmlformats.org/officeDocument/2006/relationships">
   <p:cSld>
     <p:spTree>
       <p:nvGrpSpPr>
@@ -7595,14 +7520,7 @@
         <p:cNvGrpSpPr/>
         <p:nvPr/>
       </p:nvGrpSpPr>
-      <p:grpSpPr>
-        <a:xfrm>
-          <a:off x="0" y="0"/>
-          <a:ext cx="0" cy="0"/>
-          <a:chOff x="0" y="0"/>
-          <a:chExt cx="0" cy="0"/>
-        </a:xfrm>
-      </p:grpSpPr>
+      <p:grpSpPr/>
       <p:sp>
         <p:nvSpPr>
           <p:cNvPr id="2" name="Rectangle 1"/>
@@ -7644,7 +7562,6 @@
           <a:lstStyle/>
           <a:p>
             <a:pPr algn="ctr"/>
-            <a:endParaRPr/>
           </a:p>
         </p:txBody>
       </p:sp>
@@ -7665,7 +7582,7 @@
           <a:noFill/>
         </p:spPr>
         <p:txBody>
-          <a:bodyPr wrap="square" lIns="0" tIns="0" rIns="0" bIns="0" anchor="t">
+          <a:bodyPr wrap="square" anchor="t" lIns="0" rIns="0" tIns="0" bIns="0">
             <a:spAutoFit/>
           </a:bodyPr>
           <a:lstStyle/>
@@ -7704,7 +7621,7 @@
           <a:noFill/>
         </p:spPr>
         <p:txBody>
-          <a:bodyPr wrap="square" lIns="0" tIns="0" rIns="0" bIns="0" anchor="t">
+          <a:bodyPr wrap="square" anchor="t" lIns="0" rIns="0" tIns="0" bIns="0">
             <a:spAutoFit/>
           </a:bodyPr>
           <a:lstStyle/>
@@ -7771,7 +7688,6 @@
           <a:lstStyle/>
           <a:p>
             <a:pPr algn="ctr"/>
-            <a:endParaRPr/>
           </a:p>
         </p:txBody>
       </p:sp>
@@ -7792,7 +7708,7 @@
           <a:noFill/>
         </p:spPr>
         <p:txBody>
-          <a:bodyPr wrap="square" lIns="0" tIns="0" rIns="0" bIns="0" anchor="t">
+          <a:bodyPr wrap="square" anchor="t" lIns="0" rIns="0" tIns="0" bIns="0">
             <a:spAutoFit/>
           </a:bodyPr>
           <a:lstStyle/>
@@ -7847,7 +7763,7 @@
           <a:noFill/>
         </p:spPr>
         <p:txBody>
-          <a:bodyPr wrap="square" lIns="0" tIns="0" rIns="0" bIns="0" anchor="t">
+          <a:bodyPr wrap="square" anchor="t" lIns="0" rIns="0" tIns="0" bIns="0">
             <a:spAutoFit/>
           </a:bodyPr>
           <a:lstStyle/>
@@ -7886,7 +7802,7 @@
           <a:noFill/>
         </p:spPr>
         <p:txBody>
-          <a:bodyPr wrap="square" lIns="0" tIns="0" rIns="0" bIns="0">
+          <a:bodyPr wrap="square" lIns="0" rIns="0" tIns="0" bIns="0">
             <a:spAutoFit/>
           </a:bodyPr>
           <a:lstStyle/>
@@ -7993,7 +7909,7 @@
           <a:noFill/>
         </p:spPr>
         <p:txBody>
-          <a:bodyPr wrap="square" lIns="0" tIns="0" rIns="0" bIns="0" anchor="t">
+          <a:bodyPr wrap="square" anchor="t" lIns="0" rIns="0" tIns="0" bIns="0">
             <a:spAutoFit/>
           </a:bodyPr>
           <a:lstStyle/>
@@ -8032,7 +7948,7 @@
           <a:noFill/>
         </p:spPr>
         <p:txBody>
-          <a:bodyPr wrap="square" lIns="0" tIns="0" rIns="0" bIns="0">
+          <a:bodyPr wrap="square" lIns="0" rIns="0" tIns="0" bIns="0">
             <a:spAutoFit/>
           </a:bodyPr>
           <a:lstStyle/>
@@ -8165,7 +8081,6 @@
           <a:lstStyle/>
           <a:p>
             <a:pPr algn="ctr"/>
-            <a:endParaRPr/>
           </a:p>
         </p:txBody>
       </p:sp>
@@ -8186,7 +8101,7 @@
           <a:noFill/>
         </p:spPr>
         <p:txBody>
-          <a:bodyPr wrap="square" lIns="0" tIns="0" rIns="0" bIns="0" anchor="t">
+          <a:bodyPr wrap="square" anchor="t" lIns="0" rIns="0" tIns="0" bIns="0">
             <a:spAutoFit/>
           </a:bodyPr>
           <a:lstStyle/>
@@ -8241,7 +8156,7 @@
           <a:noFill/>
         </p:spPr>
         <p:txBody>
-          <a:bodyPr wrap="square" lIns="0" tIns="0" rIns="0" bIns="0" anchor="t">
+          <a:bodyPr wrap="square" anchor="t" lIns="0" rIns="0" tIns="0" bIns="0">
             <a:spAutoFit/>
           </a:bodyPr>
           <a:lstStyle/>
@@ -8280,7 +8195,7 @@
           <a:noFill/>
         </p:spPr>
         <p:txBody>
-          <a:bodyPr wrap="square" lIns="0" tIns="0" rIns="0" bIns="0" anchor="t">
+          <a:bodyPr wrap="square" anchor="t" lIns="0" rIns="0" tIns="0" bIns="0">
             <a:spAutoFit/>
           </a:bodyPr>
           <a:lstStyle/>
@@ -8311,7 +8226,7 @@
 </file>
 
 <file path=ppt/slides/slide14.xml><?xml version="1.0" encoding="utf-8"?>
-<p:sld xmlns:a="http://schemas.openxmlformats.org/drawingml/2006/main" xmlns:r="http://schemas.openxmlformats.org/officeDocument/2006/relationships" xmlns:p="http://schemas.openxmlformats.org/presentationml/2006/main">
+<p:sld xmlns:a="http://schemas.openxmlformats.org/drawingml/2006/main" xmlns:p="http://schemas.openxmlformats.org/presentationml/2006/main" xmlns:r="http://schemas.openxmlformats.org/officeDocument/2006/relationships">
   <p:cSld>
     <p:spTree>
       <p:nvGrpSpPr>
@@ -8319,14 +8234,7 @@
         <p:cNvGrpSpPr/>
         <p:nvPr/>
       </p:nvGrpSpPr>
-      <p:grpSpPr>
-        <a:xfrm>
-          <a:off x="0" y="0"/>
-          <a:ext cx="0" cy="0"/>
-          <a:chOff x="0" y="0"/>
-          <a:chExt cx="0" cy="0"/>
-        </a:xfrm>
-      </p:grpSpPr>
+      <p:grpSpPr/>
       <p:sp>
         <p:nvSpPr>
           <p:cNvPr id="2" name="Rectangle 1"/>
@@ -8368,7 +8276,6 @@
           <a:lstStyle/>
           <a:p>
             <a:pPr algn="ctr"/>
-            <a:endParaRPr/>
           </a:p>
         </p:txBody>
       </p:sp>
@@ -8389,7 +8296,7 @@
           <a:noFill/>
         </p:spPr>
         <p:txBody>
-          <a:bodyPr wrap="square" lIns="0" tIns="0" rIns="0" bIns="0" anchor="t">
+          <a:bodyPr wrap="square" anchor="t" lIns="0" rIns="0" tIns="0" bIns="0">
             <a:spAutoFit/>
           </a:bodyPr>
           <a:lstStyle/>
@@ -8428,7 +8335,7 @@
           <a:noFill/>
         </p:spPr>
         <p:txBody>
-          <a:bodyPr wrap="square" lIns="0" tIns="0" rIns="0" bIns="0" anchor="t">
+          <a:bodyPr wrap="square" anchor="t" lIns="0" rIns="0" tIns="0" bIns="0">
             <a:spAutoFit/>
           </a:bodyPr>
           <a:lstStyle/>
@@ -8467,7 +8374,7 @@
           <a:noFill/>
         </p:spPr>
         <p:txBody>
-          <a:bodyPr wrap="square" lIns="0" tIns="0" rIns="0" bIns="0" anchor="t">
+          <a:bodyPr wrap="square" anchor="t" lIns="0" rIns="0" tIns="0" bIns="0">
             <a:spAutoFit/>
           </a:bodyPr>
           <a:lstStyle/>
@@ -8506,7 +8413,7 @@
           <a:noFill/>
         </p:spPr>
         <p:txBody>
-          <a:bodyPr wrap="square" lIns="0" tIns="0" rIns="0" bIns="0">
+          <a:bodyPr wrap="square" lIns="0" rIns="0" tIns="0" bIns="0">
             <a:spAutoFit/>
           </a:bodyPr>
           <a:lstStyle/>
@@ -8563,7 +8470,7 @@
                 </a:solidFill>
                 <a:latin typeface="Calibri"/>
               </a:rPr>
-              <a:t>Vehicle emission compute engine + real RTO mapping</a:t>
+              <a:t>Vehicle emissions on real VAHAN data — real per-zone variation</a:t>
             </a:r>
           </a:p>
           <a:p>
@@ -8591,7 +8498,7 @@
                 </a:solidFill>
                 <a:latin typeface="Calibri"/>
               </a:rPr>
-              <a:t>Fusion layer, GRAP mapper, alerts, dashboard</a:t>
+              <a:t>Fusion layer, GRAP mapper, alerts, dashboard — all live</a:t>
             </a:r>
           </a:p>
           <a:p>
@@ -8641,7 +8548,7 @@
           <a:noFill/>
         </p:spPr>
         <p:txBody>
-          <a:bodyPr wrap="square" lIns="0" tIns="0" rIns="0" bIns="0" anchor="t">
+          <a:bodyPr wrap="square" anchor="t" lIns="0" rIns="0" tIns="0" bIns="0">
             <a:spAutoFit/>
           </a:bodyPr>
           <a:lstStyle/>
@@ -8658,7 +8565,7 @@
                 </a:solidFill>
                 <a:latin typeface="Calibri"/>
               </a:rPr>
-              <a:t>NEEDS YOUR INPUT</a:t>
+              <a:t>STILL OPEN</a:t>
             </a:r>
           </a:p>
         </p:txBody>
@@ -8680,7 +8587,7 @@
           <a:noFill/>
         </p:spPr>
         <p:txBody>
-          <a:bodyPr wrap="square" lIns="0" tIns="0" rIns="0" bIns="0">
+          <a:bodyPr wrap="square" lIns="0" rIns="0" tIns="0" bIns="0">
             <a:spAutoFit/>
           </a:bodyPr>
           <a:lstStyle/>
@@ -8709,7 +8616,7 @@
                 </a:solidFill>
                 <a:latin typeface="Calibri"/>
               </a:rPr>
-              <a:t>Real VAHAN registration export (RTO-level)</a:t>
+              <a:t>Full ARAI/CPCB emission factor table (beyond BS6 limits)</a:t>
             </a:r>
           </a:p>
           <a:p>
@@ -8737,7 +8644,7 @@
                 </a:solidFill>
                 <a:latin typeface="Calibri"/>
               </a:rPr>
-              <a:t>Real ARAI/CPCB emission factor citations</a:t>
+              <a:t>Real category-specific distance citations (beyond 2W study)</a:t>
             </a:r>
           </a:p>
           <a:p>
@@ -8765,7 +8672,7 @@
                 </a:solidFill>
                 <a:latin typeface="Calibri"/>
               </a:rPr>
-              <a:t>Real transport-survey distance citations</a:t>
+              <a:t>Bus/truck/three-wheeler categories not yet covered</a:t>
             </a:r>
           </a:p>
         </p:txBody>
@@ -8787,7 +8694,7 @@
           <a:noFill/>
         </p:spPr>
         <p:txBody>
-          <a:bodyPr wrap="square" lIns="0" tIns="0" rIns="0" bIns="0" anchor="t">
+          <a:bodyPr wrap="square" anchor="t" lIns="0" rIns="0" tIns="0" bIns="0">
             <a:spAutoFit/>
           </a:bodyPr>
           <a:lstStyle/>
@@ -8826,7 +8733,7 @@
           <a:noFill/>
         </p:spPr>
         <p:txBody>
-          <a:bodyPr wrap="square" lIns="0" tIns="0" rIns="0" bIns="0">
+          <a:bodyPr wrap="square" lIns="0" rIns="0" tIns="0" bIns="0">
             <a:spAutoFit/>
           </a:bodyPr>
           <a:lstStyle/>
@@ -8933,7 +8840,7 @@
           <a:noFill/>
         </p:spPr>
         <p:txBody>
-          <a:bodyPr wrap="square" lIns="0" tIns="0" rIns="0" bIns="0" anchor="t">
+          <a:bodyPr wrap="square" anchor="t" lIns="0" rIns="0" tIns="0" bIns="0">
             <a:spAutoFit/>
           </a:bodyPr>
           <a:lstStyle/>
@@ -8972,7 +8879,7 @@
           <a:noFill/>
         </p:spPr>
         <p:txBody>
-          <a:bodyPr wrap="square" lIns="0" tIns="0" rIns="0" bIns="0" anchor="t">
+          <a:bodyPr wrap="square" anchor="t" lIns="0" rIns="0" tIns="0" bIns="0">
             <a:spAutoFit/>
           </a:bodyPr>
           <a:lstStyle/>
@@ -9003,7 +8910,7 @@
 </file>
 
 <file path=ppt/slides/slide2.xml><?xml version="1.0" encoding="utf-8"?>
-<p:sld xmlns:a="http://schemas.openxmlformats.org/drawingml/2006/main" xmlns:r="http://schemas.openxmlformats.org/officeDocument/2006/relationships" xmlns:p="http://schemas.openxmlformats.org/presentationml/2006/main">
+<p:sld xmlns:a="http://schemas.openxmlformats.org/drawingml/2006/main" xmlns:p="http://schemas.openxmlformats.org/presentationml/2006/main" xmlns:r="http://schemas.openxmlformats.org/officeDocument/2006/relationships">
   <p:cSld>
     <p:spTree>
       <p:nvGrpSpPr>
@@ -9011,14 +8918,7 @@
         <p:cNvGrpSpPr/>
         <p:nvPr/>
       </p:nvGrpSpPr>
-      <p:grpSpPr>
-        <a:xfrm>
-          <a:off x="0" y="0"/>
-          <a:ext cx="0" cy="0"/>
-          <a:chOff x="0" y="0"/>
-          <a:chExt cx="0" cy="0"/>
-        </a:xfrm>
-      </p:grpSpPr>
+      <p:grpSpPr/>
       <p:sp>
         <p:nvSpPr>
           <p:cNvPr id="2" name="Rectangle 1"/>
@@ -9060,7 +8960,6 @@
           <a:lstStyle/>
           <a:p>
             <a:pPr algn="ctr"/>
-            <a:endParaRPr/>
           </a:p>
         </p:txBody>
       </p:sp>
@@ -9081,7 +8980,7 @@
           <a:noFill/>
         </p:spPr>
         <p:txBody>
-          <a:bodyPr wrap="square" lIns="0" tIns="0" rIns="0" bIns="0" anchor="t">
+          <a:bodyPr wrap="square" anchor="t" lIns="0" rIns="0" tIns="0" bIns="0">
             <a:spAutoFit/>
           </a:bodyPr>
           <a:lstStyle/>
@@ -9120,7 +9019,7 @@
           <a:noFill/>
         </p:spPr>
         <p:txBody>
-          <a:bodyPr wrap="square" lIns="0" tIns="0" rIns="0" bIns="0" anchor="t">
+          <a:bodyPr wrap="square" anchor="t" lIns="0" rIns="0" tIns="0" bIns="0">
             <a:spAutoFit/>
           </a:bodyPr>
           <a:lstStyle/>
@@ -9185,7 +9084,6 @@
           <a:lstStyle/>
           <a:p>
             <a:pPr algn="ctr"/>
-            <a:endParaRPr/>
           </a:p>
         </p:txBody>
       </p:sp>
@@ -9206,7 +9104,7 @@
           <a:noFill/>
         </p:spPr>
         <p:txBody>
-          <a:bodyPr wrap="square" lIns="0" tIns="0" rIns="0" bIns="0" anchor="t">
+          <a:bodyPr wrap="square" anchor="t" lIns="0" rIns="0" tIns="0" bIns="0">
             <a:spAutoFit/>
           </a:bodyPr>
           <a:lstStyle/>
@@ -9245,7 +9143,7 @@
           <a:noFill/>
         </p:spPr>
         <p:txBody>
-          <a:bodyPr wrap="square" lIns="0" tIns="0" rIns="0" bIns="0" anchor="t">
+          <a:bodyPr wrap="square" anchor="t" lIns="0" rIns="0" tIns="0" bIns="0">
             <a:spAutoFit/>
           </a:bodyPr>
           <a:lstStyle/>
@@ -9284,7 +9182,7 @@
           <a:noFill/>
         </p:spPr>
         <p:txBody>
-          <a:bodyPr wrap="square" lIns="0" tIns="0" rIns="0" bIns="0">
+          <a:bodyPr wrap="square" lIns="0" rIns="0" tIns="0" bIns="0">
             <a:spAutoFit/>
           </a:bodyPr>
           <a:lstStyle/>
@@ -9417,7 +9315,6 @@
           <a:lstStyle/>
           <a:p>
             <a:pPr algn="ctr"/>
-            <a:endParaRPr/>
           </a:p>
         </p:txBody>
       </p:sp>
@@ -9438,7 +9335,7 @@
           <a:noFill/>
         </p:spPr>
         <p:txBody>
-          <a:bodyPr wrap="square" lIns="0" tIns="0" rIns="0" bIns="0" anchor="t">
+          <a:bodyPr wrap="square" anchor="t" lIns="0" rIns="0" tIns="0" bIns="0">
             <a:spAutoFit/>
           </a:bodyPr>
           <a:lstStyle/>
@@ -9477,7 +9374,7 @@
           <a:noFill/>
         </p:spPr>
         <p:txBody>
-          <a:bodyPr wrap="square" lIns="0" tIns="0" rIns="0" bIns="0">
+          <a:bodyPr wrap="square" lIns="0" rIns="0" tIns="0" bIns="0">
             <a:spAutoFit/>
           </a:bodyPr>
           <a:lstStyle/>
@@ -9528,7 +9425,7 @@
           <a:noFill/>
         </p:spPr>
         <p:txBody>
-          <a:bodyPr wrap="square" lIns="0" tIns="0" rIns="0" bIns="0" anchor="t">
+          <a:bodyPr wrap="square" anchor="t" lIns="0" rIns="0" tIns="0" bIns="0">
             <a:spAutoFit/>
           </a:bodyPr>
           <a:lstStyle/>
@@ -9567,7 +9464,7 @@
           <a:noFill/>
         </p:spPr>
         <p:txBody>
-          <a:bodyPr wrap="square" lIns="0" tIns="0" rIns="0" bIns="0" anchor="t">
+          <a:bodyPr wrap="square" anchor="t" lIns="0" rIns="0" tIns="0" bIns="0">
             <a:spAutoFit/>
           </a:bodyPr>
           <a:lstStyle/>
@@ -9598,7 +9495,7 @@
 </file>
 
 <file path=ppt/slides/slide3.xml><?xml version="1.0" encoding="utf-8"?>
-<p:sld xmlns:a="http://schemas.openxmlformats.org/drawingml/2006/main" xmlns:r="http://schemas.openxmlformats.org/officeDocument/2006/relationships" xmlns:p="http://schemas.openxmlformats.org/presentationml/2006/main">
+<p:sld xmlns:a="http://schemas.openxmlformats.org/drawingml/2006/main" xmlns:p="http://schemas.openxmlformats.org/presentationml/2006/main" xmlns:r="http://schemas.openxmlformats.org/officeDocument/2006/relationships">
   <p:cSld>
     <p:spTree>
       <p:nvGrpSpPr>
@@ -9606,14 +9503,7 @@
         <p:cNvGrpSpPr/>
         <p:nvPr/>
       </p:nvGrpSpPr>
-      <p:grpSpPr>
-        <a:xfrm>
-          <a:off x="0" y="0"/>
-          <a:ext cx="0" cy="0"/>
-          <a:chOff x="0" y="0"/>
-          <a:chExt cx="0" cy="0"/>
-        </a:xfrm>
-      </p:grpSpPr>
+      <p:grpSpPr/>
       <p:sp>
         <p:nvSpPr>
           <p:cNvPr id="2" name="Rectangle 1"/>
@@ -9655,7 +9545,6 @@
           <a:lstStyle/>
           <a:p>
             <a:pPr algn="ctr"/>
-            <a:endParaRPr/>
           </a:p>
         </p:txBody>
       </p:sp>
@@ -9676,7 +9565,7 @@
           <a:noFill/>
         </p:spPr>
         <p:txBody>
-          <a:bodyPr wrap="square" lIns="0" tIns="0" rIns="0" bIns="0" anchor="t">
+          <a:bodyPr wrap="square" anchor="t" lIns="0" rIns="0" tIns="0" bIns="0">
             <a:spAutoFit/>
           </a:bodyPr>
           <a:lstStyle/>
@@ -9715,7 +9604,7 @@
           <a:noFill/>
         </p:spPr>
         <p:txBody>
-          <a:bodyPr wrap="square" lIns="0" tIns="0" rIns="0" bIns="0" anchor="t">
+          <a:bodyPr wrap="square" anchor="t" lIns="0" rIns="0" tIns="0" bIns="0">
             <a:spAutoFit/>
           </a:bodyPr>
           <a:lstStyle/>
@@ -9782,7 +9671,6 @@
           <a:lstStyle/>
           <a:p>
             <a:pPr algn="ctr"/>
-            <a:endParaRPr/>
           </a:p>
         </p:txBody>
       </p:sp>
@@ -9829,7 +9717,6 @@
           <a:lstStyle/>
           <a:p>
             <a:pPr algn="ctr"/>
-            <a:endParaRPr/>
           </a:p>
         </p:txBody>
       </p:sp>
@@ -9850,7 +9737,7 @@
           <a:noFill/>
         </p:spPr>
         <p:txBody>
-          <a:bodyPr wrap="square" lIns="0" tIns="0" rIns="0" bIns="0" anchor="t">
+          <a:bodyPr wrap="square" anchor="t" lIns="0" rIns="0" tIns="0" bIns="0">
             <a:spAutoFit/>
           </a:bodyPr>
           <a:lstStyle/>
@@ -9911,7 +9798,7 @@
           </a:fontRef>
         </p:style>
         <p:txBody>
-          <a:bodyPr wrap="none" lIns="50800" tIns="12700" rIns="50800" bIns="12700" rtlCol="0" anchor="ctr"/>
+          <a:bodyPr rtlCol="0" anchor="ctr" wrap="none" lIns="50800" rIns="50800" tIns="12700" bIns="12700"/>
           <a:lstStyle/>
           <a:p>
             <a:pPr algn="ctr"/>
@@ -9944,7 +9831,7 @@
           <a:noFill/>
         </p:spPr>
         <p:txBody>
-          <a:bodyPr wrap="square" lIns="0" tIns="0" rIns="0" bIns="0">
+          <a:bodyPr wrap="square" lIns="0" rIns="0" tIns="0" bIns="0">
             <a:spAutoFit/>
           </a:bodyPr>
           <a:lstStyle/>
@@ -10107,7 +9994,6 @@
           <a:lstStyle/>
           <a:p>
             <a:pPr algn="ctr"/>
-            <a:endParaRPr/>
           </a:p>
         </p:txBody>
       </p:sp>
@@ -10154,7 +10040,6 @@
           <a:lstStyle/>
           <a:p>
             <a:pPr algn="ctr"/>
-            <a:endParaRPr/>
           </a:p>
         </p:txBody>
       </p:sp>
@@ -10175,7 +10060,7 @@
           <a:noFill/>
         </p:spPr>
         <p:txBody>
-          <a:bodyPr wrap="square" lIns="0" tIns="0" rIns="0" bIns="0" anchor="t">
+          <a:bodyPr wrap="square" anchor="t" lIns="0" rIns="0" tIns="0" bIns="0">
             <a:spAutoFit/>
           </a:bodyPr>
           <a:lstStyle/>
@@ -10214,7 +10099,7 @@
             </a:avLst>
           </a:prstGeom>
           <a:solidFill>
-            <a:srgbClr val="FFF8E1"/>
+            <a:srgbClr val="E8F5E9"/>
           </a:solidFill>
           <a:ln>
             <a:noFill/>
@@ -10236,19 +10121,18 @@
           </a:fontRef>
         </p:style>
         <p:txBody>
-          <a:bodyPr wrap="none" lIns="50800" tIns="12700" rIns="50800" bIns="12700" rtlCol="0" anchor="ctr"/>
+          <a:bodyPr rtlCol="0" anchor="ctr" wrap="none" lIns="50800" rIns="50800" tIns="12700" bIns="12700"/>
           <a:lstStyle/>
           <a:p>
             <a:pPr algn="ctr"/>
             <a:r>
               <a:rPr sz="1100" b="1">
                 <a:solidFill>
-                  <a:srgbClr val="E68A00"/>
-                </a:solidFill>
-                <a:latin typeface="Calibri"/>
-              </a:rPr>
-              <a:t>ENGINE LIVE
-NEEDS YOUR DATA</a:t>
+                  <a:srgbClr val="2E7D32"/>
+                </a:solidFill>
+                <a:latin typeface="Calibri"/>
+              </a:rPr>
+              <a:t>LIVE</a:t>
             </a:r>
           </a:p>
         </p:txBody>
@@ -10270,7 +10154,7 @@
           <a:noFill/>
         </p:spPr>
         <p:txBody>
-          <a:bodyPr wrap="square" lIns="0" tIns="0" rIns="0" bIns="0">
+          <a:bodyPr wrap="square" lIns="0" rIns="0" tIns="0" bIns="0">
             <a:spAutoFit/>
           </a:bodyPr>
           <a:lstStyle/>
@@ -10299,7 +10183,7 @@
                 </a:solidFill>
                 <a:latin typeface="Calibri"/>
               </a:rPr>
-              <a:t>Real VAHAN RTO -&gt; zone mapping (documented)</a:t>
+              <a:t>Real VAHAN RTO x fuel + RTO x class exports</a:t>
             </a:r>
           </a:p>
           <a:p>
@@ -10327,7 +10211,7 @@
                 </a:solidFill>
                 <a:latin typeface="Calibri"/>
               </a:rPr>
-              <a:t>Formula: count x emission factor x distance</a:t>
+              <a:t>Real BS6 emission limits + 0 g/km for EVs</a:t>
             </a:r>
           </a:p>
           <a:p>
@@ -10355,7 +10239,7 @@
                 </a:solidFill>
                 <a:latin typeface="Calibri"/>
               </a:rPr>
-              <a:t>Zero fabricated numbers — fails loudly if data missing</a:t>
+              <a:t>Genuine per-zone variation, no more placeholder</a:t>
             </a:r>
           </a:p>
           <a:p>
@@ -10433,7 +10317,6 @@
           <a:lstStyle/>
           <a:p>
             <a:pPr algn="ctr"/>
-            <a:endParaRPr/>
           </a:p>
         </p:txBody>
       </p:sp>
@@ -10480,7 +10363,6 @@
           <a:lstStyle/>
           <a:p>
             <a:pPr algn="ctr"/>
-            <a:endParaRPr/>
           </a:p>
         </p:txBody>
       </p:sp>
@@ -10501,7 +10383,7 @@
           <a:noFill/>
         </p:spPr>
         <p:txBody>
-          <a:bodyPr wrap="square" lIns="0" tIns="0" rIns="0" bIns="0" anchor="t">
+          <a:bodyPr wrap="square" anchor="t" lIns="0" rIns="0" tIns="0" bIns="0">
             <a:spAutoFit/>
           </a:bodyPr>
           <a:lstStyle/>
@@ -10562,7 +10444,7 @@
           </a:fontRef>
         </p:style>
         <p:txBody>
-          <a:bodyPr wrap="none" lIns="50800" tIns="12700" rIns="50800" bIns="12700" rtlCol="0" anchor="ctr"/>
+          <a:bodyPr rtlCol="0" anchor="ctr" wrap="none" lIns="50800" rIns="50800" tIns="12700" bIns="12700"/>
           <a:lstStyle/>
           <a:p>
             <a:pPr algn="ctr"/>
@@ -10595,7 +10477,7 @@
           <a:noFill/>
         </p:spPr>
         <p:txBody>
-          <a:bodyPr wrap="square" lIns="0" tIns="0" rIns="0" bIns="0">
+          <a:bodyPr wrap="square" lIns="0" rIns="0" tIns="0" bIns="0">
             <a:spAutoFit/>
           </a:bodyPr>
           <a:lstStyle/>
@@ -10730,7 +10612,7 @@
           <a:noFill/>
         </p:spPr>
         <p:txBody>
-          <a:bodyPr wrap="square" lIns="0" tIns="0" rIns="0" bIns="0" anchor="t">
+          <a:bodyPr wrap="square" anchor="t" lIns="0" rIns="0" tIns="0" bIns="0">
             <a:spAutoFit/>
           </a:bodyPr>
           <a:lstStyle/>
@@ -10769,7 +10651,7 @@
           <a:noFill/>
         </p:spPr>
         <p:txBody>
-          <a:bodyPr wrap="square" lIns="0" tIns="0" rIns="0" bIns="0" anchor="t">
+          <a:bodyPr wrap="square" anchor="t" lIns="0" rIns="0" tIns="0" bIns="0">
             <a:spAutoFit/>
           </a:bodyPr>
           <a:lstStyle/>
@@ -10800,7 +10682,7 @@
 </file>
 
 <file path=ppt/slides/slide4.xml><?xml version="1.0" encoding="utf-8"?>
-<p:sld xmlns:a="http://schemas.openxmlformats.org/drawingml/2006/main" xmlns:r="http://schemas.openxmlformats.org/officeDocument/2006/relationships" xmlns:p="http://schemas.openxmlformats.org/presentationml/2006/main">
+<p:sld xmlns:a="http://schemas.openxmlformats.org/drawingml/2006/main" xmlns:p="http://schemas.openxmlformats.org/presentationml/2006/main" xmlns:r="http://schemas.openxmlformats.org/officeDocument/2006/relationships">
   <p:cSld>
     <p:spTree>
       <p:nvGrpSpPr>
@@ -10808,14 +10690,7 @@
         <p:cNvGrpSpPr/>
         <p:nvPr/>
       </p:nvGrpSpPr>
-      <p:grpSpPr>
-        <a:xfrm>
-          <a:off x="0" y="0"/>
-          <a:ext cx="0" cy="0"/>
-          <a:chOff x="0" y="0"/>
-          <a:chExt cx="0" cy="0"/>
-        </a:xfrm>
-      </p:grpSpPr>
+      <p:grpSpPr/>
       <p:sp>
         <p:nvSpPr>
           <p:cNvPr id="2" name="Rectangle 1"/>
@@ -10857,7 +10732,6 @@
           <a:lstStyle/>
           <a:p>
             <a:pPr algn="ctr"/>
-            <a:endParaRPr/>
           </a:p>
         </p:txBody>
       </p:sp>
@@ -10878,7 +10752,7 @@
           <a:noFill/>
         </p:spPr>
         <p:txBody>
-          <a:bodyPr wrap="square" lIns="0" tIns="0" rIns="0" bIns="0" anchor="t">
+          <a:bodyPr wrap="square" anchor="t" lIns="0" rIns="0" tIns="0" bIns="0">
             <a:spAutoFit/>
           </a:bodyPr>
           <a:lstStyle/>
@@ -10917,7 +10791,7 @@
           <a:noFill/>
         </p:spPr>
         <p:txBody>
-          <a:bodyPr wrap="square" lIns="0" tIns="0" rIns="0" bIns="0" anchor="t">
+          <a:bodyPr wrap="square" anchor="t" lIns="0" rIns="0" tIns="0" bIns="0">
             <a:spAutoFit/>
           </a:bodyPr>
           <a:lstStyle/>
@@ -10956,7 +10830,7 @@
           <a:noFill/>
         </p:spPr>
         <p:txBody>
-          <a:bodyPr wrap="square" lIns="0" tIns="0" rIns="0" bIns="0">
+          <a:bodyPr wrap="square" lIns="0" rIns="0" tIns="0" bIns="0">
             <a:spAutoFit/>
           </a:bodyPr>
           <a:lstStyle/>
@@ -11117,7 +10991,6 @@
           <a:lstStyle/>
           <a:p>
             <a:pPr algn="ctr"/>
-            <a:endParaRPr/>
           </a:p>
         </p:txBody>
       </p:sp>
@@ -11138,7 +11011,7 @@
           <a:noFill/>
         </p:spPr>
         <p:txBody>
-          <a:bodyPr wrap="square" lIns="0" tIns="0" rIns="0" bIns="0" anchor="t">
+          <a:bodyPr wrap="square" anchor="t" lIns="0" rIns="0" tIns="0" bIns="0">
             <a:spAutoFit/>
           </a:bodyPr>
           <a:lstStyle/>
@@ -11203,7 +11076,6 @@
           <a:lstStyle/>
           <a:p>
             <a:pPr algn="ctr"/>
-            <a:endParaRPr/>
           </a:p>
         </p:txBody>
       </p:sp>
@@ -11224,7 +11096,7 @@
           <a:noFill/>
         </p:spPr>
         <p:txBody>
-          <a:bodyPr wrap="square" lIns="0" tIns="0" rIns="0" bIns="0" anchor="ctr">
+          <a:bodyPr wrap="square" anchor="ctr" lIns="0" rIns="0" tIns="0" bIns="0">
             <a:spAutoFit/>
           </a:bodyPr>
           <a:lstStyle/>
@@ -11263,7 +11135,7 @@
           <a:noFill/>
         </p:spPr>
         <p:txBody>
-          <a:bodyPr wrap="square" lIns="0" tIns="0" rIns="0" bIns="0" anchor="ctr">
+          <a:bodyPr wrap="square" anchor="ctr" lIns="0" rIns="0" tIns="0" bIns="0">
             <a:spAutoFit/>
           </a:bodyPr>
           <a:lstStyle/>
@@ -11302,7 +11174,7 @@
           <a:noFill/>
         </p:spPr>
         <p:txBody>
-          <a:bodyPr wrap="square" lIns="0" tIns="0" rIns="0" bIns="0" anchor="ctr">
+          <a:bodyPr wrap="square" anchor="ctr" lIns="0" rIns="0" tIns="0" bIns="0">
             <a:spAutoFit/>
           </a:bodyPr>
           <a:lstStyle/>
@@ -11367,7 +11239,6 @@
           <a:lstStyle/>
           <a:p>
             <a:pPr algn="ctr"/>
-            <a:endParaRPr/>
           </a:p>
         </p:txBody>
       </p:sp>
@@ -11388,7 +11259,7 @@
           <a:noFill/>
         </p:spPr>
         <p:txBody>
-          <a:bodyPr wrap="square" lIns="0" tIns="0" rIns="0" bIns="0" anchor="ctr">
+          <a:bodyPr wrap="square" anchor="ctr" lIns="0" rIns="0" tIns="0" bIns="0">
             <a:spAutoFit/>
           </a:bodyPr>
           <a:lstStyle/>
@@ -11427,7 +11298,7 @@
           <a:noFill/>
         </p:spPr>
         <p:txBody>
-          <a:bodyPr wrap="square" lIns="0" tIns="0" rIns="0" bIns="0" anchor="ctr">
+          <a:bodyPr wrap="square" anchor="ctr" lIns="0" rIns="0" tIns="0" bIns="0">
             <a:spAutoFit/>
           </a:bodyPr>
           <a:lstStyle/>
@@ -11466,7 +11337,7 @@
           <a:noFill/>
         </p:spPr>
         <p:txBody>
-          <a:bodyPr wrap="square" lIns="0" tIns="0" rIns="0" bIns="0" anchor="ctr">
+          <a:bodyPr wrap="square" anchor="ctr" lIns="0" rIns="0" tIns="0" bIns="0">
             <a:spAutoFit/>
           </a:bodyPr>
           <a:lstStyle/>
@@ -11531,7 +11402,6 @@
           <a:lstStyle/>
           <a:p>
             <a:pPr algn="ctr"/>
-            <a:endParaRPr/>
           </a:p>
         </p:txBody>
       </p:sp>
@@ -11552,7 +11422,7 @@
           <a:noFill/>
         </p:spPr>
         <p:txBody>
-          <a:bodyPr wrap="square" lIns="0" tIns="0" rIns="0" bIns="0" anchor="ctr">
+          <a:bodyPr wrap="square" anchor="ctr" lIns="0" rIns="0" tIns="0" bIns="0">
             <a:spAutoFit/>
           </a:bodyPr>
           <a:lstStyle/>
@@ -11591,7 +11461,7 @@
           <a:noFill/>
         </p:spPr>
         <p:txBody>
-          <a:bodyPr wrap="square" lIns="0" tIns="0" rIns="0" bIns="0" anchor="ctr">
+          <a:bodyPr wrap="square" anchor="ctr" lIns="0" rIns="0" tIns="0" bIns="0">
             <a:spAutoFit/>
           </a:bodyPr>
           <a:lstStyle/>
@@ -11630,7 +11500,7 @@
           <a:noFill/>
         </p:spPr>
         <p:txBody>
-          <a:bodyPr wrap="square" lIns="0" tIns="0" rIns="0" bIns="0" anchor="ctr">
+          <a:bodyPr wrap="square" anchor="ctr" lIns="0" rIns="0" tIns="0" bIns="0">
             <a:spAutoFit/>
           </a:bodyPr>
           <a:lstStyle/>
@@ -11695,7 +11565,6 @@
           <a:lstStyle/>
           <a:p>
             <a:pPr algn="ctr"/>
-            <a:endParaRPr/>
           </a:p>
         </p:txBody>
       </p:sp>
@@ -11716,7 +11585,7 @@
           <a:noFill/>
         </p:spPr>
         <p:txBody>
-          <a:bodyPr wrap="square" lIns="0" tIns="0" rIns="0" bIns="0" anchor="ctr">
+          <a:bodyPr wrap="square" anchor="ctr" lIns="0" rIns="0" tIns="0" bIns="0">
             <a:spAutoFit/>
           </a:bodyPr>
           <a:lstStyle/>
@@ -11755,7 +11624,7 @@
           <a:noFill/>
         </p:spPr>
         <p:txBody>
-          <a:bodyPr wrap="square" lIns="0" tIns="0" rIns="0" bIns="0" anchor="ctr">
+          <a:bodyPr wrap="square" anchor="ctr" lIns="0" rIns="0" tIns="0" bIns="0">
             <a:spAutoFit/>
           </a:bodyPr>
           <a:lstStyle/>
@@ -11794,7 +11663,7 @@
           <a:noFill/>
         </p:spPr>
         <p:txBody>
-          <a:bodyPr wrap="square" lIns="0" tIns="0" rIns="0" bIns="0" anchor="ctr">
+          <a:bodyPr wrap="square" anchor="ctr" lIns="0" rIns="0" tIns="0" bIns="0">
             <a:spAutoFit/>
           </a:bodyPr>
           <a:lstStyle/>
@@ -11833,7 +11702,7 @@
           <a:noFill/>
         </p:spPr>
         <p:txBody>
-          <a:bodyPr wrap="square" lIns="0" tIns="0" rIns="0" bIns="0" anchor="t">
+          <a:bodyPr wrap="square" anchor="t" lIns="0" rIns="0" tIns="0" bIns="0">
             <a:spAutoFit/>
           </a:bodyPr>
           <a:lstStyle/>
@@ -11898,7 +11767,6 @@
           <a:lstStyle/>
           <a:p>
             <a:pPr algn="ctr"/>
-            <a:endParaRPr/>
           </a:p>
         </p:txBody>
       </p:sp>
@@ -11919,7 +11787,7 @@
           <a:noFill/>
         </p:spPr>
         <p:txBody>
-          <a:bodyPr wrap="square" lIns="0" tIns="0" rIns="0" bIns="0" anchor="t">
+          <a:bodyPr wrap="square" anchor="t" lIns="0" rIns="0" tIns="0" bIns="0">
             <a:spAutoFit/>
           </a:bodyPr>
           <a:lstStyle/>
@@ -11974,7 +11842,7 @@
           <a:noFill/>
         </p:spPr>
         <p:txBody>
-          <a:bodyPr wrap="square" lIns="0" tIns="0" rIns="0" bIns="0" anchor="t">
+          <a:bodyPr wrap="square" anchor="t" lIns="0" rIns="0" tIns="0" bIns="0">
             <a:spAutoFit/>
           </a:bodyPr>
           <a:lstStyle/>
@@ -12013,7 +11881,7 @@
           <a:noFill/>
         </p:spPr>
         <p:txBody>
-          <a:bodyPr wrap="square" lIns="0" tIns="0" rIns="0" bIns="0" anchor="t">
+          <a:bodyPr wrap="square" anchor="t" lIns="0" rIns="0" tIns="0" bIns="0">
             <a:spAutoFit/>
           </a:bodyPr>
           <a:lstStyle/>
@@ -12044,7 +11912,7 @@
 </file>
 
 <file path=ppt/slides/slide5.xml><?xml version="1.0" encoding="utf-8"?>
-<p:sld xmlns:a="http://schemas.openxmlformats.org/drawingml/2006/main" xmlns:r="http://schemas.openxmlformats.org/officeDocument/2006/relationships" xmlns:p="http://schemas.openxmlformats.org/presentationml/2006/main">
+<p:sld xmlns:a="http://schemas.openxmlformats.org/drawingml/2006/main" xmlns:p="http://schemas.openxmlformats.org/presentationml/2006/main" xmlns:r="http://schemas.openxmlformats.org/officeDocument/2006/relationships">
   <p:cSld>
     <p:spTree>
       <p:nvGrpSpPr>
@@ -12052,14 +11920,7 @@
         <p:cNvGrpSpPr/>
         <p:nvPr/>
       </p:nvGrpSpPr>
-      <p:grpSpPr>
-        <a:xfrm>
-          <a:off x="0" y="0"/>
-          <a:ext cx="0" cy="0"/>
-          <a:chOff x="0" y="0"/>
-          <a:chExt cx="0" cy="0"/>
-        </a:xfrm>
-      </p:grpSpPr>
+      <p:grpSpPr/>
       <p:sp>
         <p:nvSpPr>
           <p:cNvPr id="2" name="Rectangle 1"/>
@@ -12101,7 +11962,6 @@
           <a:lstStyle/>
           <a:p>
             <a:pPr algn="ctr"/>
-            <a:endParaRPr/>
           </a:p>
         </p:txBody>
       </p:sp>
@@ -12122,7 +11982,7 @@
           <a:noFill/>
         </p:spPr>
         <p:txBody>
-          <a:bodyPr wrap="square" lIns="0" tIns="0" rIns="0" bIns="0" anchor="t">
+          <a:bodyPr wrap="square" anchor="t" lIns="0" rIns="0" tIns="0" bIns="0">
             <a:spAutoFit/>
           </a:bodyPr>
           <a:lstStyle/>
@@ -12161,7 +12021,7 @@
           <a:noFill/>
         </p:spPr>
         <p:txBody>
-          <a:bodyPr wrap="square" lIns="0" tIns="0" rIns="0" bIns="0" anchor="t">
+          <a:bodyPr wrap="square" anchor="t" lIns="0" rIns="0" tIns="0" bIns="0">
             <a:spAutoFit/>
           </a:bodyPr>
           <a:lstStyle/>
@@ -12200,7 +12060,7 @@
           <a:noFill/>
         </p:spPr>
         <p:txBody>
-          <a:bodyPr wrap="square" lIns="0" tIns="0" rIns="0" bIns="0" anchor="t">
+          <a:bodyPr wrap="square" anchor="t" lIns="0" rIns="0" tIns="0" bIns="0">
             <a:spAutoFit/>
           </a:bodyPr>
           <a:lstStyle/>
@@ -12265,7 +12125,6 @@
           <a:lstStyle/>
           <a:p>
             <a:pPr algn="ctr"/>
-            <a:endParaRPr/>
           </a:p>
         </p:txBody>
       </p:sp>
@@ -12286,7 +12145,7 @@
           <a:noFill/>
         </p:spPr>
         <p:txBody>
-          <a:bodyPr wrap="square" lIns="0" tIns="0" rIns="0" bIns="0" anchor="t">
+          <a:bodyPr wrap="square" anchor="t" lIns="0" rIns="0" tIns="0" bIns="0">
             <a:spAutoFit/>
           </a:bodyPr>
           <a:lstStyle/>
@@ -12325,7 +12184,7 @@
           <a:noFill/>
         </p:spPr>
         <p:txBody>
-          <a:bodyPr wrap="square" lIns="0" tIns="0" rIns="0" bIns="0" anchor="t">
+          <a:bodyPr wrap="square" anchor="t" lIns="0" rIns="0" tIns="0" bIns="0">
             <a:spAutoFit/>
           </a:bodyPr>
           <a:lstStyle/>
@@ -12364,7 +12223,7 @@
           <a:noFill/>
         </p:spPr>
         <p:txBody>
-          <a:bodyPr wrap="square" lIns="0" tIns="0" rIns="0" bIns="0" anchor="ctr">
+          <a:bodyPr wrap="square" anchor="ctr" lIns="0" rIns="0" tIns="0" bIns="0">
             <a:spAutoFit/>
           </a:bodyPr>
           <a:lstStyle/>
@@ -12429,7 +12288,6 @@
           <a:lstStyle/>
           <a:p>
             <a:pPr algn="ctr"/>
-            <a:endParaRPr/>
           </a:p>
         </p:txBody>
       </p:sp>
@@ -12450,7 +12308,7 @@
           <a:noFill/>
         </p:spPr>
         <p:txBody>
-          <a:bodyPr wrap="square" lIns="0" tIns="0" rIns="0" bIns="0" anchor="t">
+          <a:bodyPr wrap="square" anchor="t" lIns="0" rIns="0" tIns="0" bIns="0">
             <a:spAutoFit/>
           </a:bodyPr>
           <a:lstStyle/>
@@ -12489,7 +12347,7 @@
           <a:noFill/>
         </p:spPr>
         <p:txBody>
-          <a:bodyPr wrap="square" lIns="0" tIns="0" rIns="0" bIns="0" anchor="t">
+          <a:bodyPr wrap="square" anchor="t" lIns="0" rIns="0" tIns="0" bIns="0">
             <a:spAutoFit/>
           </a:bodyPr>
           <a:lstStyle/>
@@ -12528,7 +12386,7 @@
           <a:noFill/>
         </p:spPr>
         <p:txBody>
-          <a:bodyPr wrap="square" lIns="0" tIns="0" rIns="0" bIns="0" anchor="ctr">
+          <a:bodyPr wrap="square" anchor="ctr" lIns="0" rIns="0" tIns="0" bIns="0">
             <a:spAutoFit/>
           </a:bodyPr>
           <a:lstStyle/>
@@ -12593,7 +12451,6 @@
           <a:lstStyle/>
           <a:p>
             <a:pPr algn="ctr"/>
-            <a:endParaRPr/>
           </a:p>
         </p:txBody>
       </p:sp>
@@ -12614,7 +12471,7 @@
           <a:noFill/>
         </p:spPr>
         <p:txBody>
-          <a:bodyPr wrap="square" lIns="0" tIns="0" rIns="0" bIns="0" anchor="t">
+          <a:bodyPr wrap="square" anchor="t" lIns="0" rIns="0" tIns="0" bIns="0">
             <a:spAutoFit/>
           </a:bodyPr>
           <a:lstStyle/>
@@ -12653,7 +12510,7 @@
           <a:noFill/>
         </p:spPr>
         <p:txBody>
-          <a:bodyPr wrap="square" lIns="0" tIns="0" rIns="0" bIns="0" anchor="t">
+          <a:bodyPr wrap="square" anchor="t" lIns="0" rIns="0" tIns="0" bIns="0">
             <a:spAutoFit/>
           </a:bodyPr>
           <a:lstStyle/>
@@ -12692,7 +12549,7 @@
           <a:noFill/>
         </p:spPr>
         <p:txBody>
-          <a:bodyPr wrap="square" lIns="0" tIns="0" rIns="0" bIns="0" anchor="ctr">
+          <a:bodyPr wrap="square" anchor="ctr" lIns="0" rIns="0" tIns="0" bIns="0">
             <a:spAutoFit/>
           </a:bodyPr>
           <a:lstStyle/>
@@ -12757,7 +12614,6 @@
           <a:lstStyle/>
           <a:p>
             <a:pPr algn="ctr"/>
-            <a:endParaRPr/>
           </a:p>
         </p:txBody>
       </p:sp>
@@ -12778,7 +12634,7 @@
           <a:noFill/>
         </p:spPr>
         <p:txBody>
-          <a:bodyPr wrap="square" lIns="0" tIns="0" rIns="0" bIns="0" anchor="ctr">
+          <a:bodyPr wrap="square" anchor="ctr" lIns="0" rIns="0" tIns="0" bIns="0">
             <a:spAutoFit/>
           </a:bodyPr>
           <a:lstStyle/>
@@ -12833,7 +12689,7 @@
           <a:noFill/>
         </p:spPr>
         <p:txBody>
-          <a:bodyPr wrap="square" lIns="0" tIns="0" rIns="0" bIns="0" anchor="t">
+          <a:bodyPr wrap="square" anchor="t" lIns="0" rIns="0" tIns="0" bIns="0">
             <a:spAutoFit/>
           </a:bodyPr>
           <a:lstStyle/>
@@ -12844,13 +12700,13 @@
               </a:lnSpc>
             </a:pPr>
             <a:r>
-              <a:rPr sz="1200" b="1" i="0">
+              <a:rPr sz="1150" b="1" i="0">
                 <a:solidFill>
                   <a:srgbClr val="1E2761"/>
                 </a:solidFill>
                 <a:latin typeface="Calibri"/>
               </a:rPr>
-              <a:t>WHAT'S NEW THIS SESSION</a:t>
+              <a:t>REAL VAHAN DATA — NO LONGER A PLACEHOLDER</a:t>
             </a:r>
           </a:p>
         </p:txBody>
@@ -12863,30 +12719,30 @@
         </p:nvSpPr>
         <p:spPr>
           <a:xfrm>
-            <a:off x="548640" y="3108960"/>
-            <a:ext cx="5486400" cy="2834640"/>
-          </a:xfrm>
-          <a:prstGeom prst="rect">
-            <a:avLst/>
-          </a:prstGeom>
-          <a:noFill/>
-        </p:spPr>
-        <p:txBody>
-          <a:bodyPr wrap="square" lIns="0" tIns="0" rIns="0" bIns="0">
+            <a:off x="548640" y="3090672"/>
+            <a:ext cx="5486400" cy="2880360"/>
+          </a:xfrm>
+          <a:prstGeom prst="rect">
+            <a:avLst/>
+          </a:prstGeom>
+          <a:noFill/>
+        </p:spPr>
+        <p:txBody>
+          <a:bodyPr wrap="square" lIns="0" rIns="0" tIns="0" bIns="0">
             <a:spAutoFit/>
           </a:bodyPr>
           <a:lstStyle/>
           <a:p>
             <a:pPr>
               <a:lnSpc>
-                <a:spcPct val="115000"/>
+                <a:spcPct val="112000"/>
               </a:lnSpc>
               <a:spcAft>
-                <a:spcPts val="900"/>
+                <a:spcPts val="800"/>
               </a:spcAft>
             </a:pPr>
             <a:r>
-              <a:rPr sz="1200" b="1">
+              <a:rPr sz="1150" b="1">
                 <a:solidFill>
                   <a:srgbClr val="1E2761"/>
                 </a:solidFill>
@@ -12895,26 +12751,26 @@
               <a:t>•  </a:t>
             </a:r>
             <a:r>
-              <a:rPr sz="1200">
+              <a:rPr sz="1150">
                 <a:solidFill>
                   <a:srgbClr val="1A1A1A"/>
                 </a:solidFill>
                 <a:latin typeface="Calibri"/>
               </a:rPr>
-              <a:t>Pulled the real, current Delhi RTO list live from vahan.parivahan.gov.in (13 vehicle-registering offices, DL1-DL13).</a:t>
+              <a:t>Real VAHAN Tabular Summary exports: RTO x fuel-type AND RTO x vehicle-class, all 10 relevant RTOs, accessed 2026-07-21.</a:t>
             </a:r>
           </a:p>
           <a:p>
             <a:pPr>
               <a:lnSpc>
-                <a:spcPct val="115000"/>
+                <a:spcPct val="112000"/>
               </a:lnSpc>
               <a:spcAft>
-                <a:spcPts val="900"/>
+                <a:spcPts val="800"/>
               </a:spcAft>
             </a:pPr>
             <a:r>
-              <a:rPr sz="1200" b="1">
+              <a:rPr sz="1150" b="1">
                 <a:solidFill>
                   <a:srgbClr val="1E2761"/>
                 </a:solidFill>
@@ -12923,26 +12779,26 @@
               <a:t>•  </a:t>
             </a:r>
             <a:r>
-              <a:rPr sz="1200">
+              <a:rPr sz="1150">
                 <a:solidFill>
                   <a:srgbClr val="1A1A1A"/>
                 </a:solidFill>
                 <a:latin typeface="Calibri"/>
               </a:rPr>
-              <a:t>Built a documented, editable nearest-RTO -&gt; zone mapping — 2 zones are exact name matches (Wazirpur, Dwarka); the rest are cited geographic judgment calls, visible in one file.</a:t>
+              <a:t>VAHAN exposes two marginals, not the joint breakdown — combined via a documented, disclosed estimation method (real_registrations.py), restricted to fuel types with a real cited emission factor.</a:t>
             </a:r>
           </a:p>
           <a:p>
             <a:pPr>
               <a:lnSpc>
-                <a:spcPct val="115000"/>
+                <a:spcPct val="112000"/>
               </a:lnSpc>
               <a:spcAft>
-                <a:spcPts val="900"/>
+                <a:spcPts val="800"/>
               </a:spcAft>
             </a:pPr>
             <a:r>
-              <a:rPr sz="1200" b="1">
+              <a:rPr sz="1150" b="1">
                 <a:solidFill>
                   <a:srgbClr val="1E2761"/>
                 </a:solidFill>
@@ -12951,26 +12807,26 @@
               <a:t>•  </a:t>
             </a:r>
             <a:r>
-              <a:rPr sz="1200">
+              <a:rPr sz="1150">
                 <a:solidFill>
                   <a:srgbClr val="1A1A1A"/>
                 </a:solidFill>
                 <a:latin typeface="Calibri"/>
               </a:rPr>
-              <a:t>When one RTO is nearest to 2 zones, its count is split evenly — never double-counted.</a:t>
+              <a:t>Electric vehicles: real 0 g/km factor (physical fact — no tailpipe on a battery drivetrain), so EVs are counted, not silently dropped.</a:t>
             </a:r>
           </a:p>
           <a:p>
             <a:pPr>
               <a:lnSpc>
-                <a:spcPct val="115000"/>
+                <a:spcPct val="112000"/>
               </a:lnSpc>
               <a:spcAft>
-                <a:spcPts val="900"/>
+                <a:spcPts val="800"/>
               </a:spcAft>
             </a:pPr>
             <a:r>
-              <a:rPr sz="1200" b="1">
+              <a:rPr sz="1150" b="1">
                 <a:solidFill>
                   <a:srgbClr val="1E2761"/>
                 </a:solidFill>
@@ -12979,13 +12835,13 @@
               <a:t>•  </a:t>
             </a:r>
             <a:r>
-              <a:rPr sz="1200">
+              <a:rPr sz="1150">
                 <a:solidFill>
                   <a:srgbClr val="1A1A1A"/>
                 </a:solidFill>
                 <a:latin typeface="Calibri"/>
               </a:rPr>
-              <a:t>Compatibility: installs the forecasting module in editable mode purely to share its 13-zone list — zero duplicated zone names anywhere.</a:t>
+              <a:t>Result: genuine per-zone variation — RK Puram 1.00 (highest) down to Anand Vihar/Vivek Vihar 0.19 — not the flat placeholder from before.</a:t>
             </a:r>
           </a:p>
         </p:txBody>
@@ -13033,7 +12889,6 @@
           <a:lstStyle/>
           <a:p>
             <a:pPr algn="ctr"/>
-            <a:endParaRPr/>
           </a:p>
         </p:txBody>
       </p:sp>
@@ -13054,7 +12909,7 @@
           <a:noFill/>
         </p:spPr>
         <p:txBody>
-          <a:bodyPr wrap="square" lIns="0" tIns="0" rIns="0" bIns="0" anchor="t">
+          <a:bodyPr wrap="square" anchor="t" lIns="0" rIns="0" tIns="0" bIns="0">
             <a:spAutoFit/>
           </a:bodyPr>
           <a:lstStyle/>
@@ -13093,7 +12948,7 @@
           <a:noFill/>
         </p:spPr>
         <p:txBody>
-          <a:bodyPr wrap="square" lIns="0" tIns="0" rIns="0" bIns="0" anchor="t">
+          <a:bodyPr wrap="square" anchor="t" lIns="0" rIns="0" tIns="0" bIns="0">
             <a:spAutoFit/>
           </a:bodyPr>
           <a:lstStyle/>
@@ -13110,7 +12965,7 @@
                 </a:solidFill>
                 <a:latin typeface="Calibri"/>
               </a:rPr>
-              <a:t>Emission factors (ARAI/CPCB)</a:t>
+              <a:t>Emission factors</a:t>
             </a:r>
           </a:p>
         </p:txBody>
@@ -13132,7 +12987,7 @@
           <a:noFill/>
         </p:spPr>
         <p:txBody>
-          <a:bodyPr wrap="square" lIns="0" tIns="0" rIns="0" bIns="0" anchor="t">
+          <a:bodyPr wrap="square" anchor="t" lIns="0" rIns="0" tIns="0" bIns="0">
             <a:spAutoFit/>
           </a:bodyPr>
           <a:lstStyle/>
@@ -13149,7 +13004,7 @@
                 </a:solidFill>
                 <a:latin typeface="Calibri"/>
               </a:rPr>
-              <a:t>Real cited CSV input required — never guessed</a:t>
+              <a:t>Real BS6 regulatory limits + EV=0; full ARAI table still needed</a:t>
             </a:r>
           </a:p>
         </p:txBody>
@@ -13171,7 +13026,7 @@
           <a:noFill/>
         </p:spPr>
         <p:txBody>
-          <a:bodyPr wrap="square" lIns="0" tIns="0" rIns="0" bIns="0" anchor="t">
+          <a:bodyPr wrap="square" anchor="t" lIns="0" rIns="0" tIns="0" bIns="0">
             <a:spAutoFit/>
           </a:bodyPr>
           <a:lstStyle/>
@@ -13188,7 +13043,7 @@
                 </a:solidFill>
                 <a:latin typeface="Calibri"/>
               </a:rPr>
-              <a:t>Avg. distance (transport surveys)</a:t>
+              <a:t>Avg. distance</a:t>
             </a:r>
           </a:p>
         </p:txBody>
@@ -13210,7 +13065,7 @@
           <a:noFill/>
         </p:spPr>
         <p:txBody>
-          <a:bodyPr wrap="square" lIns="0" tIns="0" rIns="0" bIns="0" anchor="t">
+          <a:bodyPr wrap="square" anchor="t" lIns="0" rIns="0" tIns="0" bIns="0">
             <a:spAutoFit/>
           </a:bodyPr>
           <a:lstStyle/>
@@ -13227,7 +13082,7 @@
                 </a:solidFill>
                 <a:latin typeface="Calibri"/>
               </a:rPr>
-              <a:t>Real cited CSV input required — never guessed</a:t>
+              <a:t>Real 2-wheeler study cited; reused for cars, flagged not distinct</a:t>
             </a:r>
           </a:p>
         </p:txBody>
@@ -13249,7 +13104,7 @@
           <a:noFill/>
         </p:spPr>
         <p:txBody>
-          <a:bodyPr wrap="square" lIns="0" tIns="0" rIns="0" bIns="0" anchor="t">
+          <a:bodyPr wrap="square" anchor="t" lIns="0" rIns="0" tIns="0" bIns="0">
             <a:spAutoFit/>
           </a:bodyPr>
           <a:lstStyle/>
@@ -13266,7 +13121,7 @@
                 </a:solidFill>
                 <a:latin typeface="Calibri"/>
               </a:rPr>
-              <a:t>Vehicle counts (VAHAN)</a:t>
+              <a:t>Vehicle counts</a:t>
             </a:r>
           </a:p>
         </p:txBody>
@@ -13288,7 +13143,7 @@
           <a:noFill/>
         </p:spPr>
         <p:txBody>
-          <a:bodyPr wrap="square" lIns="0" tIns="0" rIns="0" bIns="0" anchor="t">
+          <a:bodyPr wrap="square" anchor="t" lIns="0" rIns="0" tIns="0" bIns="0">
             <a:spAutoFit/>
           </a:bodyPr>
           <a:lstStyle/>
@@ -13305,7 +13160,7 @@
                 </a:solidFill>
                 <a:latin typeface="Calibri"/>
               </a:rPr>
-              <a:t>Always real, user-supplied, source_citation enforced</a:t>
+              <a:t>Real VAHAN per-RTO data; category x fuel is an estimate, disclosed</a:t>
             </a:r>
           </a:p>
         </p:txBody>
@@ -13327,7 +13182,7 @@
           <a:noFill/>
         </p:spPr>
         <p:txBody>
-          <a:bodyPr wrap="square" lIns="0" tIns="0" rIns="0" bIns="0" anchor="t">
+          <a:bodyPr wrap="square" anchor="t" lIns="0" rIns="0" tIns="0" bIns="0">
             <a:spAutoFit/>
           </a:bodyPr>
           <a:lstStyle/>
@@ -13366,7 +13221,7 @@
           <a:noFill/>
         </p:spPr>
         <p:txBody>
-          <a:bodyPr wrap="square" lIns="0" tIns="0" rIns="0" bIns="0" anchor="t">
+          <a:bodyPr wrap="square" anchor="t" lIns="0" rIns="0" tIns="0" bIns="0">
             <a:spAutoFit/>
           </a:bodyPr>
           <a:lstStyle/>
@@ -13405,7 +13260,7 @@
           <a:noFill/>
         </p:spPr>
         <p:txBody>
-          <a:bodyPr wrap="square" lIns="0" tIns="0" rIns="0" bIns="0" anchor="t">
+          <a:bodyPr wrap="square" anchor="t" lIns="0" rIns="0" tIns="0" bIns="0">
             <a:spAutoFit/>
           </a:bodyPr>
           <a:lstStyle/>
@@ -13444,7 +13299,7 @@
           <a:noFill/>
         </p:spPr>
         <p:txBody>
-          <a:bodyPr wrap="square" lIns="0" tIns="0" rIns="0" bIns="0" anchor="t">
+          <a:bodyPr wrap="square" anchor="t" lIns="0" rIns="0" tIns="0" bIns="0">
             <a:spAutoFit/>
           </a:bodyPr>
           <a:lstStyle/>
@@ -13483,7 +13338,7 @@
           <a:noFill/>
         </p:spPr>
         <p:txBody>
-          <a:bodyPr wrap="square" lIns="0" tIns="0" rIns="0" bIns="0" anchor="t">
+          <a:bodyPr wrap="square" anchor="t" lIns="0" rIns="0" tIns="0" bIns="0">
             <a:spAutoFit/>
           </a:bodyPr>
           <a:lstStyle/>
@@ -13500,7 +13355,7 @@
                 </a:solidFill>
                 <a:latin typeface="Calibri"/>
               </a:rPr>
-              <a:t>Status: pipeline errors out with instructions until real data is supplied — never produces a fabricated chart or number.</a:t>
+              <a:t>Without real or demo data the pipeline errors out with instructions rather than fabricate.</a:t>
             </a:r>
           </a:p>
         </p:txBody>
@@ -13522,7 +13377,7 @@
           <a:noFill/>
         </p:spPr>
         <p:txBody>
-          <a:bodyPr wrap="square" lIns="0" tIns="0" rIns="0" bIns="0" anchor="t">
+          <a:bodyPr wrap="square" anchor="t" lIns="0" rIns="0" tIns="0" bIns="0">
             <a:spAutoFit/>
           </a:bodyPr>
           <a:lstStyle/>
@@ -13553,7 +13408,7 @@
 </file>
 
 <file path=ppt/slides/slide6.xml><?xml version="1.0" encoding="utf-8"?>
-<p:sld xmlns:a="http://schemas.openxmlformats.org/drawingml/2006/main" xmlns:r="http://schemas.openxmlformats.org/officeDocument/2006/relationships" xmlns:p="http://schemas.openxmlformats.org/presentationml/2006/main">
+<p:sld xmlns:a="http://schemas.openxmlformats.org/drawingml/2006/main" xmlns:p="http://schemas.openxmlformats.org/presentationml/2006/main" xmlns:r="http://schemas.openxmlformats.org/officeDocument/2006/relationships">
   <p:cSld>
     <p:spTree>
       <p:nvGrpSpPr>
@@ -13561,14 +13416,7 @@
         <p:cNvGrpSpPr/>
         <p:nvPr/>
       </p:nvGrpSpPr>
-      <p:grpSpPr>
-        <a:xfrm>
-          <a:off x="0" y="0"/>
-          <a:ext cx="0" cy="0"/>
-          <a:chOff x="0" y="0"/>
-          <a:chExt cx="0" cy="0"/>
-        </a:xfrm>
-      </p:grpSpPr>
+      <p:grpSpPr/>
       <p:sp>
         <p:nvSpPr>
           <p:cNvPr id="2" name="Rectangle 1"/>
@@ -13610,7 +13458,6 @@
           <a:lstStyle/>
           <a:p>
             <a:pPr algn="ctr"/>
-            <a:endParaRPr/>
           </a:p>
         </p:txBody>
       </p:sp>
@@ -13631,7 +13478,7 @@
           <a:noFill/>
         </p:spPr>
         <p:txBody>
-          <a:bodyPr wrap="square" lIns="0" tIns="0" rIns="0" bIns="0" anchor="t">
+          <a:bodyPr wrap="square" anchor="t" lIns="0" rIns="0" tIns="0" bIns="0">
             <a:spAutoFit/>
           </a:bodyPr>
           <a:lstStyle/>
@@ -13670,7 +13517,7 @@
           <a:noFill/>
         </p:spPr>
         <p:txBody>
-          <a:bodyPr wrap="square" lIns="0" tIns="0" rIns="0" bIns="0" anchor="t">
+          <a:bodyPr wrap="square" anchor="t" lIns="0" rIns="0" tIns="0" bIns="0">
             <a:spAutoFit/>
           </a:bodyPr>
           <a:lstStyle/>
@@ -13733,7 +13580,6 @@
           <a:lstStyle/>
           <a:p>
             <a:pPr algn="ctr"/>
-            <a:endParaRPr/>
           </a:p>
         </p:txBody>
       </p:sp>
@@ -13754,7 +13600,7 @@
           <a:noFill/>
         </p:spPr>
         <p:txBody>
-          <a:bodyPr wrap="square" lIns="0" tIns="0" rIns="0" bIns="0" anchor="ctr">
+          <a:bodyPr wrap="square" anchor="ctr" lIns="0" rIns="0" tIns="0" bIns="0">
             <a:spAutoFit/>
           </a:bodyPr>
           <a:lstStyle/>
@@ -13793,7 +13639,7 @@
           <a:noFill/>
         </p:spPr>
         <p:txBody>
-          <a:bodyPr wrap="square" lIns="0" tIns="0" rIns="0" bIns="0" anchor="ctr">
+          <a:bodyPr wrap="square" anchor="ctr" lIns="0" rIns="0" tIns="0" bIns="0">
             <a:spAutoFit/>
           </a:bodyPr>
           <a:lstStyle/>
@@ -13856,7 +13702,6 @@
           <a:lstStyle/>
           <a:p>
             <a:pPr algn="ctr"/>
-            <a:endParaRPr/>
           </a:p>
         </p:txBody>
       </p:sp>
@@ -13877,7 +13722,7 @@
           <a:noFill/>
         </p:spPr>
         <p:txBody>
-          <a:bodyPr wrap="square" lIns="0" tIns="0" rIns="0" bIns="0" anchor="ctr">
+          <a:bodyPr wrap="square" anchor="ctr" lIns="0" rIns="0" tIns="0" bIns="0">
             <a:spAutoFit/>
           </a:bodyPr>
           <a:lstStyle/>
@@ -13916,7 +13761,7 @@
           <a:noFill/>
         </p:spPr>
         <p:txBody>
-          <a:bodyPr wrap="square" lIns="0" tIns="0" rIns="0" bIns="0" anchor="ctr">
+          <a:bodyPr wrap="square" anchor="ctr" lIns="0" rIns="0" tIns="0" bIns="0">
             <a:spAutoFit/>
           </a:bodyPr>
           <a:lstStyle/>
@@ -13979,7 +13824,6 @@
           <a:lstStyle/>
           <a:p>
             <a:pPr algn="ctr"/>
-            <a:endParaRPr/>
           </a:p>
         </p:txBody>
       </p:sp>
@@ -14000,7 +13844,7 @@
           <a:noFill/>
         </p:spPr>
         <p:txBody>
-          <a:bodyPr wrap="square" lIns="0" tIns="0" rIns="0" bIns="0" anchor="ctr">
+          <a:bodyPr wrap="square" anchor="ctr" lIns="0" rIns="0" tIns="0" bIns="0">
             <a:spAutoFit/>
           </a:bodyPr>
           <a:lstStyle/>
@@ -14039,7 +13883,7 @@
           <a:noFill/>
         </p:spPr>
         <p:txBody>
-          <a:bodyPr wrap="square" lIns="0" tIns="0" rIns="0" bIns="0" anchor="ctr">
+          <a:bodyPr wrap="square" anchor="ctr" lIns="0" rIns="0" tIns="0" bIns="0">
             <a:spAutoFit/>
           </a:bodyPr>
           <a:lstStyle/>
@@ -14102,7 +13946,6 @@
           <a:lstStyle/>
           <a:p>
             <a:pPr algn="ctr"/>
-            <a:endParaRPr/>
           </a:p>
         </p:txBody>
       </p:sp>
@@ -14123,7 +13966,7 @@
           <a:noFill/>
         </p:spPr>
         <p:txBody>
-          <a:bodyPr wrap="square" lIns="0" tIns="0" rIns="0" bIns="0" anchor="ctr">
+          <a:bodyPr wrap="square" anchor="ctr" lIns="0" rIns="0" tIns="0" bIns="0">
             <a:spAutoFit/>
           </a:bodyPr>
           <a:lstStyle/>
@@ -14162,7 +14005,7 @@
           <a:noFill/>
         </p:spPr>
         <p:txBody>
-          <a:bodyPr wrap="square" lIns="0" tIns="0" rIns="0" bIns="0" anchor="ctr">
+          <a:bodyPr wrap="square" anchor="ctr" lIns="0" rIns="0" tIns="0" bIns="0">
             <a:spAutoFit/>
           </a:bodyPr>
           <a:lstStyle/>
@@ -14179,7 +14022,7 @@
                 </a:solidFill>
                 <a:latin typeface="Calibri"/>
               </a:rPr>
-              <a:t>Ready to score us vs. SAFAR/Delhi Supersite the moment either feed exists — not wired yet, no scraper built for either this session.</a:t>
+              <a:t>Delhi Supersite = a DPCC station, same scraper, confirmed working — but real data too sparse for a backtest tonight. SAFAR's site is down (expired TLS cert).</a:t>
             </a:r>
           </a:p>
         </p:txBody>
@@ -14225,7 +14068,6 @@
           <a:lstStyle/>
           <a:p>
             <a:pPr algn="ctr"/>
-            <a:endParaRPr/>
           </a:p>
         </p:txBody>
       </p:sp>
@@ -14246,7 +14088,7 @@
           <a:noFill/>
         </p:spPr>
         <p:txBody>
-          <a:bodyPr wrap="square" lIns="0" tIns="0" rIns="0" bIns="0" anchor="ctr">
+          <a:bodyPr wrap="square" anchor="ctr" lIns="0" rIns="0" tIns="0" bIns="0">
             <a:spAutoFit/>
           </a:bodyPr>
           <a:lstStyle/>
@@ -14285,7 +14127,7 @@
           <a:noFill/>
         </p:spPr>
         <p:txBody>
-          <a:bodyPr wrap="square" lIns="0" tIns="0" rIns="0" bIns="0" anchor="ctr">
+          <a:bodyPr wrap="square" anchor="ctr" lIns="0" rIns="0" tIns="0" bIns="0">
             <a:spAutoFit/>
           </a:bodyPr>
           <a:lstStyle/>
@@ -14324,7 +14166,7 @@
           <a:noFill/>
         </p:spPr>
         <p:txBody>
-          <a:bodyPr wrap="square" lIns="0" tIns="0" rIns="0" bIns="0" anchor="t">
+          <a:bodyPr wrap="square" anchor="t" lIns="0" rIns="0" tIns="0" bIns="0">
             <a:spAutoFit/>
           </a:bodyPr>
           <a:lstStyle/>
@@ -14363,7 +14205,7 @@
           <a:noFill/>
         </p:spPr>
         <p:txBody>
-          <a:bodyPr wrap="square" lIns="0" tIns="0" rIns="0" bIns="0" anchor="t">
+          <a:bodyPr wrap="square" anchor="t" lIns="0" rIns="0" tIns="0" bIns="0">
             <a:spAutoFit/>
           </a:bodyPr>
           <a:lstStyle/>
@@ -14394,7 +14236,7 @@
 </file>
 
 <file path=ppt/slides/slide7.xml><?xml version="1.0" encoding="utf-8"?>
-<p:sld xmlns:a="http://schemas.openxmlformats.org/drawingml/2006/main" xmlns:r="http://schemas.openxmlformats.org/officeDocument/2006/relationships" xmlns:p="http://schemas.openxmlformats.org/presentationml/2006/main">
+<p:sld xmlns:a="http://schemas.openxmlformats.org/drawingml/2006/main" xmlns:p="http://schemas.openxmlformats.org/presentationml/2006/main" xmlns:r="http://schemas.openxmlformats.org/officeDocument/2006/relationships">
   <p:cSld>
     <p:spTree>
       <p:nvGrpSpPr>
@@ -14402,14 +14244,7 @@
         <p:cNvGrpSpPr/>
         <p:nvPr/>
       </p:nvGrpSpPr>
-      <p:grpSpPr>
-        <a:xfrm>
-          <a:off x="0" y="0"/>
-          <a:ext cx="0" cy="0"/>
-          <a:chOff x="0" y="0"/>
-          <a:chExt cx="0" cy="0"/>
-        </a:xfrm>
-      </p:grpSpPr>
+      <p:grpSpPr/>
       <p:sp>
         <p:nvSpPr>
           <p:cNvPr id="2" name="Rectangle 1"/>
@@ -14418,7 +14253,7 @@
         </p:nvSpPr>
         <p:spPr>
           <a:xfrm>
-            <a:off x="0" y="-16934"/>
+            <a:off x="0" y="0"/>
             <a:ext cx="12191695" cy="6858000"/>
           </a:xfrm>
           <a:prstGeom prst="rect">
@@ -14451,7 +14286,6 @@
           <a:lstStyle/>
           <a:p>
             <a:pPr algn="ctr"/>
-            <a:endParaRPr/>
           </a:p>
         </p:txBody>
       </p:sp>
@@ -14472,7 +14306,7 @@
           <a:noFill/>
         </p:spPr>
         <p:txBody>
-          <a:bodyPr wrap="square" lIns="0" tIns="0" rIns="0" bIns="0" anchor="t">
+          <a:bodyPr wrap="square" anchor="t" lIns="0" rIns="0" tIns="0" bIns="0">
             <a:spAutoFit/>
           </a:bodyPr>
           <a:lstStyle/>
@@ -14511,7 +14345,7 @@
           <a:noFill/>
         </p:spPr>
         <p:txBody>
-          <a:bodyPr wrap="square" lIns="0" tIns="0" rIns="0" bIns="0" anchor="t">
+          <a:bodyPr wrap="square" anchor="t" lIns="0" rIns="0" tIns="0" bIns="0">
             <a:spAutoFit/>
           </a:bodyPr>
           <a:lstStyle/>
@@ -14576,7 +14410,6 @@
           <a:lstStyle/>
           <a:p>
             <a:pPr algn="ctr"/>
-            <a:endParaRPr/>
           </a:p>
         </p:txBody>
       </p:sp>
@@ -14597,7 +14430,7 @@
           <a:noFill/>
         </p:spPr>
         <p:txBody>
-          <a:bodyPr wrap="square" lIns="0" tIns="0" rIns="0" bIns="0" anchor="ctr">
+          <a:bodyPr wrap="square" anchor="ctr" lIns="0" rIns="0" tIns="0" bIns="0">
             <a:spAutoFit/>
           </a:bodyPr>
           <a:lstStyle/>
@@ -14696,7 +14529,6 @@
           <a:lstStyle/>
           <a:p>
             <a:pPr algn="ctr"/>
-            <a:endParaRPr/>
           </a:p>
         </p:txBody>
       </p:sp>
@@ -14717,7 +14549,7 @@
           <a:noFill/>
         </p:spPr>
         <p:txBody>
-          <a:bodyPr wrap="square" lIns="0" tIns="0" rIns="0" bIns="0" anchor="ctr">
+          <a:bodyPr wrap="square" anchor="ctr" lIns="0" rIns="0" tIns="0" bIns="0">
             <a:spAutoFit/>
           </a:bodyPr>
           <a:lstStyle/>
@@ -14756,7 +14588,7 @@
           <a:noFill/>
         </p:spPr>
         <p:txBody>
-          <a:bodyPr wrap="square" lIns="0" tIns="0" rIns="0" bIns="0" anchor="t">
+          <a:bodyPr wrap="square" anchor="t" lIns="0" rIns="0" tIns="0" bIns="0">
             <a:spAutoFit/>
           </a:bodyPr>
           <a:lstStyle/>
@@ -14823,7 +14655,6 @@
           <a:lstStyle/>
           <a:p>
             <a:pPr algn="ctr"/>
-            <a:endParaRPr/>
           </a:p>
         </p:txBody>
       </p:sp>
@@ -14844,7 +14675,7 @@
           <a:noFill/>
         </p:spPr>
         <p:txBody>
-          <a:bodyPr wrap="square" lIns="0" tIns="0" rIns="0" bIns="0" anchor="ctr">
+          <a:bodyPr wrap="square" anchor="ctr" lIns="0" rIns="0" tIns="0" bIns="0">
             <a:spAutoFit/>
           </a:bodyPr>
           <a:lstStyle/>
@@ -14899,7 +14730,7 @@
           <a:noFill/>
         </p:spPr>
         <p:txBody>
-          <a:bodyPr wrap="square" lIns="0" tIns="0" rIns="0" bIns="0" anchor="t">
+          <a:bodyPr wrap="square" anchor="t" lIns="0" rIns="0" tIns="0" bIns="0">
             <a:spAutoFit/>
           </a:bodyPr>
           <a:lstStyle/>
@@ -14966,7 +14797,6 @@
           <a:lstStyle/>
           <a:p>
             <a:pPr algn="ctr"/>
-            <a:endParaRPr/>
           </a:p>
         </p:txBody>
       </p:sp>
@@ -14987,7 +14817,7 @@
           <a:noFill/>
         </p:spPr>
         <p:txBody>
-          <a:bodyPr wrap="square" lIns="0" tIns="0" rIns="0" bIns="0" anchor="ctr">
+          <a:bodyPr wrap="square" anchor="ctr" lIns="0" rIns="0" tIns="0" bIns="0">
             <a:spAutoFit/>
           </a:bodyPr>
           <a:lstStyle/>
@@ -15042,7 +14872,7 @@
           <a:noFill/>
         </p:spPr>
         <p:txBody>
-          <a:bodyPr wrap="square" lIns="0" tIns="0" rIns="0" bIns="0" anchor="t">
+          <a:bodyPr wrap="square" anchor="t" lIns="0" rIns="0" tIns="0" bIns="0">
             <a:spAutoFit/>
           </a:bodyPr>
           <a:lstStyle/>
@@ -15073,6 +14903,148 @@
         <p:spPr>
           <a:xfrm>
             <a:off x="6935724" y="1417320"/>
+            <a:ext cx="1562100" cy="914400"/>
+          </a:xfrm>
+          <a:prstGeom prst="roundRect">
+            <a:avLst>
+              <a:gd name="adj" fmla="val 8000"/>
+            </a:avLst>
+          </a:prstGeom>
+          <a:solidFill>
+            <a:srgbClr val="E8F5E9"/>
+          </a:solidFill>
+          <a:ln w="15875">
+            <a:solidFill>
+              <a:srgbClr val="2E7D32"/>
+            </a:solidFill>
+          </a:ln>
+          <a:effectLst/>
+        </p:spPr>
+        <p:style>
+          <a:lnRef idx="1">
+            <a:schemeClr val="accent1"/>
+          </a:lnRef>
+          <a:fillRef idx="3">
+            <a:schemeClr val="accent1"/>
+          </a:fillRef>
+          <a:effectRef idx="2">
+            <a:schemeClr val="accent1"/>
+          </a:effectRef>
+          <a:fontRef idx="minor">
+            <a:schemeClr val="lt1"/>
+          </a:fontRef>
+        </p:style>
+        <p:txBody>
+          <a:bodyPr rtlCol="0" anchor="ctr"/>
+          <a:lstStyle/>
+          <a:p>
+            <a:pPr algn="ctr"/>
+          </a:p>
+        </p:txBody>
+      </p:sp>
+      <p:sp>
+        <p:nvSpPr>
+          <p:cNvPr id="17" name="TextBox 16"/>
+          <p:cNvSpPr txBox="1"/>
+          <p:nvPr/>
+        </p:nvSpPr>
+        <p:spPr>
+          <a:xfrm>
+            <a:off x="6999224" y="1518920"/>
+            <a:ext cx="1435100" cy="457200"/>
+          </a:xfrm>
+          <a:prstGeom prst="rect">
+            <a:avLst/>
+          </a:prstGeom>
+          <a:noFill/>
+        </p:spPr>
+        <p:txBody>
+          <a:bodyPr wrap="square" anchor="ctr" lIns="0" rIns="0" tIns="0" bIns="0">
+            <a:spAutoFit/>
+          </a:bodyPr>
+          <a:lstStyle/>
+          <a:p>
+            <a:pPr algn="ctr">
+              <a:lnSpc>
+                <a:spcPct val="100000"/>
+              </a:lnSpc>
+            </a:pPr>
+            <a:r>
+              <a:rPr sz="950" b="1" i="0">
+                <a:solidFill>
+                  <a:srgbClr val="1A1A1A"/>
+                </a:solidFill>
+                <a:latin typeface="Calibri"/>
+              </a:rPr>
+              <a:t>VAHAN vehicle</a:t>
+            </a:r>
+          </a:p>
+          <a:p>
+            <a:pPr algn="ctr">
+              <a:lnSpc>
+                <a:spcPct val="100000"/>
+              </a:lnSpc>
+            </a:pPr>
+            <a:r>
+              <a:rPr sz="950" b="1" i="0">
+                <a:solidFill>
+                  <a:srgbClr val="1A1A1A"/>
+                </a:solidFill>
+                <a:latin typeface="Calibri"/>
+              </a:rPr>
+              <a:t>registrations</a:t>
+            </a:r>
+          </a:p>
+        </p:txBody>
+      </p:sp>
+      <p:sp>
+        <p:nvSpPr>
+          <p:cNvPr id="18" name="TextBox 17"/>
+          <p:cNvSpPr txBox="1"/>
+          <p:nvPr/>
+        </p:nvSpPr>
+        <p:spPr>
+          <a:xfrm>
+            <a:off x="6999224" y="1984248"/>
+            <a:ext cx="1435100" cy="292608"/>
+          </a:xfrm>
+          <a:prstGeom prst="rect">
+            <a:avLst/>
+          </a:prstGeom>
+          <a:noFill/>
+        </p:spPr>
+        <p:txBody>
+          <a:bodyPr wrap="square" anchor="t" lIns="0" rIns="0" tIns="0" bIns="0">
+            <a:spAutoFit/>
+          </a:bodyPr>
+          <a:lstStyle/>
+          <a:p>
+            <a:pPr algn="ctr">
+              <a:lnSpc>
+                <a:spcPct val="100000"/>
+              </a:lnSpc>
+            </a:pPr>
+            <a:r>
+              <a:rPr sz="800" b="1" i="0">
+                <a:solidFill>
+                  <a:srgbClr val="2E7D32"/>
+                </a:solidFill>
+                <a:latin typeface="Calibri"/>
+              </a:rPr>
+              <a:t>LIVE</a:t>
+            </a:r>
+          </a:p>
+        </p:txBody>
+      </p:sp>
+      <p:sp>
+        <p:nvSpPr>
+          <p:cNvPr id="19" name="Rounded Rectangle 18"/>
+          <p:cNvSpPr/>
+          <p:nvPr/>
+        </p:nvSpPr>
+        <p:spPr>
+          <a:xfrm>
+            <a:off x="8607552" y="1417320"/>
             <a:ext cx="1562100" cy="914400"/>
           </a:xfrm>
           <a:prstGeom prst="roundRect">
@@ -15109,19 +15081,18 @@
           <a:lstStyle/>
           <a:p>
             <a:pPr algn="ctr"/>
-            <a:endParaRPr/>
-          </a:p>
-        </p:txBody>
-      </p:sp>
-      <p:sp>
-        <p:nvSpPr>
-          <p:cNvPr id="17" name="TextBox 16"/>
-          <p:cNvSpPr txBox="1"/>
-          <p:nvPr/>
-        </p:nvSpPr>
-        <p:spPr>
-          <a:xfrm>
-            <a:off x="6999224" y="1518920"/>
+          </a:p>
+        </p:txBody>
+      </p:sp>
+      <p:sp>
+        <p:nvSpPr>
+          <p:cNvPr id="20" name="TextBox 19"/>
+          <p:cNvSpPr txBox="1"/>
+          <p:nvPr/>
+        </p:nvSpPr>
+        <p:spPr>
+          <a:xfrm>
+            <a:off x="8671052" y="1518920"/>
             <a:ext cx="1435100" cy="457200"/>
           </a:xfrm>
           <a:prstGeom prst="rect">
@@ -15130,7 +15101,7 @@
           <a:noFill/>
         </p:spPr>
         <p:txBody>
-          <a:bodyPr wrap="square" lIns="0" tIns="0" rIns="0" bIns="0" anchor="ctr">
+          <a:bodyPr wrap="square" anchor="ctr" lIns="0" rIns="0" tIns="0" bIns="0">
             <a:spAutoFit/>
           </a:bodyPr>
           <a:lstStyle/>
@@ -15147,7 +15118,7 @@
                 </a:solidFill>
                 <a:latin typeface="Calibri"/>
               </a:rPr>
-              <a:t>VAHAN vehicle</a:t>
+              <a:t>Delhi Supersite</a:t>
             </a:r>
           </a:p>
           <a:p>
@@ -15163,20 +15134,20 @@
                 </a:solidFill>
                 <a:latin typeface="Calibri"/>
               </a:rPr>
-              <a:t>registrations</a:t>
-            </a:r>
-          </a:p>
-        </p:txBody>
-      </p:sp>
-      <p:sp>
-        <p:nvSpPr>
-          <p:cNvPr id="18" name="TextBox 17"/>
-          <p:cNvSpPr txBox="1"/>
-          <p:nvPr/>
-        </p:nvSpPr>
-        <p:spPr>
-          <a:xfrm>
-            <a:off x="6999224" y="1984248"/>
+              <a:t>(= DPCC station)</a:t>
+            </a:r>
+          </a:p>
+        </p:txBody>
+      </p:sp>
+      <p:sp>
+        <p:nvSpPr>
+          <p:cNvPr id="21" name="TextBox 20"/>
+          <p:cNvSpPr txBox="1"/>
+          <p:nvPr/>
+        </p:nvSpPr>
+        <p:spPr>
+          <a:xfrm>
+            <a:off x="8671052" y="1984248"/>
             <a:ext cx="1435100" cy="292608"/>
           </a:xfrm>
           <a:prstGeom prst="rect">
@@ -15185,7 +15156,7 @@
           <a:noFill/>
         </p:spPr>
         <p:txBody>
-          <a:bodyPr wrap="square" lIns="0" tIns="0" rIns="0" bIns="0" anchor="t">
+          <a:bodyPr wrap="square" anchor="t" lIns="0" rIns="0" tIns="0" bIns="0">
             <a:spAutoFit/>
           </a:bodyPr>
           <a:lstStyle/>
@@ -15202,20 +15173,20 @@
                 </a:solidFill>
                 <a:latin typeface="Calibri"/>
               </a:rPr>
-              <a:t>NEEDS DATA</a:t>
-            </a:r>
-          </a:p>
-        </p:txBody>
-      </p:sp>
-      <p:sp>
-        <p:nvSpPr>
-          <p:cNvPr id="19" name="Rounded Rectangle 18"/>
+              <a:t>SPARSE DATA</a:t>
+            </a:r>
+          </a:p>
+        </p:txBody>
+      </p:sp>
+      <p:sp>
+        <p:nvSpPr>
+          <p:cNvPr id="22" name="Rounded Rectangle 21"/>
           <p:cNvSpPr/>
           <p:nvPr/>
         </p:nvSpPr>
         <p:spPr>
           <a:xfrm>
-            <a:off x="8607552" y="1417320"/>
+            <a:off x="10279380" y="1417320"/>
             <a:ext cx="1562100" cy="914400"/>
           </a:xfrm>
           <a:prstGeom prst="roundRect">
@@ -15252,19 +15223,18 @@
           <a:lstStyle/>
           <a:p>
             <a:pPr algn="ctr"/>
-            <a:endParaRPr/>
-          </a:p>
-        </p:txBody>
-      </p:sp>
-      <p:sp>
-        <p:nvSpPr>
-          <p:cNvPr id="20" name="TextBox 19"/>
-          <p:cNvSpPr txBox="1"/>
-          <p:nvPr/>
-        </p:nvSpPr>
-        <p:spPr>
-          <a:xfrm>
-            <a:off x="8671052" y="1518920"/>
+          </a:p>
+        </p:txBody>
+      </p:sp>
+      <p:sp>
+        <p:nvSpPr>
+          <p:cNvPr id="23" name="TextBox 22"/>
+          <p:cNvSpPr txBox="1"/>
+          <p:nvPr/>
+        </p:nvSpPr>
+        <p:spPr>
+          <a:xfrm>
+            <a:off x="10342880" y="1518920"/>
             <a:ext cx="1435100" cy="457200"/>
           </a:xfrm>
           <a:prstGeom prst="rect">
@@ -15273,7 +15243,7 @@
           <a:noFill/>
         </p:spPr>
         <p:txBody>
-          <a:bodyPr wrap="square" lIns="0" tIns="0" rIns="0" bIns="0" anchor="ctr">
+          <a:bodyPr wrap="square" anchor="ctr" lIns="0" rIns="0" tIns="0" bIns="0">
             <a:spAutoFit/>
           </a:bodyPr>
           <a:lstStyle/>
@@ -15290,20 +15260,20 @@
                 </a:solidFill>
                 <a:latin typeface="Calibri"/>
               </a:rPr>
-              <a:t>Delhi Supersite</a:t>
-            </a:r>
-          </a:p>
-        </p:txBody>
-      </p:sp>
-      <p:sp>
-        <p:nvSpPr>
-          <p:cNvPr id="21" name="TextBox 20"/>
-          <p:cNvSpPr txBox="1"/>
-          <p:nvPr/>
-        </p:nvSpPr>
-        <p:spPr>
-          <a:xfrm>
-            <a:off x="8671052" y="1984248"/>
+              <a:t>SAFAR forecasts</a:t>
+            </a:r>
+          </a:p>
+        </p:txBody>
+      </p:sp>
+      <p:sp>
+        <p:nvSpPr>
+          <p:cNvPr id="24" name="TextBox 23"/>
+          <p:cNvSpPr txBox="1"/>
+          <p:nvPr/>
+        </p:nvSpPr>
+        <p:spPr>
+          <a:xfrm>
+            <a:off x="10342880" y="1984248"/>
             <a:ext cx="1435100" cy="292608"/>
           </a:xfrm>
           <a:prstGeom prst="rect">
@@ -15312,7 +15282,7 @@
           <a:noFill/>
         </p:spPr>
         <p:txBody>
-          <a:bodyPr wrap="square" lIns="0" tIns="0" rIns="0" bIns="0" anchor="t">
+          <a:bodyPr wrap="square" anchor="t" lIns="0" rIns="0" tIns="0" bIns="0">
             <a:spAutoFit/>
           </a:bodyPr>
           <a:lstStyle/>
@@ -15329,21 +15299,316 @@
                 </a:solidFill>
                 <a:latin typeface="Calibri"/>
               </a:rPr>
-              <a:t>NOT BUILT</a:t>
-            </a:r>
-          </a:p>
-        </p:txBody>
-      </p:sp>
-      <p:sp>
-        <p:nvSpPr>
-          <p:cNvPr id="22" name="Rounded Rectangle 21"/>
+              <a:t>SITE DOWN</a:t>
+            </a:r>
+          </a:p>
+        </p:txBody>
+      </p:sp>
+      <p:cxnSp>
+        <p:nvCxnSpPr>
+          <p:cNvPr id="25" name="Connector 24"/>
+          <p:cNvCxnSpPr/>
+          <p:nvPr/>
+        </p:nvCxnSpPr>
+        <p:spPr>
+          <a:xfrm>
+            <a:off x="6309360" y="2350008"/>
+            <a:ext cx="0" cy="256032"/>
+          </a:xfrm>
+          <a:prstGeom prst="line">
+            <a:avLst/>
+          </a:prstGeom>
+          <a:ln w="19050">
+            <a:solidFill>
+              <a:srgbClr val="646E82"/>
+            </a:solidFill>
+            <a:tailEnd type="triangle" w="med" len="med"/>
+          </a:ln>
+        </p:spPr>
+        <p:style>
+          <a:lnRef idx="2">
+            <a:schemeClr val="accent1"/>
+          </a:lnRef>
+          <a:fillRef idx="0">
+            <a:schemeClr val="accent1"/>
+          </a:fillRef>
+          <a:effectRef idx="1">
+            <a:schemeClr val="accent1"/>
+          </a:effectRef>
+          <a:fontRef idx="minor">
+            <a:schemeClr val="tx1"/>
+          </a:fontRef>
+        </p:style>
+      </p:cxnSp>
+      <p:sp>
+        <p:nvSpPr>
+          <p:cNvPr id="26" name="Rounded Rectangle 25"/>
           <p:cNvSpPr/>
           <p:nvPr/>
         </p:nvSpPr>
         <p:spPr>
           <a:xfrm>
-            <a:off x="10279380" y="1417320"/>
-            <a:ext cx="1562100" cy="914400"/>
+            <a:off x="548640" y="2715768"/>
+            <a:ext cx="1234440" cy="914400"/>
+          </a:xfrm>
+          <a:prstGeom prst="roundRect">
+            <a:avLst>
+              <a:gd name="adj" fmla="val 6000"/>
+            </a:avLst>
+          </a:prstGeom>
+          <a:solidFill>
+            <a:srgbClr val="1E2761"/>
+          </a:solidFill>
+          <a:ln>
+            <a:noFill/>
+          </a:ln>
+          <a:effectLst/>
+        </p:spPr>
+        <p:style>
+          <a:lnRef idx="1">
+            <a:schemeClr val="accent1"/>
+          </a:lnRef>
+          <a:fillRef idx="3">
+            <a:schemeClr val="accent1"/>
+          </a:fillRef>
+          <a:effectRef idx="2">
+            <a:schemeClr val="accent1"/>
+          </a:effectRef>
+          <a:fontRef idx="minor">
+            <a:schemeClr val="lt1"/>
+          </a:fontRef>
+        </p:style>
+        <p:txBody>
+          <a:bodyPr rtlCol="0" anchor="ctr"/>
+          <a:lstStyle/>
+          <a:p>
+            <a:pPr algn="ctr"/>
+          </a:p>
+        </p:txBody>
+      </p:sp>
+      <p:sp>
+        <p:nvSpPr>
+          <p:cNvPr id="27" name="TextBox 26"/>
+          <p:cNvSpPr txBox="1"/>
+          <p:nvPr/>
+        </p:nvSpPr>
+        <p:spPr>
+          <a:xfrm>
+            <a:off x="621792" y="2817368"/>
+            <a:ext cx="1097280" cy="768096"/>
+          </a:xfrm>
+          <a:prstGeom prst="rect">
+            <a:avLst/>
+          </a:prstGeom>
+          <a:noFill/>
+        </p:spPr>
+        <p:txBody>
+          <a:bodyPr wrap="square" anchor="ctr" lIns="0" rIns="0" tIns="0" bIns="0">
+            <a:spAutoFit/>
+          </a:bodyPr>
+          <a:lstStyle/>
+          <a:p>
+            <a:pPr algn="ctr">
+              <a:lnSpc>
+                <a:spcPct val="100000"/>
+              </a:lnSpc>
+            </a:pPr>
+            <a:r>
+              <a:rPr sz="1000" b="1" i="0">
+                <a:solidFill>
+                  <a:srgbClr val="FFFFFF"/>
+                </a:solidFill>
+                <a:latin typeface="Calibri"/>
+              </a:rPr>
+              <a:t>02</a:t>
+            </a:r>
+          </a:p>
+          <a:p>
+            <a:pPr algn="ctr">
+              <a:lnSpc>
+                <a:spcPct val="100000"/>
+              </a:lnSpc>
+            </a:pPr>
+            <a:r>
+              <a:rPr sz="1000" b="1" i="0">
+                <a:solidFill>
+                  <a:srgbClr val="FFFFFF"/>
+                </a:solidFill>
+                <a:latin typeface="Calibri"/>
+              </a:rPr>
+              <a:t>MODEL</a:t>
+            </a:r>
+          </a:p>
+          <a:p>
+            <a:pPr algn="ctr">
+              <a:lnSpc>
+                <a:spcPct val="100000"/>
+              </a:lnSpc>
+            </a:pPr>
+            <a:r>
+              <a:rPr sz="1000" b="1" i="0">
+                <a:solidFill>
+                  <a:srgbClr val="FFFFFF"/>
+                </a:solidFill>
+                <a:latin typeface="Calibri"/>
+              </a:rPr>
+              <a:t>LAYER</a:t>
+            </a:r>
+          </a:p>
+        </p:txBody>
+      </p:sp>
+      <p:sp>
+        <p:nvSpPr>
+          <p:cNvPr id="28" name="Rounded Rectangle 27"/>
+          <p:cNvSpPr/>
+          <p:nvPr/>
+        </p:nvSpPr>
+        <p:spPr>
+          <a:xfrm>
+            <a:off x="1920240" y="2715768"/>
+            <a:ext cx="2398014" cy="914400"/>
+          </a:xfrm>
+          <a:prstGeom prst="roundRect">
+            <a:avLst>
+              <a:gd name="adj" fmla="val 8000"/>
+            </a:avLst>
+          </a:prstGeom>
+          <a:solidFill>
+            <a:srgbClr val="E8F5E9"/>
+          </a:solidFill>
+          <a:ln w="15875">
+            <a:solidFill>
+              <a:srgbClr val="2E7D32"/>
+            </a:solidFill>
+          </a:ln>
+          <a:effectLst/>
+        </p:spPr>
+        <p:style>
+          <a:lnRef idx="1">
+            <a:schemeClr val="accent1"/>
+          </a:lnRef>
+          <a:fillRef idx="3">
+            <a:schemeClr val="accent1"/>
+          </a:fillRef>
+          <a:effectRef idx="2">
+            <a:schemeClr val="accent1"/>
+          </a:effectRef>
+          <a:fontRef idx="minor">
+            <a:schemeClr val="lt1"/>
+          </a:fontRef>
+        </p:style>
+        <p:txBody>
+          <a:bodyPr rtlCol="0" anchor="ctr"/>
+          <a:lstStyle/>
+          <a:p>
+            <a:pPr algn="ctr"/>
+          </a:p>
+        </p:txBody>
+      </p:sp>
+      <p:sp>
+        <p:nvSpPr>
+          <p:cNvPr id="29" name="TextBox 28"/>
+          <p:cNvSpPr txBox="1"/>
+          <p:nvPr/>
+        </p:nvSpPr>
+        <p:spPr>
+          <a:xfrm>
+            <a:off x="1983740" y="2817368"/>
+            <a:ext cx="2271014" cy="457200"/>
+          </a:xfrm>
+          <a:prstGeom prst="rect">
+            <a:avLst/>
+          </a:prstGeom>
+          <a:noFill/>
+        </p:spPr>
+        <p:txBody>
+          <a:bodyPr wrap="square" anchor="ctr" lIns="0" rIns="0" tIns="0" bIns="0">
+            <a:spAutoFit/>
+          </a:bodyPr>
+          <a:lstStyle/>
+          <a:p>
+            <a:pPr algn="ctr">
+              <a:lnSpc>
+                <a:spcPct val="100000"/>
+              </a:lnSpc>
+            </a:pPr>
+            <a:r>
+              <a:rPr sz="950" b="1" i="0">
+                <a:solidFill>
+                  <a:srgbClr val="1A1A1A"/>
+                </a:solidFill>
+                <a:latin typeface="Calibri"/>
+              </a:rPr>
+              <a:t>Forecasting Engine</a:t>
+            </a:r>
+          </a:p>
+          <a:p>
+            <a:pPr algn="ctr">
+              <a:lnSpc>
+                <a:spcPct val="100000"/>
+              </a:lnSpc>
+            </a:pPr>
+            <a:r>
+              <a:rPr sz="950" b="1" i="0">
+                <a:solidFill>
+                  <a:srgbClr val="1A1A1A"/>
+                </a:solidFill>
+                <a:latin typeface="Calibri"/>
+              </a:rPr>
+              <a:t>24-72h/zone</a:t>
+            </a:r>
+          </a:p>
+        </p:txBody>
+      </p:sp>
+      <p:sp>
+        <p:nvSpPr>
+          <p:cNvPr id="30" name="TextBox 29"/>
+          <p:cNvSpPr txBox="1"/>
+          <p:nvPr/>
+        </p:nvSpPr>
+        <p:spPr>
+          <a:xfrm>
+            <a:off x="1983740" y="3282696"/>
+            <a:ext cx="2271014" cy="292608"/>
+          </a:xfrm>
+          <a:prstGeom prst="rect">
+            <a:avLst/>
+          </a:prstGeom>
+          <a:noFill/>
+        </p:spPr>
+        <p:txBody>
+          <a:bodyPr wrap="square" anchor="t" lIns="0" rIns="0" tIns="0" bIns="0">
+            <a:spAutoFit/>
+          </a:bodyPr>
+          <a:lstStyle/>
+          <a:p>
+            <a:pPr algn="ctr">
+              <a:lnSpc>
+                <a:spcPct val="100000"/>
+              </a:lnSpc>
+            </a:pPr>
+            <a:r>
+              <a:rPr sz="800" b="1" i="0">
+                <a:solidFill>
+                  <a:srgbClr val="2E7D32"/>
+                </a:solidFill>
+                <a:latin typeface="Calibri"/>
+              </a:rPr>
+              <a:t>LIVE</a:t>
+            </a:r>
+          </a:p>
+        </p:txBody>
+      </p:sp>
+      <p:sp>
+        <p:nvSpPr>
+          <p:cNvPr id="31" name="Rounded Rectangle 30"/>
+          <p:cNvSpPr/>
+          <p:nvPr/>
+        </p:nvSpPr>
+        <p:spPr>
+          <a:xfrm>
+            <a:off x="4427982" y="2715768"/>
+            <a:ext cx="2398014" cy="914400"/>
           </a:xfrm>
           <a:prstGeom prst="roundRect">
             <a:avLst>
@@ -15379,28 +15644,27 @@
           <a:lstStyle/>
           <a:p>
             <a:pPr algn="ctr"/>
-            <a:endParaRPr/>
-          </a:p>
-        </p:txBody>
-      </p:sp>
-      <p:sp>
-        <p:nvSpPr>
-          <p:cNvPr id="23" name="TextBox 22"/>
-          <p:cNvSpPr txBox="1"/>
-          <p:nvPr/>
-        </p:nvSpPr>
-        <p:spPr>
-          <a:xfrm>
-            <a:off x="10342880" y="1518920"/>
-            <a:ext cx="1435100" cy="457200"/>
-          </a:xfrm>
-          <a:prstGeom prst="rect">
-            <a:avLst/>
-          </a:prstGeom>
-          <a:noFill/>
-        </p:spPr>
-        <p:txBody>
-          <a:bodyPr wrap="square" lIns="0" tIns="0" rIns="0" bIns="0" anchor="ctr">
+          </a:p>
+        </p:txBody>
+      </p:sp>
+      <p:sp>
+        <p:nvSpPr>
+          <p:cNvPr id="32" name="TextBox 31"/>
+          <p:cNvSpPr txBox="1"/>
+          <p:nvPr/>
+        </p:nvSpPr>
+        <p:spPr>
+          <a:xfrm>
+            <a:off x="4491482" y="2817368"/>
+            <a:ext cx="2271014" cy="457200"/>
+          </a:xfrm>
+          <a:prstGeom prst="rect">
+            <a:avLst/>
+          </a:prstGeom>
+          <a:noFill/>
+        </p:spPr>
+        <p:txBody>
+          <a:bodyPr wrap="square" anchor="ctr" lIns="0" rIns="0" tIns="0" bIns="0">
             <a:spAutoFit/>
           </a:bodyPr>
           <a:lstStyle/>
@@ -15417,32 +15681,9 @@
                 </a:solidFill>
                 <a:latin typeface="Calibri"/>
               </a:rPr>
-              <a:t>SAFAR forecasts</a:t>
-            </a:r>
-          </a:p>
-        </p:txBody>
-      </p:sp>
-      <p:sp>
-        <p:nvSpPr>
-          <p:cNvPr id="24" name="TextBox 23"/>
-          <p:cNvSpPr txBox="1"/>
-          <p:nvPr/>
-        </p:nvSpPr>
-        <p:spPr>
-          <a:xfrm>
-            <a:off x="10342880" y="1984248"/>
-            <a:ext cx="1435100" cy="292608"/>
-          </a:xfrm>
-          <a:prstGeom prst="rect">
-            <a:avLst/>
-          </a:prstGeom>
-          <a:noFill/>
-        </p:spPr>
-        <p:txBody>
-          <a:bodyPr wrap="square" lIns="0" tIns="0" rIns="0" bIns="0" anchor="t">
-            <a:spAutoFit/>
-          </a:bodyPr>
-          <a:lstStyle/>
+              <a:t>Satellite Attribution</a:t>
+            </a:r>
+          </a:p>
           <a:p>
             <a:pPr algn="ctr">
               <a:lnSpc>
@@ -15450,180 +15691,65 @@
               </a:lnSpc>
             </a:pPr>
             <a:r>
+              <a:rPr sz="950" b="1" i="0">
+                <a:solidFill>
+                  <a:srgbClr val="1A1A1A"/>
+                </a:solidFill>
+                <a:latin typeface="Calibri"/>
+              </a:rPr>
+              <a:t>(Prithvi)</a:t>
+            </a:r>
+          </a:p>
+        </p:txBody>
+      </p:sp>
+      <p:sp>
+        <p:nvSpPr>
+          <p:cNvPr id="33" name="TextBox 32"/>
+          <p:cNvSpPr txBox="1"/>
+          <p:nvPr/>
+        </p:nvSpPr>
+        <p:spPr>
+          <a:xfrm>
+            <a:off x="4491482" y="3282696"/>
+            <a:ext cx="2271014" cy="292608"/>
+          </a:xfrm>
+          <a:prstGeom prst="rect">
+            <a:avLst/>
+          </a:prstGeom>
+          <a:noFill/>
+        </p:spPr>
+        <p:txBody>
+          <a:bodyPr wrap="square" anchor="t" lIns="0" rIns="0" tIns="0" bIns="0">
+            <a:spAutoFit/>
+          </a:bodyPr>
+          <a:lstStyle/>
+          <a:p>
+            <a:pPr algn="ctr">
+              <a:lnSpc>
+                <a:spcPct val="100000"/>
+              </a:lnSpc>
+            </a:pPr>
+            <a:r>
               <a:rPr sz="800" b="1" i="0">
                 <a:solidFill>
                   <a:srgbClr val="646E82"/>
                 </a:solidFill>
                 <a:latin typeface="Calibri"/>
               </a:rPr>
-              <a:t>NOT BUILT</a:t>
-            </a:r>
-          </a:p>
-        </p:txBody>
-      </p:sp>
-      <p:cxnSp>
-        <p:nvCxnSpPr>
-          <p:cNvPr id="25" name="Connector 24"/>
-          <p:cNvCxnSpPr/>
-          <p:nvPr/>
-        </p:nvCxnSpPr>
-        <p:spPr>
-          <a:xfrm>
-            <a:off x="6309360" y="2350008"/>
-            <a:ext cx="0" cy="256032"/>
-          </a:xfrm>
-          <a:prstGeom prst="line">
-            <a:avLst/>
-          </a:prstGeom>
-          <a:ln w="19050">
-            <a:solidFill>
-              <a:srgbClr val="646E82"/>
-            </a:solidFill>
-            <a:tailEnd type="triangle" w="med" len="med"/>
-          </a:ln>
-        </p:spPr>
-        <p:style>
-          <a:lnRef idx="2">
-            <a:schemeClr val="accent1"/>
-          </a:lnRef>
-          <a:fillRef idx="0">
-            <a:schemeClr val="accent1"/>
-          </a:fillRef>
-          <a:effectRef idx="1">
-            <a:schemeClr val="accent1"/>
-          </a:effectRef>
-          <a:fontRef idx="minor">
-            <a:schemeClr val="tx1"/>
-          </a:fontRef>
-        </p:style>
-      </p:cxnSp>
-      <p:sp>
-        <p:nvSpPr>
-          <p:cNvPr id="26" name="Rounded Rectangle 25"/>
+              <a:t>TEAMMATE</a:t>
+            </a:r>
+          </a:p>
+        </p:txBody>
+      </p:sp>
+      <p:sp>
+        <p:nvSpPr>
+          <p:cNvPr id="34" name="Rounded Rectangle 33"/>
           <p:cNvSpPr/>
           <p:nvPr/>
         </p:nvSpPr>
         <p:spPr>
           <a:xfrm>
-            <a:off x="548640" y="2715768"/>
-            <a:ext cx="1234440" cy="914400"/>
-          </a:xfrm>
-          <a:prstGeom prst="roundRect">
-            <a:avLst>
-              <a:gd name="adj" fmla="val 6000"/>
-            </a:avLst>
-          </a:prstGeom>
-          <a:solidFill>
-            <a:srgbClr val="1E2761"/>
-          </a:solidFill>
-          <a:ln>
-            <a:noFill/>
-          </a:ln>
-          <a:effectLst/>
-        </p:spPr>
-        <p:style>
-          <a:lnRef idx="1">
-            <a:schemeClr val="accent1"/>
-          </a:lnRef>
-          <a:fillRef idx="3">
-            <a:schemeClr val="accent1"/>
-          </a:fillRef>
-          <a:effectRef idx="2">
-            <a:schemeClr val="accent1"/>
-          </a:effectRef>
-          <a:fontRef idx="minor">
-            <a:schemeClr val="lt1"/>
-          </a:fontRef>
-        </p:style>
-        <p:txBody>
-          <a:bodyPr rtlCol="0" anchor="ctr"/>
-          <a:lstStyle/>
-          <a:p>
-            <a:pPr algn="ctr"/>
-            <a:endParaRPr/>
-          </a:p>
-        </p:txBody>
-      </p:sp>
-      <p:sp>
-        <p:nvSpPr>
-          <p:cNvPr id="27" name="TextBox 26"/>
-          <p:cNvSpPr txBox="1"/>
-          <p:nvPr/>
-        </p:nvSpPr>
-        <p:spPr>
-          <a:xfrm>
-            <a:off x="621792" y="2817368"/>
-            <a:ext cx="1097280" cy="768096"/>
-          </a:xfrm>
-          <a:prstGeom prst="rect">
-            <a:avLst/>
-          </a:prstGeom>
-          <a:noFill/>
-        </p:spPr>
-        <p:txBody>
-          <a:bodyPr wrap="square" lIns="0" tIns="0" rIns="0" bIns="0" anchor="ctr">
-            <a:spAutoFit/>
-          </a:bodyPr>
-          <a:lstStyle/>
-          <a:p>
-            <a:pPr algn="ctr">
-              <a:lnSpc>
-                <a:spcPct val="100000"/>
-              </a:lnSpc>
-            </a:pPr>
-            <a:r>
-              <a:rPr sz="1000" b="1" i="0">
-                <a:solidFill>
-                  <a:srgbClr val="FFFFFF"/>
-                </a:solidFill>
-                <a:latin typeface="Calibri"/>
-              </a:rPr>
-              <a:t>02</a:t>
-            </a:r>
-          </a:p>
-          <a:p>
-            <a:pPr algn="ctr">
-              <a:lnSpc>
-                <a:spcPct val="100000"/>
-              </a:lnSpc>
-            </a:pPr>
-            <a:r>
-              <a:rPr sz="1000" b="1" i="0">
-                <a:solidFill>
-                  <a:srgbClr val="FFFFFF"/>
-                </a:solidFill>
-                <a:latin typeface="Calibri"/>
-              </a:rPr>
-              <a:t>MODEL</a:t>
-            </a:r>
-          </a:p>
-          <a:p>
-            <a:pPr algn="ctr">
-              <a:lnSpc>
-                <a:spcPct val="100000"/>
-              </a:lnSpc>
-            </a:pPr>
-            <a:r>
-              <a:rPr sz="1000" b="1" i="0">
-                <a:solidFill>
-                  <a:srgbClr val="FFFFFF"/>
-                </a:solidFill>
-                <a:latin typeface="Calibri"/>
-              </a:rPr>
-              <a:t>LAYER</a:t>
-            </a:r>
-          </a:p>
-        </p:txBody>
-      </p:sp>
-      <p:sp>
-        <p:nvSpPr>
-          <p:cNvPr id="28" name="Rounded Rectangle 27"/>
-          <p:cNvSpPr/>
-          <p:nvPr/>
-        </p:nvSpPr>
-        <p:spPr>
-          <a:xfrm>
-            <a:off x="1920240" y="2715768"/>
+            <a:off x="6935724" y="2715768"/>
             <a:ext cx="2398014" cy="914400"/>
           </a:xfrm>
           <a:prstGeom prst="roundRect">
@@ -15660,19 +15786,18 @@
           <a:lstStyle/>
           <a:p>
             <a:pPr algn="ctr"/>
-            <a:endParaRPr/>
-          </a:p>
-        </p:txBody>
-      </p:sp>
-      <p:sp>
-        <p:nvSpPr>
-          <p:cNvPr id="29" name="TextBox 28"/>
-          <p:cNvSpPr txBox="1"/>
-          <p:nvPr/>
-        </p:nvSpPr>
-        <p:spPr>
-          <a:xfrm>
-            <a:off x="1983740" y="2817368"/>
+          </a:p>
+        </p:txBody>
+      </p:sp>
+      <p:sp>
+        <p:nvSpPr>
+          <p:cNvPr id="35" name="TextBox 34"/>
+          <p:cNvSpPr txBox="1"/>
+          <p:nvPr/>
+        </p:nvSpPr>
+        <p:spPr>
+          <a:xfrm>
+            <a:off x="6999224" y="2817368"/>
             <a:ext cx="2271014" cy="457200"/>
           </a:xfrm>
           <a:prstGeom prst="rect">
@@ -15681,7 +15806,7 @@
           <a:noFill/>
         </p:spPr>
         <p:txBody>
-          <a:bodyPr wrap="square" lIns="0" tIns="0" rIns="0" bIns="0" anchor="ctr">
+          <a:bodyPr wrap="square" anchor="ctr" lIns="0" rIns="0" tIns="0" bIns="0">
             <a:spAutoFit/>
           </a:bodyPr>
           <a:lstStyle/>
@@ -15698,7 +15823,7 @@
                 </a:solidFill>
                 <a:latin typeface="Calibri"/>
               </a:rPr>
-              <a:t>Forecasting Engine</a:t>
+              <a:t>Vehicle Emission</a:t>
             </a:r>
           </a:p>
           <a:p>
@@ -15714,20 +15839,20 @@
                 </a:solidFill>
                 <a:latin typeface="Calibri"/>
               </a:rPr>
-              <a:t>24-72h/zone</a:t>
-            </a:r>
-          </a:p>
-        </p:txBody>
-      </p:sp>
-      <p:sp>
-        <p:nvSpPr>
-          <p:cNvPr id="30" name="TextBox 29"/>
-          <p:cNvSpPr txBox="1"/>
-          <p:nvPr/>
-        </p:nvSpPr>
-        <p:spPr>
-          <a:xfrm>
-            <a:off x="1983740" y="3282696"/>
+              <a:t>Load Model</a:t>
+            </a:r>
+          </a:p>
+        </p:txBody>
+      </p:sp>
+      <p:sp>
+        <p:nvSpPr>
+          <p:cNvPr id="36" name="TextBox 35"/>
+          <p:cNvSpPr txBox="1"/>
+          <p:nvPr/>
+        </p:nvSpPr>
+        <p:spPr>
+          <a:xfrm>
+            <a:off x="6999224" y="3282696"/>
             <a:ext cx="2271014" cy="292608"/>
           </a:xfrm>
           <a:prstGeom prst="rect">
@@ -15736,7 +15861,7 @@
           <a:noFill/>
         </p:spPr>
         <p:txBody>
-          <a:bodyPr wrap="square" lIns="0" tIns="0" rIns="0" bIns="0" anchor="t">
+          <a:bodyPr wrap="square" anchor="t" lIns="0" rIns="0" tIns="0" bIns="0">
             <a:spAutoFit/>
           </a:bodyPr>
           <a:lstStyle/>
@@ -15760,13 +15885,13 @@
       </p:sp>
       <p:sp>
         <p:nvSpPr>
-          <p:cNvPr id="31" name="Rounded Rectangle 30"/>
+          <p:cNvPr id="37" name="Rounded Rectangle 36"/>
           <p:cNvSpPr/>
           <p:nvPr/>
         </p:nvSpPr>
         <p:spPr>
           <a:xfrm>
-            <a:off x="4427982" y="2715768"/>
+            <a:off x="9443466" y="2715768"/>
             <a:ext cx="2398014" cy="914400"/>
           </a:xfrm>
           <a:prstGeom prst="roundRect">
@@ -15803,19 +15928,18 @@
           <a:lstStyle/>
           <a:p>
             <a:pPr algn="ctr"/>
-            <a:endParaRPr/>
-          </a:p>
-        </p:txBody>
-      </p:sp>
-      <p:sp>
-        <p:nvSpPr>
-          <p:cNvPr id="32" name="TextBox 31"/>
-          <p:cNvSpPr txBox="1"/>
-          <p:nvPr/>
-        </p:nvSpPr>
-        <p:spPr>
-          <a:xfrm>
-            <a:off x="4491482" y="2817368"/>
+          </a:p>
+        </p:txBody>
+      </p:sp>
+      <p:sp>
+        <p:nvSpPr>
+          <p:cNvPr id="38" name="TextBox 37"/>
+          <p:cNvSpPr txBox="1"/>
+          <p:nvPr/>
+        </p:nvSpPr>
+        <p:spPr>
+          <a:xfrm>
+            <a:off x="9506966" y="2817368"/>
             <a:ext cx="2271014" cy="457200"/>
           </a:xfrm>
           <a:prstGeom prst="rect">
@@ -15824,7 +15948,7 @@
           <a:noFill/>
         </p:spPr>
         <p:txBody>
-          <a:bodyPr wrap="square" lIns="0" tIns="0" rIns="0" bIns="0" anchor="ctr">
+          <a:bodyPr wrap="square" anchor="ctr" lIns="0" rIns="0" tIns="0" bIns="0">
             <a:spAutoFit/>
           </a:bodyPr>
           <a:lstStyle/>
@@ -15841,7 +15965,7 @@
                 </a:solidFill>
                 <a:latin typeface="Calibri"/>
               </a:rPr>
-              <a:t>Satellite Attribution</a:t>
+              <a:t>Enforcement Zone</a:t>
             </a:r>
           </a:p>
           <a:p>
@@ -15857,20 +15981,20 @@
                 </a:solidFill>
                 <a:latin typeface="Calibri"/>
               </a:rPr>
-              <a:t>(Prithvi)</a:t>
-            </a:r>
-          </a:p>
-        </p:txBody>
-      </p:sp>
-      <p:sp>
-        <p:nvSpPr>
-          <p:cNvPr id="33" name="TextBox 32"/>
-          <p:cNvSpPr txBox="1"/>
-          <p:nvPr/>
-        </p:nvSpPr>
-        <p:spPr>
-          <a:xfrm>
-            <a:off x="4491482" y="3282696"/>
+              <a:t>Ranker</a:t>
+            </a:r>
+          </a:p>
+        </p:txBody>
+      </p:sp>
+      <p:sp>
+        <p:nvSpPr>
+          <p:cNvPr id="39" name="TextBox 38"/>
+          <p:cNvSpPr txBox="1"/>
+          <p:nvPr/>
+        </p:nvSpPr>
+        <p:spPr>
+          <a:xfrm>
+            <a:off x="9506966" y="3282696"/>
             <a:ext cx="2271014" cy="292608"/>
           </a:xfrm>
           <a:prstGeom prst="rect">
@@ -15879,7 +16003,7 @@
           <a:noFill/>
         </p:spPr>
         <p:txBody>
-          <a:bodyPr wrap="square" lIns="0" tIns="0" rIns="0" bIns="0" anchor="t">
+          <a:bodyPr wrap="square" anchor="t" lIns="0" rIns="0" tIns="0" bIns="0">
             <a:spAutoFit/>
           </a:bodyPr>
           <a:lstStyle/>
@@ -15901,16 +16025,295 @@
           </a:p>
         </p:txBody>
       </p:sp>
-      <p:sp>
-        <p:nvSpPr>
-          <p:cNvPr id="34" name="Rounded Rectangle 33"/>
+      <p:cxnSp>
+        <p:nvCxnSpPr>
+          <p:cNvPr id="40" name="Connector 39"/>
+          <p:cNvCxnSpPr/>
+          <p:nvPr/>
+        </p:nvCxnSpPr>
+        <p:spPr>
+          <a:xfrm>
+            <a:off x="6309360" y="3648456"/>
+            <a:ext cx="0" cy="256032"/>
+          </a:xfrm>
+          <a:prstGeom prst="line">
+            <a:avLst/>
+          </a:prstGeom>
+          <a:ln w="19050">
+            <a:solidFill>
+              <a:srgbClr val="646E82"/>
+            </a:solidFill>
+            <a:tailEnd type="triangle" w="med" len="med"/>
+          </a:ln>
+        </p:spPr>
+        <p:style>
+          <a:lnRef idx="2">
+            <a:schemeClr val="accent1"/>
+          </a:lnRef>
+          <a:fillRef idx="0">
+            <a:schemeClr val="accent1"/>
+          </a:fillRef>
+          <a:effectRef idx="1">
+            <a:schemeClr val="accent1"/>
+          </a:effectRef>
+          <a:fontRef idx="minor">
+            <a:schemeClr val="tx1"/>
+          </a:fontRef>
+        </p:style>
+      </p:cxnSp>
+      <p:sp>
+        <p:nvSpPr>
+          <p:cNvPr id="41" name="Rounded Rectangle 40"/>
           <p:cNvSpPr/>
           <p:nvPr/>
         </p:nvSpPr>
         <p:spPr>
           <a:xfrm>
-            <a:off x="6935724" y="2715768"/>
-            <a:ext cx="2398014" cy="914400"/>
+            <a:off x="548640" y="4014216"/>
+            <a:ext cx="1234440" cy="914400"/>
+          </a:xfrm>
+          <a:prstGeom prst="roundRect">
+            <a:avLst>
+              <a:gd name="adj" fmla="val 6000"/>
+            </a:avLst>
+          </a:prstGeom>
+          <a:solidFill>
+            <a:srgbClr val="1E2761"/>
+          </a:solidFill>
+          <a:ln>
+            <a:noFill/>
+          </a:ln>
+          <a:effectLst/>
+        </p:spPr>
+        <p:style>
+          <a:lnRef idx="1">
+            <a:schemeClr val="accent1"/>
+          </a:lnRef>
+          <a:fillRef idx="3">
+            <a:schemeClr val="accent1"/>
+          </a:fillRef>
+          <a:effectRef idx="2">
+            <a:schemeClr val="accent1"/>
+          </a:effectRef>
+          <a:fontRef idx="minor">
+            <a:schemeClr val="lt1"/>
+          </a:fontRef>
+        </p:style>
+        <p:txBody>
+          <a:bodyPr rtlCol="0" anchor="ctr"/>
+          <a:lstStyle/>
+          <a:p>
+            <a:pPr algn="ctr"/>
+          </a:p>
+        </p:txBody>
+      </p:sp>
+      <p:sp>
+        <p:nvSpPr>
+          <p:cNvPr id="42" name="TextBox 41"/>
+          <p:cNvSpPr txBox="1"/>
+          <p:nvPr/>
+        </p:nvSpPr>
+        <p:spPr>
+          <a:xfrm>
+            <a:off x="621792" y="4115816"/>
+            <a:ext cx="1097280" cy="768096"/>
+          </a:xfrm>
+          <a:prstGeom prst="rect">
+            <a:avLst/>
+          </a:prstGeom>
+          <a:noFill/>
+        </p:spPr>
+        <p:txBody>
+          <a:bodyPr wrap="square" anchor="ctr" lIns="0" rIns="0" tIns="0" bIns="0">
+            <a:spAutoFit/>
+          </a:bodyPr>
+          <a:lstStyle/>
+          <a:p>
+            <a:pPr algn="ctr">
+              <a:lnSpc>
+                <a:spcPct val="100000"/>
+              </a:lnSpc>
+            </a:pPr>
+            <a:r>
+              <a:rPr sz="1000" b="1" i="0">
+                <a:solidFill>
+                  <a:srgbClr val="FFFFFF"/>
+                </a:solidFill>
+                <a:latin typeface="Calibri"/>
+              </a:rPr>
+              <a:t>03</a:t>
+            </a:r>
+          </a:p>
+          <a:p>
+            <a:pPr algn="ctr">
+              <a:lnSpc>
+                <a:spcPct val="100000"/>
+              </a:lnSpc>
+            </a:pPr>
+            <a:r>
+              <a:rPr sz="1000" b="1" i="0">
+                <a:solidFill>
+                  <a:srgbClr val="FFFFFF"/>
+                </a:solidFill>
+                <a:latin typeface="Calibri"/>
+              </a:rPr>
+              <a:t>FUSION</a:t>
+            </a:r>
+          </a:p>
+          <a:p>
+            <a:pPr algn="ctr">
+              <a:lnSpc>
+                <a:spcPct val="100000"/>
+              </a:lnSpc>
+            </a:pPr>
+            <a:r>
+              <a:rPr sz="1000" b="1" i="0">
+                <a:solidFill>
+                  <a:srgbClr val="FFFFFF"/>
+                </a:solidFill>
+                <a:latin typeface="Calibri"/>
+              </a:rPr>
+              <a:t>LAYER</a:t>
+            </a:r>
+          </a:p>
+        </p:txBody>
+      </p:sp>
+      <p:sp>
+        <p:nvSpPr>
+          <p:cNvPr id="43" name="Rounded Rectangle 42"/>
+          <p:cNvSpPr/>
+          <p:nvPr/>
+        </p:nvSpPr>
+        <p:spPr>
+          <a:xfrm>
+            <a:off x="1920240" y="4014216"/>
+            <a:ext cx="4905756" cy="914400"/>
+          </a:xfrm>
+          <a:prstGeom prst="roundRect">
+            <a:avLst>
+              <a:gd name="adj" fmla="val 8000"/>
+            </a:avLst>
+          </a:prstGeom>
+          <a:solidFill>
+            <a:srgbClr val="E8F5E9"/>
+          </a:solidFill>
+          <a:ln w="15875">
+            <a:solidFill>
+              <a:srgbClr val="2E7D32"/>
+            </a:solidFill>
+          </a:ln>
+          <a:effectLst/>
+        </p:spPr>
+        <p:style>
+          <a:lnRef idx="1">
+            <a:schemeClr val="accent1"/>
+          </a:lnRef>
+          <a:fillRef idx="3">
+            <a:schemeClr val="accent1"/>
+          </a:fillRef>
+          <a:effectRef idx="2">
+            <a:schemeClr val="accent1"/>
+          </a:effectRef>
+          <a:fontRef idx="minor">
+            <a:schemeClr val="lt1"/>
+          </a:fontRef>
+        </p:style>
+        <p:txBody>
+          <a:bodyPr rtlCol="0" anchor="ctr"/>
+          <a:lstStyle/>
+          <a:p>
+            <a:pPr algn="ctr"/>
+          </a:p>
+        </p:txBody>
+      </p:sp>
+      <p:sp>
+        <p:nvSpPr>
+          <p:cNvPr id="44" name="TextBox 43"/>
+          <p:cNvSpPr txBox="1"/>
+          <p:nvPr/>
+        </p:nvSpPr>
+        <p:spPr>
+          <a:xfrm>
+            <a:off x="1983740" y="4115816"/>
+            <a:ext cx="4778756" cy="457200"/>
+          </a:xfrm>
+          <a:prstGeom prst="rect">
+            <a:avLst/>
+          </a:prstGeom>
+          <a:noFill/>
+        </p:spPr>
+        <p:txBody>
+          <a:bodyPr wrap="square" anchor="ctr" lIns="0" rIns="0" tIns="0" bIns="0">
+            <a:spAutoFit/>
+          </a:bodyPr>
+          <a:lstStyle/>
+          <a:p>
+            <a:pPr algn="ctr">
+              <a:lnSpc>
+                <a:spcPct val="100000"/>
+              </a:lnSpc>
+            </a:pPr>
+            <a:r>
+              <a:rPr sz="950" b="1" i="0">
+                <a:solidFill>
+                  <a:srgbClr val="1A1A1A"/>
+                </a:solidFill>
+                <a:latin typeface="Calibri"/>
+              </a:rPr>
+              <a:t>GRAP Stage Mapper</a:t>
+            </a:r>
+          </a:p>
+        </p:txBody>
+      </p:sp>
+      <p:sp>
+        <p:nvSpPr>
+          <p:cNvPr id="45" name="TextBox 44"/>
+          <p:cNvSpPr txBox="1"/>
+          <p:nvPr/>
+        </p:nvSpPr>
+        <p:spPr>
+          <a:xfrm>
+            <a:off x="1983740" y="4581144"/>
+            <a:ext cx="4778756" cy="292608"/>
+          </a:xfrm>
+          <a:prstGeom prst="rect">
+            <a:avLst/>
+          </a:prstGeom>
+          <a:noFill/>
+        </p:spPr>
+        <p:txBody>
+          <a:bodyPr wrap="square" anchor="t" lIns="0" rIns="0" tIns="0" bIns="0">
+            <a:spAutoFit/>
+          </a:bodyPr>
+          <a:lstStyle/>
+          <a:p>
+            <a:pPr algn="ctr">
+              <a:lnSpc>
+                <a:spcPct val="100000"/>
+              </a:lnSpc>
+            </a:pPr>
+            <a:r>
+              <a:rPr sz="800" b="1" i="0">
+                <a:solidFill>
+                  <a:srgbClr val="2E7D32"/>
+                </a:solidFill>
+                <a:latin typeface="Calibri"/>
+              </a:rPr>
+              <a:t>LIVE</a:t>
+            </a:r>
+          </a:p>
+        </p:txBody>
+      </p:sp>
+      <p:sp>
+        <p:nvSpPr>
+          <p:cNvPr id="46" name="Rounded Rectangle 45"/>
+          <p:cNvSpPr/>
+          <p:nvPr/>
+        </p:nvSpPr>
+        <p:spPr>
+          <a:xfrm>
+            <a:off x="6935724" y="4014216"/>
+            <a:ext cx="4905756" cy="914400"/>
           </a:xfrm>
           <a:prstGeom prst="roundRect">
             <a:avLst>
@@ -15946,28 +16349,27 @@
           <a:lstStyle/>
           <a:p>
             <a:pPr algn="ctr"/>
-            <a:endParaRPr/>
-          </a:p>
-        </p:txBody>
-      </p:sp>
-      <p:sp>
-        <p:nvSpPr>
-          <p:cNvPr id="35" name="TextBox 34"/>
-          <p:cNvSpPr txBox="1"/>
-          <p:nvPr/>
-        </p:nvSpPr>
-        <p:spPr>
-          <a:xfrm>
-            <a:off x="6999224" y="2817368"/>
-            <a:ext cx="2271014" cy="457200"/>
-          </a:xfrm>
-          <a:prstGeom prst="rect">
-            <a:avLst/>
-          </a:prstGeom>
-          <a:noFill/>
-        </p:spPr>
-        <p:txBody>
-          <a:bodyPr wrap="square" lIns="0" tIns="0" rIns="0" bIns="0" anchor="ctr">
+          </a:p>
+        </p:txBody>
+      </p:sp>
+      <p:sp>
+        <p:nvSpPr>
+          <p:cNvPr id="47" name="TextBox 46"/>
+          <p:cNvSpPr txBox="1"/>
+          <p:nvPr/>
+        </p:nvSpPr>
+        <p:spPr>
+          <a:xfrm>
+            <a:off x="6999224" y="4115816"/>
+            <a:ext cx="4778756" cy="457200"/>
+          </a:xfrm>
+          <a:prstGeom prst="rect">
+            <a:avLst/>
+          </a:prstGeom>
+          <a:noFill/>
+        </p:spPr>
+        <p:txBody>
+          <a:bodyPr wrap="square" anchor="ctr" lIns="0" rIns="0" tIns="0" bIns="0">
             <a:spAutoFit/>
           </a:bodyPr>
           <a:lstStyle/>
@@ -15984,7 +16386,7 @@
                 </a:solidFill>
                 <a:latin typeface="Calibri"/>
               </a:rPr>
-              <a:t>Vehicle Emission</a:t>
+              <a:t>Cross-check vs.</a:t>
             </a:r>
           </a:p>
           <a:p>
@@ -16000,29 +16402,29 @@
                 </a:solidFill>
                 <a:latin typeface="Calibri"/>
               </a:rPr>
-              <a:t>Load Model</a:t>
-            </a:r>
-          </a:p>
-        </p:txBody>
-      </p:sp>
-      <p:sp>
-        <p:nvSpPr>
-          <p:cNvPr id="36" name="TextBox 35"/>
-          <p:cNvSpPr txBox="1"/>
-          <p:nvPr/>
-        </p:nvSpPr>
-        <p:spPr>
-          <a:xfrm>
-            <a:off x="6999224" y="3282696"/>
-            <a:ext cx="2271014" cy="292608"/>
-          </a:xfrm>
-          <a:prstGeom prst="rect">
-            <a:avLst/>
-          </a:prstGeom>
-          <a:noFill/>
-        </p:spPr>
-        <p:txBody>
-          <a:bodyPr wrap="square" lIns="0" tIns="0" rIns="0" bIns="0" anchor="t">
+              <a:t>Supersite &amp; SAFAR</a:t>
+            </a:r>
+          </a:p>
+        </p:txBody>
+      </p:sp>
+      <p:sp>
+        <p:nvSpPr>
+          <p:cNvPr id="48" name="TextBox 47"/>
+          <p:cNvSpPr txBox="1"/>
+          <p:nvPr/>
+        </p:nvSpPr>
+        <p:spPr>
+          <a:xfrm>
+            <a:off x="6999224" y="4581144"/>
+            <a:ext cx="4778756" cy="292608"/>
+          </a:xfrm>
+          <a:prstGeom prst="rect">
+            <a:avLst/>
+          </a:prstGeom>
+          <a:noFill/>
+        </p:spPr>
+        <p:txBody>
+          <a:bodyPr wrap="square" anchor="t" lIns="0" rIns="0" tIns="0" bIns="0">
             <a:spAutoFit/>
           </a:bodyPr>
           <a:lstStyle/>
@@ -16039,21 +16441,426 @@
                 </a:solidFill>
                 <a:latin typeface="Calibri"/>
               </a:rPr>
-              <a:t>NEEDS DATA</a:t>
-            </a:r>
-          </a:p>
-        </p:txBody>
-      </p:sp>
-      <p:sp>
-        <p:nvSpPr>
-          <p:cNvPr id="37" name="Rounded Rectangle 36"/>
+              <a:t>SCAFFOLDED</a:t>
+            </a:r>
+          </a:p>
+        </p:txBody>
+      </p:sp>
+      <p:cxnSp>
+        <p:nvCxnSpPr>
+          <p:cNvPr id="49" name="Connector 48"/>
+          <p:cNvCxnSpPr/>
+          <p:nvPr/>
+        </p:nvCxnSpPr>
+        <p:spPr>
+          <a:xfrm>
+            <a:off x="6309360" y="4946904"/>
+            <a:ext cx="0" cy="256032"/>
+          </a:xfrm>
+          <a:prstGeom prst="line">
+            <a:avLst/>
+          </a:prstGeom>
+          <a:ln w="19050">
+            <a:solidFill>
+              <a:srgbClr val="646E82"/>
+            </a:solidFill>
+            <a:tailEnd type="triangle" w="med" len="med"/>
+          </a:ln>
+        </p:spPr>
+        <p:style>
+          <a:lnRef idx="2">
+            <a:schemeClr val="accent1"/>
+          </a:lnRef>
+          <a:fillRef idx="0">
+            <a:schemeClr val="accent1"/>
+          </a:fillRef>
+          <a:effectRef idx="1">
+            <a:schemeClr val="accent1"/>
+          </a:effectRef>
+          <a:fontRef idx="minor">
+            <a:schemeClr val="tx1"/>
+          </a:fontRef>
+        </p:style>
+      </p:cxnSp>
+      <p:sp>
+        <p:nvSpPr>
+          <p:cNvPr id="50" name="Rounded Rectangle 49"/>
           <p:cNvSpPr/>
           <p:nvPr/>
         </p:nvSpPr>
         <p:spPr>
           <a:xfrm>
-            <a:off x="9443466" y="2715768"/>
-            <a:ext cx="2398014" cy="914400"/>
+            <a:off x="548640" y="5312664"/>
+            <a:ext cx="1234440" cy="914400"/>
+          </a:xfrm>
+          <a:prstGeom prst="roundRect">
+            <a:avLst>
+              <a:gd name="adj" fmla="val 6000"/>
+            </a:avLst>
+          </a:prstGeom>
+          <a:solidFill>
+            <a:srgbClr val="1E2761"/>
+          </a:solidFill>
+          <a:ln>
+            <a:noFill/>
+          </a:ln>
+          <a:effectLst/>
+        </p:spPr>
+        <p:style>
+          <a:lnRef idx="1">
+            <a:schemeClr val="accent1"/>
+          </a:lnRef>
+          <a:fillRef idx="3">
+            <a:schemeClr val="accent1"/>
+          </a:fillRef>
+          <a:effectRef idx="2">
+            <a:schemeClr val="accent1"/>
+          </a:effectRef>
+          <a:fontRef idx="minor">
+            <a:schemeClr val="lt1"/>
+          </a:fontRef>
+        </p:style>
+        <p:txBody>
+          <a:bodyPr rtlCol="0" anchor="ctr"/>
+          <a:lstStyle/>
+          <a:p>
+            <a:pPr algn="ctr"/>
+          </a:p>
+        </p:txBody>
+      </p:sp>
+      <p:sp>
+        <p:nvSpPr>
+          <p:cNvPr id="51" name="TextBox 50"/>
+          <p:cNvSpPr txBox="1"/>
+          <p:nvPr/>
+        </p:nvSpPr>
+        <p:spPr>
+          <a:xfrm>
+            <a:off x="621792" y="5414264"/>
+            <a:ext cx="1097280" cy="768096"/>
+          </a:xfrm>
+          <a:prstGeom prst="rect">
+            <a:avLst/>
+          </a:prstGeom>
+          <a:noFill/>
+        </p:spPr>
+        <p:txBody>
+          <a:bodyPr wrap="square" anchor="ctr" lIns="0" rIns="0" tIns="0" bIns="0">
+            <a:spAutoFit/>
+          </a:bodyPr>
+          <a:lstStyle/>
+          <a:p>
+            <a:pPr algn="ctr">
+              <a:lnSpc>
+                <a:spcPct val="100000"/>
+              </a:lnSpc>
+            </a:pPr>
+            <a:r>
+              <a:rPr sz="1000" b="1" i="0">
+                <a:solidFill>
+                  <a:srgbClr val="FFFFFF"/>
+                </a:solidFill>
+                <a:latin typeface="Calibri"/>
+              </a:rPr>
+              <a:t>04</a:t>
+            </a:r>
+          </a:p>
+          <a:p>
+            <a:pPr algn="ctr">
+              <a:lnSpc>
+                <a:spcPct val="100000"/>
+              </a:lnSpc>
+            </a:pPr>
+            <a:r>
+              <a:rPr sz="1000" b="1" i="0">
+                <a:solidFill>
+                  <a:srgbClr val="FFFFFF"/>
+                </a:solidFill>
+                <a:latin typeface="Calibri"/>
+              </a:rPr>
+              <a:t>OUTPUT</a:t>
+            </a:r>
+          </a:p>
+          <a:p>
+            <a:pPr algn="ctr">
+              <a:lnSpc>
+                <a:spcPct val="100000"/>
+              </a:lnSpc>
+            </a:pPr>
+            <a:r>
+              <a:rPr sz="1000" b="1" i="0">
+                <a:solidFill>
+                  <a:srgbClr val="FFFFFF"/>
+                </a:solidFill>
+                <a:latin typeface="Calibri"/>
+              </a:rPr>
+              <a:t>LAYER</a:t>
+            </a:r>
+          </a:p>
+        </p:txBody>
+      </p:sp>
+      <p:sp>
+        <p:nvSpPr>
+          <p:cNvPr id="52" name="Rounded Rectangle 51"/>
+          <p:cNvSpPr/>
+          <p:nvPr/>
+        </p:nvSpPr>
+        <p:spPr>
+          <a:xfrm>
+            <a:off x="1920240" y="5312664"/>
+            <a:ext cx="3233928" cy="914400"/>
+          </a:xfrm>
+          <a:prstGeom prst="roundRect">
+            <a:avLst>
+              <a:gd name="adj" fmla="val 8000"/>
+            </a:avLst>
+          </a:prstGeom>
+          <a:solidFill>
+            <a:srgbClr val="E8F5E9"/>
+          </a:solidFill>
+          <a:ln w="15875">
+            <a:solidFill>
+              <a:srgbClr val="2E7D32"/>
+            </a:solidFill>
+          </a:ln>
+          <a:effectLst/>
+        </p:spPr>
+        <p:style>
+          <a:lnRef idx="1">
+            <a:schemeClr val="accent1"/>
+          </a:lnRef>
+          <a:fillRef idx="3">
+            <a:schemeClr val="accent1"/>
+          </a:fillRef>
+          <a:effectRef idx="2">
+            <a:schemeClr val="accent1"/>
+          </a:effectRef>
+          <a:fontRef idx="minor">
+            <a:schemeClr val="lt1"/>
+          </a:fontRef>
+        </p:style>
+        <p:txBody>
+          <a:bodyPr rtlCol="0" anchor="ctr"/>
+          <a:lstStyle/>
+          <a:p>
+            <a:pPr algn="ctr"/>
+          </a:p>
+        </p:txBody>
+      </p:sp>
+      <p:sp>
+        <p:nvSpPr>
+          <p:cNvPr id="53" name="TextBox 52"/>
+          <p:cNvSpPr txBox="1"/>
+          <p:nvPr/>
+        </p:nvSpPr>
+        <p:spPr>
+          <a:xfrm>
+            <a:off x="1983740" y="5414264"/>
+            <a:ext cx="3106928" cy="457200"/>
+          </a:xfrm>
+          <a:prstGeom prst="rect">
+            <a:avLst/>
+          </a:prstGeom>
+          <a:noFill/>
+        </p:spPr>
+        <p:txBody>
+          <a:bodyPr wrap="square" anchor="ctr" lIns="0" rIns="0" tIns="0" bIns="0">
+            <a:spAutoFit/>
+          </a:bodyPr>
+          <a:lstStyle/>
+          <a:p>
+            <a:pPr algn="ctr">
+              <a:lnSpc>
+                <a:spcPct val="100000"/>
+              </a:lnSpc>
+            </a:pPr>
+            <a:r>
+              <a:rPr sz="950" b="1" i="0">
+                <a:solidFill>
+                  <a:srgbClr val="1A1A1A"/>
+                </a:solidFill>
+                <a:latin typeface="Calibri"/>
+              </a:rPr>
+              <a:t>Official Dashboard</a:t>
+            </a:r>
+          </a:p>
+        </p:txBody>
+      </p:sp>
+      <p:sp>
+        <p:nvSpPr>
+          <p:cNvPr id="54" name="TextBox 53"/>
+          <p:cNvSpPr txBox="1"/>
+          <p:nvPr/>
+        </p:nvSpPr>
+        <p:spPr>
+          <a:xfrm>
+            <a:off x="1983740" y="5879592"/>
+            <a:ext cx="3106928" cy="292608"/>
+          </a:xfrm>
+          <a:prstGeom prst="rect">
+            <a:avLst/>
+          </a:prstGeom>
+          <a:noFill/>
+        </p:spPr>
+        <p:txBody>
+          <a:bodyPr wrap="square" anchor="t" lIns="0" rIns="0" tIns="0" bIns="0">
+            <a:spAutoFit/>
+          </a:bodyPr>
+          <a:lstStyle/>
+          <a:p>
+            <a:pPr algn="ctr">
+              <a:lnSpc>
+                <a:spcPct val="100000"/>
+              </a:lnSpc>
+            </a:pPr>
+            <a:r>
+              <a:rPr sz="800" b="1" i="0">
+                <a:solidFill>
+                  <a:srgbClr val="2E7D32"/>
+                </a:solidFill>
+                <a:latin typeface="Calibri"/>
+              </a:rPr>
+              <a:t>LIVE</a:t>
+            </a:r>
+          </a:p>
+        </p:txBody>
+      </p:sp>
+      <p:sp>
+        <p:nvSpPr>
+          <p:cNvPr id="55" name="Rounded Rectangle 54"/>
+          <p:cNvSpPr/>
+          <p:nvPr/>
+        </p:nvSpPr>
+        <p:spPr>
+          <a:xfrm>
+            <a:off x="5263896" y="5312664"/>
+            <a:ext cx="3233928" cy="914400"/>
+          </a:xfrm>
+          <a:prstGeom prst="roundRect">
+            <a:avLst>
+              <a:gd name="adj" fmla="val 8000"/>
+            </a:avLst>
+          </a:prstGeom>
+          <a:solidFill>
+            <a:srgbClr val="E8F5E9"/>
+          </a:solidFill>
+          <a:ln w="15875">
+            <a:solidFill>
+              <a:srgbClr val="2E7D32"/>
+            </a:solidFill>
+          </a:ln>
+          <a:effectLst/>
+        </p:spPr>
+        <p:style>
+          <a:lnRef idx="1">
+            <a:schemeClr val="accent1"/>
+          </a:lnRef>
+          <a:fillRef idx="3">
+            <a:schemeClr val="accent1"/>
+          </a:fillRef>
+          <a:effectRef idx="2">
+            <a:schemeClr val="accent1"/>
+          </a:effectRef>
+          <a:fontRef idx="minor">
+            <a:schemeClr val="lt1"/>
+          </a:fontRef>
+        </p:style>
+        <p:txBody>
+          <a:bodyPr rtlCol="0" anchor="ctr"/>
+          <a:lstStyle/>
+          <a:p>
+            <a:pPr algn="ctr"/>
+          </a:p>
+        </p:txBody>
+      </p:sp>
+      <p:sp>
+        <p:nvSpPr>
+          <p:cNvPr id="56" name="TextBox 55"/>
+          <p:cNvSpPr txBox="1"/>
+          <p:nvPr/>
+        </p:nvSpPr>
+        <p:spPr>
+          <a:xfrm>
+            <a:off x="5327396" y="5414264"/>
+            <a:ext cx="3106928" cy="457200"/>
+          </a:xfrm>
+          <a:prstGeom prst="rect">
+            <a:avLst/>
+          </a:prstGeom>
+          <a:noFill/>
+        </p:spPr>
+        <p:txBody>
+          <a:bodyPr wrap="square" anchor="ctr" lIns="0" rIns="0" tIns="0" bIns="0">
+            <a:spAutoFit/>
+          </a:bodyPr>
+          <a:lstStyle/>
+          <a:p>
+            <a:pPr algn="ctr">
+              <a:lnSpc>
+                <a:spcPct val="100000"/>
+              </a:lnSpc>
+            </a:pPr>
+            <a:r>
+              <a:rPr sz="950" b="1" i="0">
+                <a:solidFill>
+                  <a:srgbClr val="1A1A1A"/>
+                </a:solidFill>
+                <a:latin typeface="Calibri"/>
+              </a:rPr>
+              <a:t>Alert Generator</a:t>
+            </a:r>
+          </a:p>
+        </p:txBody>
+      </p:sp>
+      <p:sp>
+        <p:nvSpPr>
+          <p:cNvPr id="57" name="TextBox 56"/>
+          <p:cNvSpPr txBox="1"/>
+          <p:nvPr/>
+        </p:nvSpPr>
+        <p:spPr>
+          <a:xfrm>
+            <a:off x="5327396" y="5879592"/>
+            <a:ext cx="3106928" cy="292608"/>
+          </a:xfrm>
+          <a:prstGeom prst="rect">
+            <a:avLst/>
+          </a:prstGeom>
+          <a:noFill/>
+        </p:spPr>
+        <p:txBody>
+          <a:bodyPr wrap="square" anchor="t" lIns="0" rIns="0" tIns="0" bIns="0">
+            <a:spAutoFit/>
+          </a:bodyPr>
+          <a:lstStyle/>
+          <a:p>
+            <a:pPr algn="ctr">
+              <a:lnSpc>
+                <a:spcPct val="100000"/>
+              </a:lnSpc>
+            </a:pPr>
+            <a:r>
+              <a:rPr sz="800" b="1" i="0">
+                <a:solidFill>
+                  <a:srgbClr val="2E7D32"/>
+                </a:solidFill>
+                <a:latin typeface="Calibri"/>
+              </a:rPr>
+              <a:t>LIVE</a:t>
+            </a:r>
+          </a:p>
+        </p:txBody>
+      </p:sp>
+      <p:sp>
+        <p:nvSpPr>
+          <p:cNvPr id="58" name="Rounded Rectangle 57"/>
+          <p:cNvSpPr/>
+          <p:nvPr/>
+        </p:nvSpPr>
+        <p:spPr>
+          <a:xfrm>
+            <a:off x="8607552" y="5312664"/>
+            <a:ext cx="3233928" cy="914400"/>
           </a:xfrm>
           <a:prstGeom prst="roundRect">
             <a:avLst>
@@ -16089,982 +16896,6 @@
           <a:lstStyle/>
           <a:p>
             <a:pPr algn="ctr"/>
-            <a:endParaRPr/>
-          </a:p>
-        </p:txBody>
-      </p:sp>
-      <p:sp>
-        <p:nvSpPr>
-          <p:cNvPr id="38" name="TextBox 37"/>
-          <p:cNvSpPr txBox="1"/>
-          <p:nvPr/>
-        </p:nvSpPr>
-        <p:spPr>
-          <a:xfrm>
-            <a:off x="9506966" y="2817368"/>
-            <a:ext cx="2271014" cy="457200"/>
-          </a:xfrm>
-          <a:prstGeom prst="rect">
-            <a:avLst/>
-          </a:prstGeom>
-          <a:noFill/>
-        </p:spPr>
-        <p:txBody>
-          <a:bodyPr wrap="square" lIns="0" tIns="0" rIns="0" bIns="0" anchor="ctr">
-            <a:spAutoFit/>
-          </a:bodyPr>
-          <a:lstStyle/>
-          <a:p>
-            <a:pPr algn="ctr">
-              <a:lnSpc>
-                <a:spcPct val="100000"/>
-              </a:lnSpc>
-            </a:pPr>
-            <a:r>
-              <a:rPr sz="950" b="1" i="0">
-                <a:solidFill>
-                  <a:srgbClr val="1A1A1A"/>
-                </a:solidFill>
-                <a:latin typeface="Calibri"/>
-              </a:rPr>
-              <a:t>Enforcement Zone</a:t>
-            </a:r>
-          </a:p>
-          <a:p>
-            <a:pPr algn="ctr">
-              <a:lnSpc>
-                <a:spcPct val="100000"/>
-              </a:lnSpc>
-            </a:pPr>
-            <a:r>
-              <a:rPr sz="950" b="1" i="0">
-                <a:solidFill>
-                  <a:srgbClr val="1A1A1A"/>
-                </a:solidFill>
-                <a:latin typeface="Calibri"/>
-              </a:rPr>
-              <a:t>Ranker</a:t>
-            </a:r>
-          </a:p>
-        </p:txBody>
-      </p:sp>
-      <p:sp>
-        <p:nvSpPr>
-          <p:cNvPr id="39" name="TextBox 38"/>
-          <p:cNvSpPr txBox="1"/>
-          <p:nvPr/>
-        </p:nvSpPr>
-        <p:spPr>
-          <a:xfrm>
-            <a:off x="9506966" y="3282696"/>
-            <a:ext cx="2271014" cy="292608"/>
-          </a:xfrm>
-          <a:prstGeom prst="rect">
-            <a:avLst/>
-          </a:prstGeom>
-          <a:noFill/>
-        </p:spPr>
-        <p:txBody>
-          <a:bodyPr wrap="square" lIns="0" tIns="0" rIns="0" bIns="0" anchor="t">
-            <a:spAutoFit/>
-          </a:bodyPr>
-          <a:lstStyle/>
-          <a:p>
-            <a:pPr algn="ctr">
-              <a:lnSpc>
-                <a:spcPct val="100000"/>
-              </a:lnSpc>
-            </a:pPr>
-            <a:r>
-              <a:rPr sz="800" b="1" i="0">
-                <a:solidFill>
-                  <a:srgbClr val="646E82"/>
-                </a:solidFill>
-                <a:latin typeface="Calibri"/>
-              </a:rPr>
-              <a:t>TEAMMATE</a:t>
-            </a:r>
-          </a:p>
-        </p:txBody>
-      </p:sp>
-      <p:cxnSp>
-        <p:nvCxnSpPr>
-          <p:cNvPr id="40" name="Connector 39"/>
-          <p:cNvCxnSpPr/>
-          <p:nvPr/>
-        </p:nvCxnSpPr>
-        <p:spPr>
-          <a:xfrm>
-            <a:off x="6309360" y="3648456"/>
-            <a:ext cx="0" cy="256032"/>
-          </a:xfrm>
-          <a:prstGeom prst="line">
-            <a:avLst/>
-          </a:prstGeom>
-          <a:ln w="19050">
-            <a:solidFill>
-              <a:srgbClr val="646E82"/>
-            </a:solidFill>
-            <a:tailEnd type="triangle" w="med" len="med"/>
-          </a:ln>
-        </p:spPr>
-        <p:style>
-          <a:lnRef idx="2">
-            <a:schemeClr val="accent1"/>
-          </a:lnRef>
-          <a:fillRef idx="0">
-            <a:schemeClr val="accent1"/>
-          </a:fillRef>
-          <a:effectRef idx="1">
-            <a:schemeClr val="accent1"/>
-          </a:effectRef>
-          <a:fontRef idx="minor">
-            <a:schemeClr val="tx1"/>
-          </a:fontRef>
-        </p:style>
-      </p:cxnSp>
-      <p:sp>
-        <p:nvSpPr>
-          <p:cNvPr id="41" name="Rounded Rectangle 40"/>
-          <p:cNvSpPr/>
-          <p:nvPr/>
-        </p:nvSpPr>
-        <p:spPr>
-          <a:xfrm>
-            <a:off x="548640" y="4014216"/>
-            <a:ext cx="1234440" cy="914400"/>
-          </a:xfrm>
-          <a:prstGeom prst="roundRect">
-            <a:avLst>
-              <a:gd name="adj" fmla="val 6000"/>
-            </a:avLst>
-          </a:prstGeom>
-          <a:solidFill>
-            <a:srgbClr val="1E2761"/>
-          </a:solidFill>
-          <a:ln>
-            <a:noFill/>
-          </a:ln>
-          <a:effectLst/>
-        </p:spPr>
-        <p:style>
-          <a:lnRef idx="1">
-            <a:schemeClr val="accent1"/>
-          </a:lnRef>
-          <a:fillRef idx="3">
-            <a:schemeClr val="accent1"/>
-          </a:fillRef>
-          <a:effectRef idx="2">
-            <a:schemeClr val="accent1"/>
-          </a:effectRef>
-          <a:fontRef idx="minor">
-            <a:schemeClr val="lt1"/>
-          </a:fontRef>
-        </p:style>
-        <p:txBody>
-          <a:bodyPr rtlCol="0" anchor="ctr"/>
-          <a:lstStyle/>
-          <a:p>
-            <a:pPr algn="ctr"/>
-            <a:endParaRPr/>
-          </a:p>
-        </p:txBody>
-      </p:sp>
-      <p:sp>
-        <p:nvSpPr>
-          <p:cNvPr id="42" name="TextBox 41"/>
-          <p:cNvSpPr txBox="1"/>
-          <p:nvPr/>
-        </p:nvSpPr>
-        <p:spPr>
-          <a:xfrm>
-            <a:off x="621792" y="4115816"/>
-            <a:ext cx="1097280" cy="768096"/>
-          </a:xfrm>
-          <a:prstGeom prst="rect">
-            <a:avLst/>
-          </a:prstGeom>
-          <a:noFill/>
-        </p:spPr>
-        <p:txBody>
-          <a:bodyPr wrap="square" lIns="0" tIns="0" rIns="0" bIns="0" anchor="ctr">
-            <a:spAutoFit/>
-          </a:bodyPr>
-          <a:lstStyle/>
-          <a:p>
-            <a:pPr algn="ctr">
-              <a:lnSpc>
-                <a:spcPct val="100000"/>
-              </a:lnSpc>
-            </a:pPr>
-            <a:r>
-              <a:rPr sz="1000" b="1" i="0">
-                <a:solidFill>
-                  <a:srgbClr val="FFFFFF"/>
-                </a:solidFill>
-                <a:latin typeface="Calibri"/>
-              </a:rPr>
-              <a:t>03</a:t>
-            </a:r>
-          </a:p>
-          <a:p>
-            <a:pPr algn="ctr">
-              <a:lnSpc>
-                <a:spcPct val="100000"/>
-              </a:lnSpc>
-            </a:pPr>
-            <a:r>
-              <a:rPr sz="1000" b="1" i="0">
-                <a:solidFill>
-                  <a:srgbClr val="FFFFFF"/>
-                </a:solidFill>
-                <a:latin typeface="Calibri"/>
-              </a:rPr>
-              <a:t>FUSION</a:t>
-            </a:r>
-          </a:p>
-          <a:p>
-            <a:pPr algn="ctr">
-              <a:lnSpc>
-                <a:spcPct val="100000"/>
-              </a:lnSpc>
-            </a:pPr>
-            <a:r>
-              <a:rPr sz="1000" b="1" i="0">
-                <a:solidFill>
-                  <a:srgbClr val="FFFFFF"/>
-                </a:solidFill>
-                <a:latin typeface="Calibri"/>
-              </a:rPr>
-              <a:t>LAYER</a:t>
-            </a:r>
-          </a:p>
-        </p:txBody>
-      </p:sp>
-      <p:sp>
-        <p:nvSpPr>
-          <p:cNvPr id="43" name="Rounded Rectangle 42"/>
-          <p:cNvSpPr/>
-          <p:nvPr/>
-        </p:nvSpPr>
-        <p:spPr>
-          <a:xfrm>
-            <a:off x="1920240" y="4014216"/>
-            <a:ext cx="4905756" cy="914400"/>
-          </a:xfrm>
-          <a:prstGeom prst="roundRect">
-            <a:avLst>
-              <a:gd name="adj" fmla="val 8000"/>
-            </a:avLst>
-          </a:prstGeom>
-          <a:solidFill>
-            <a:srgbClr val="E8F5E9"/>
-          </a:solidFill>
-          <a:ln w="15875">
-            <a:solidFill>
-              <a:srgbClr val="2E7D32"/>
-            </a:solidFill>
-          </a:ln>
-          <a:effectLst/>
-        </p:spPr>
-        <p:style>
-          <a:lnRef idx="1">
-            <a:schemeClr val="accent1"/>
-          </a:lnRef>
-          <a:fillRef idx="3">
-            <a:schemeClr val="accent1"/>
-          </a:fillRef>
-          <a:effectRef idx="2">
-            <a:schemeClr val="accent1"/>
-          </a:effectRef>
-          <a:fontRef idx="minor">
-            <a:schemeClr val="lt1"/>
-          </a:fontRef>
-        </p:style>
-        <p:txBody>
-          <a:bodyPr rtlCol="0" anchor="ctr"/>
-          <a:lstStyle/>
-          <a:p>
-            <a:pPr algn="ctr"/>
-            <a:endParaRPr/>
-          </a:p>
-        </p:txBody>
-      </p:sp>
-      <p:sp>
-        <p:nvSpPr>
-          <p:cNvPr id="44" name="TextBox 43"/>
-          <p:cNvSpPr txBox="1"/>
-          <p:nvPr/>
-        </p:nvSpPr>
-        <p:spPr>
-          <a:xfrm>
-            <a:off x="1983740" y="4115816"/>
-            <a:ext cx="4778756" cy="457200"/>
-          </a:xfrm>
-          <a:prstGeom prst="rect">
-            <a:avLst/>
-          </a:prstGeom>
-          <a:noFill/>
-        </p:spPr>
-        <p:txBody>
-          <a:bodyPr wrap="square" lIns="0" tIns="0" rIns="0" bIns="0" anchor="ctr">
-            <a:spAutoFit/>
-          </a:bodyPr>
-          <a:lstStyle/>
-          <a:p>
-            <a:pPr algn="ctr">
-              <a:lnSpc>
-                <a:spcPct val="100000"/>
-              </a:lnSpc>
-            </a:pPr>
-            <a:r>
-              <a:rPr sz="950" b="1" i="0">
-                <a:solidFill>
-                  <a:srgbClr val="1A1A1A"/>
-                </a:solidFill>
-                <a:latin typeface="Calibri"/>
-              </a:rPr>
-              <a:t>GRAP Stage Mapper</a:t>
-            </a:r>
-          </a:p>
-        </p:txBody>
-      </p:sp>
-      <p:sp>
-        <p:nvSpPr>
-          <p:cNvPr id="45" name="TextBox 44"/>
-          <p:cNvSpPr txBox="1"/>
-          <p:nvPr/>
-        </p:nvSpPr>
-        <p:spPr>
-          <a:xfrm>
-            <a:off x="1983740" y="4581144"/>
-            <a:ext cx="4778756" cy="292608"/>
-          </a:xfrm>
-          <a:prstGeom prst="rect">
-            <a:avLst/>
-          </a:prstGeom>
-          <a:noFill/>
-        </p:spPr>
-        <p:txBody>
-          <a:bodyPr wrap="square" lIns="0" tIns="0" rIns="0" bIns="0" anchor="t">
-            <a:spAutoFit/>
-          </a:bodyPr>
-          <a:lstStyle/>
-          <a:p>
-            <a:pPr algn="ctr">
-              <a:lnSpc>
-                <a:spcPct val="100000"/>
-              </a:lnSpc>
-            </a:pPr>
-            <a:r>
-              <a:rPr sz="800" b="1" i="0">
-                <a:solidFill>
-                  <a:srgbClr val="2E7D32"/>
-                </a:solidFill>
-                <a:latin typeface="Calibri"/>
-              </a:rPr>
-              <a:t>LIVE</a:t>
-            </a:r>
-          </a:p>
-        </p:txBody>
-      </p:sp>
-      <p:sp>
-        <p:nvSpPr>
-          <p:cNvPr id="46" name="Rounded Rectangle 45"/>
-          <p:cNvSpPr/>
-          <p:nvPr/>
-        </p:nvSpPr>
-        <p:spPr>
-          <a:xfrm>
-            <a:off x="6935724" y="4014216"/>
-            <a:ext cx="4905756" cy="914400"/>
-          </a:xfrm>
-          <a:prstGeom prst="roundRect">
-            <a:avLst>
-              <a:gd name="adj" fmla="val 8000"/>
-            </a:avLst>
-          </a:prstGeom>
-          <a:solidFill>
-            <a:srgbClr val="FFF8E1"/>
-          </a:solidFill>
-          <a:ln w="15875">
-            <a:solidFill>
-              <a:srgbClr val="E68A00"/>
-            </a:solidFill>
-          </a:ln>
-          <a:effectLst/>
-        </p:spPr>
-        <p:style>
-          <a:lnRef idx="1">
-            <a:schemeClr val="accent1"/>
-          </a:lnRef>
-          <a:fillRef idx="3">
-            <a:schemeClr val="accent1"/>
-          </a:fillRef>
-          <a:effectRef idx="2">
-            <a:schemeClr val="accent1"/>
-          </a:effectRef>
-          <a:fontRef idx="minor">
-            <a:schemeClr val="lt1"/>
-          </a:fontRef>
-        </p:style>
-        <p:txBody>
-          <a:bodyPr rtlCol="0" anchor="ctr"/>
-          <a:lstStyle/>
-          <a:p>
-            <a:pPr algn="ctr"/>
-            <a:endParaRPr/>
-          </a:p>
-        </p:txBody>
-      </p:sp>
-      <p:sp>
-        <p:nvSpPr>
-          <p:cNvPr id="47" name="TextBox 46"/>
-          <p:cNvSpPr txBox="1"/>
-          <p:nvPr/>
-        </p:nvSpPr>
-        <p:spPr>
-          <a:xfrm>
-            <a:off x="6999224" y="4115816"/>
-            <a:ext cx="4778756" cy="457200"/>
-          </a:xfrm>
-          <a:prstGeom prst="rect">
-            <a:avLst/>
-          </a:prstGeom>
-          <a:noFill/>
-        </p:spPr>
-        <p:txBody>
-          <a:bodyPr wrap="square" lIns="0" tIns="0" rIns="0" bIns="0" anchor="ctr">
-            <a:spAutoFit/>
-          </a:bodyPr>
-          <a:lstStyle/>
-          <a:p>
-            <a:pPr algn="ctr">
-              <a:lnSpc>
-                <a:spcPct val="100000"/>
-              </a:lnSpc>
-            </a:pPr>
-            <a:r>
-              <a:rPr sz="950" b="1" i="0">
-                <a:solidFill>
-                  <a:srgbClr val="1A1A1A"/>
-                </a:solidFill>
-                <a:latin typeface="Calibri"/>
-              </a:rPr>
-              <a:t>Cross-check vs.</a:t>
-            </a:r>
-          </a:p>
-          <a:p>
-            <a:pPr algn="ctr">
-              <a:lnSpc>
-                <a:spcPct val="100000"/>
-              </a:lnSpc>
-            </a:pPr>
-            <a:r>
-              <a:rPr sz="950" b="1" i="0">
-                <a:solidFill>
-                  <a:srgbClr val="1A1A1A"/>
-                </a:solidFill>
-                <a:latin typeface="Calibri"/>
-              </a:rPr>
-              <a:t>Supersite &amp; SAFAR</a:t>
-            </a:r>
-          </a:p>
-        </p:txBody>
-      </p:sp>
-      <p:sp>
-        <p:nvSpPr>
-          <p:cNvPr id="48" name="TextBox 47"/>
-          <p:cNvSpPr txBox="1"/>
-          <p:nvPr/>
-        </p:nvSpPr>
-        <p:spPr>
-          <a:xfrm>
-            <a:off x="6999224" y="4581144"/>
-            <a:ext cx="4778756" cy="292608"/>
-          </a:xfrm>
-          <a:prstGeom prst="rect">
-            <a:avLst/>
-          </a:prstGeom>
-          <a:noFill/>
-        </p:spPr>
-        <p:txBody>
-          <a:bodyPr wrap="square" lIns="0" tIns="0" rIns="0" bIns="0" anchor="t">
-            <a:spAutoFit/>
-          </a:bodyPr>
-          <a:lstStyle/>
-          <a:p>
-            <a:pPr algn="ctr">
-              <a:lnSpc>
-                <a:spcPct val="100000"/>
-              </a:lnSpc>
-            </a:pPr>
-            <a:r>
-              <a:rPr sz="800" b="1" i="0">
-                <a:solidFill>
-                  <a:srgbClr val="E68A00"/>
-                </a:solidFill>
-                <a:latin typeface="Calibri"/>
-              </a:rPr>
-              <a:t>SCAFFOLDED</a:t>
-            </a:r>
-          </a:p>
-        </p:txBody>
-      </p:sp>
-      <p:cxnSp>
-        <p:nvCxnSpPr>
-          <p:cNvPr id="49" name="Connector 48"/>
-          <p:cNvCxnSpPr/>
-          <p:nvPr/>
-        </p:nvCxnSpPr>
-        <p:spPr>
-          <a:xfrm>
-            <a:off x="6309360" y="4946904"/>
-            <a:ext cx="0" cy="256032"/>
-          </a:xfrm>
-          <a:prstGeom prst="line">
-            <a:avLst/>
-          </a:prstGeom>
-          <a:ln w="19050">
-            <a:solidFill>
-              <a:srgbClr val="646E82"/>
-            </a:solidFill>
-            <a:tailEnd type="triangle" w="med" len="med"/>
-          </a:ln>
-        </p:spPr>
-        <p:style>
-          <a:lnRef idx="2">
-            <a:schemeClr val="accent1"/>
-          </a:lnRef>
-          <a:fillRef idx="0">
-            <a:schemeClr val="accent1"/>
-          </a:fillRef>
-          <a:effectRef idx="1">
-            <a:schemeClr val="accent1"/>
-          </a:effectRef>
-          <a:fontRef idx="minor">
-            <a:schemeClr val="tx1"/>
-          </a:fontRef>
-        </p:style>
-      </p:cxnSp>
-      <p:sp>
-        <p:nvSpPr>
-          <p:cNvPr id="50" name="Rounded Rectangle 49"/>
-          <p:cNvSpPr/>
-          <p:nvPr/>
-        </p:nvSpPr>
-        <p:spPr>
-          <a:xfrm>
-            <a:off x="548640" y="5312664"/>
-            <a:ext cx="1234440" cy="914400"/>
-          </a:xfrm>
-          <a:prstGeom prst="roundRect">
-            <a:avLst>
-              <a:gd name="adj" fmla="val 6000"/>
-            </a:avLst>
-          </a:prstGeom>
-          <a:solidFill>
-            <a:srgbClr val="1E2761"/>
-          </a:solidFill>
-          <a:ln>
-            <a:noFill/>
-          </a:ln>
-          <a:effectLst/>
-        </p:spPr>
-        <p:style>
-          <a:lnRef idx="1">
-            <a:schemeClr val="accent1"/>
-          </a:lnRef>
-          <a:fillRef idx="3">
-            <a:schemeClr val="accent1"/>
-          </a:fillRef>
-          <a:effectRef idx="2">
-            <a:schemeClr val="accent1"/>
-          </a:effectRef>
-          <a:fontRef idx="minor">
-            <a:schemeClr val="lt1"/>
-          </a:fontRef>
-        </p:style>
-        <p:txBody>
-          <a:bodyPr rtlCol="0" anchor="ctr"/>
-          <a:lstStyle/>
-          <a:p>
-            <a:pPr algn="ctr"/>
-            <a:endParaRPr/>
-          </a:p>
-        </p:txBody>
-      </p:sp>
-      <p:sp>
-        <p:nvSpPr>
-          <p:cNvPr id="51" name="TextBox 50"/>
-          <p:cNvSpPr txBox="1"/>
-          <p:nvPr/>
-        </p:nvSpPr>
-        <p:spPr>
-          <a:xfrm>
-            <a:off x="621792" y="5414264"/>
-            <a:ext cx="1097280" cy="768096"/>
-          </a:xfrm>
-          <a:prstGeom prst="rect">
-            <a:avLst/>
-          </a:prstGeom>
-          <a:noFill/>
-        </p:spPr>
-        <p:txBody>
-          <a:bodyPr wrap="square" lIns="0" tIns="0" rIns="0" bIns="0" anchor="ctr">
-            <a:spAutoFit/>
-          </a:bodyPr>
-          <a:lstStyle/>
-          <a:p>
-            <a:pPr algn="ctr">
-              <a:lnSpc>
-                <a:spcPct val="100000"/>
-              </a:lnSpc>
-            </a:pPr>
-            <a:r>
-              <a:rPr sz="1000" b="1" i="0">
-                <a:solidFill>
-                  <a:srgbClr val="FFFFFF"/>
-                </a:solidFill>
-                <a:latin typeface="Calibri"/>
-              </a:rPr>
-              <a:t>04</a:t>
-            </a:r>
-          </a:p>
-          <a:p>
-            <a:pPr algn="ctr">
-              <a:lnSpc>
-                <a:spcPct val="100000"/>
-              </a:lnSpc>
-            </a:pPr>
-            <a:r>
-              <a:rPr sz="1000" b="1" i="0">
-                <a:solidFill>
-                  <a:srgbClr val="FFFFFF"/>
-                </a:solidFill>
-                <a:latin typeface="Calibri"/>
-              </a:rPr>
-              <a:t>OUTPUT</a:t>
-            </a:r>
-          </a:p>
-          <a:p>
-            <a:pPr algn="ctr">
-              <a:lnSpc>
-                <a:spcPct val="100000"/>
-              </a:lnSpc>
-            </a:pPr>
-            <a:r>
-              <a:rPr sz="1000" b="1" i="0">
-                <a:solidFill>
-                  <a:srgbClr val="FFFFFF"/>
-                </a:solidFill>
-                <a:latin typeface="Calibri"/>
-              </a:rPr>
-              <a:t>LAYER</a:t>
-            </a:r>
-          </a:p>
-        </p:txBody>
-      </p:sp>
-      <p:sp>
-        <p:nvSpPr>
-          <p:cNvPr id="52" name="Rounded Rectangle 51"/>
-          <p:cNvSpPr/>
-          <p:nvPr/>
-        </p:nvSpPr>
-        <p:spPr>
-          <a:xfrm>
-            <a:off x="1920240" y="5312664"/>
-            <a:ext cx="3233928" cy="914400"/>
-          </a:xfrm>
-          <a:prstGeom prst="roundRect">
-            <a:avLst>
-              <a:gd name="adj" fmla="val 8000"/>
-            </a:avLst>
-          </a:prstGeom>
-          <a:solidFill>
-            <a:srgbClr val="E8F5E9"/>
-          </a:solidFill>
-          <a:ln w="15875">
-            <a:solidFill>
-              <a:srgbClr val="2E7D32"/>
-            </a:solidFill>
-          </a:ln>
-          <a:effectLst/>
-        </p:spPr>
-        <p:style>
-          <a:lnRef idx="1">
-            <a:schemeClr val="accent1"/>
-          </a:lnRef>
-          <a:fillRef idx="3">
-            <a:schemeClr val="accent1"/>
-          </a:fillRef>
-          <a:effectRef idx="2">
-            <a:schemeClr val="accent1"/>
-          </a:effectRef>
-          <a:fontRef idx="minor">
-            <a:schemeClr val="lt1"/>
-          </a:fontRef>
-        </p:style>
-        <p:txBody>
-          <a:bodyPr rtlCol="0" anchor="ctr"/>
-          <a:lstStyle/>
-          <a:p>
-            <a:pPr algn="ctr"/>
-            <a:endParaRPr/>
-          </a:p>
-        </p:txBody>
-      </p:sp>
-      <p:sp>
-        <p:nvSpPr>
-          <p:cNvPr id="53" name="TextBox 52"/>
-          <p:cNvSpPr txBox="1"/>
-          <p:nvPr/>
-        </p:nvSpPr>
-        <p:spPr>
-          <a:xfrm>
-            <a:off x="1983740" y="5414264"/>
-            <a:ext cx="3106928" cy="457200"/>
-          </a:xfrm>
-          <a:prstGeom prst="rect">
-            <a:avLst/>
-          </a:prstGeom>
-          <a:noFill/>
-        </p:spPr>
-        <p:txBody>
-          <a:bodyPr wrap="square" lIns="0" tIns="0" rIns="0" bIns="0" anchor="ctr">
-            <a:spAutoFit/>
-          </a:bodyPr>
-          <a:lstStyle/>
-          <a:p>
-            <a:pPr algn="ctr">
-              <a:lnSpc>
-                <a:spcPct val="100000"/>
-              </a:lnSpc>
-            </a:pPr>
-            <a:r>
-              <a:rPr sz="950" b="1" i="0">
-                <a:solidFill>
-                  <a:srgbClr val="1A1A1A"/>
-                </a:solidFill>
-                <a:latin typeface="Calibri"/>
-              </a:rPr>
-              <a:t>Official Dashboard</a:t>
-            </a:r>
-          </a:p>
-        </p:txBody>
-      </p:sp>
-      <p:sp>
-        <p:nvSpPr>
-          <p:cNvPr id="54" name="TextBox 53"/>
-          <p:cNvSpPr txBox="1"/>
-          <p:nvPr/>
-        </p:nvSpPr>
-        <p:spPr>
-          <a:xfrm>
-            <a:off x="1983740" y="5879592"/>
-            <a:ext cx="3106928" cy="292608"/>
-          </a:xfrm>
-          <a:prstGeom prst="rect">
-            <a:avLst/>
-          </a:prstGeom>
-          <a:noFill/>
-        </p:spPr>
-        <p:txBody>
-          <a:bodyPr wrap="square" lIns="0" tIns="0" rIns="0" bIns="0" anchor="t">
-            <a:spAutoFit/>
-          </a:bodyPr>
-          <a:lstStyle/>
-          <a:p>
-            <a:pPr algn="ctr">
-              <a:lnSpc>
-                <a:spcPct val="100000"/>
-              </a:lnSpc>
-            </a:pPr>
-            <a:r>
-              <a:rPr sz="800" b="1" i="0">
-                <a:solidFill>
-                  <a:srgbClr val="2E7D32"/>
-                </a:solidFill>
-                <a:latin typeface="Calibri"/>
-              </a:rPr>
-              <a:t>LIVE</a:t>
-            </a:r>
-          </a:p>
-        </p:txBody>
-      </p:sp>
-      <p:sp>
-        <p:nvSpPr>
-          <p:cNvPr id="55" name="Rounded Rectangle 54"/>
-          <p:cNvSpPr/>
-          <p:nvPr/>
-        </p:nvSpPr>
-        <p:spPr>
-          <a:xfrm>
-            <a:off x="5263896" y="5312664"/>
-            <a:ext cx="3233928" cy="914400"/>
-          </a:xfrm>
-          <a:prstGeom prst="roundRect">
-            <a:avLst>
-              <a:gd name="adj" fmla="val 8000"/>
-            </a:avLst>
-          </a:prstGeom>
-          <a:solidFill>
-            <a:srgbClr val="E8F5E9"/>
-          </a:solidFill>
-          <a:ln w="15875">
-            <a:solidFill>
-              <a:srgbClr val="2E7D32"/>
-            </a:solidFill>
-          </a:ln>
-          <a:effectLst/>
-        </p:spPr>
-        <p:style>
-          <a:lnRef idx="1">
-            <a:schemeClr val="accent1"/>
-          </a:lnRef>
-          <a:fillRef idx="3">
-            <a:schemeClr val="accent1"/>
-          </a:fillRef>
-          <a:effectRef idx="2">
-            <a:schemeClr val="accent1"/>
-          </a:effectRef>
-          <a:fontRef idx="minor">
-            <a:schemeClr val="lt1"/>
-          </a:fontRef>
-        </p:style>
-        <p:txBody>
-          <a:bodyPr rtlCol="0" anchor="ctr"/>
-          <a:lstStyle/>
-          <a:p>
-            <a:pPr algn="ctr"/>
-            <a:endParaRPr/>
-          </a:p>
-        </p:txBody>
-      </p:sp>
-      <p:sp>
-        <p:nvSpPr>
-          <p:cNvPr id="56" name="TextBox 55"/>
-          <p:cNvSpPr txBox="1"/>
-          <p:nvPr/>
-        </p:nvSpPr>
-        <p:spPr>
-          <a:xfrm>
-            <a:off x="5327396" y="5414264"/>
-            <a:ext cx="3106928" cy="457200"/>
-          </a:xfrm>
-          <a:prstGeom prst="rect">
-            <a:avLst/>
-          </a:prstGeom>
-          <a:noFill/>
-        </p:spPr>
-        <p:txBody>
-          <a:bodyPr wrap="square" lIns="0" tIns="0" rIns="0" bIns="0" anchor="ctr">
-            <a:spAutoFit/>
-          </a:bodyPr>
-          <a:lstStyle/>
-          <a:p>
-            <a:pPr algn="ctr">
-              <a:lnSpc>
-                <a:spcPct val="100000"/>
-              </a:lnSpc>
-            </a:pPr>
-            <a:r>
-              <a:rPr sz="950" b="1" i="0">
-                <a:solidFill>
-                  <a:srgbClr val="1A1A1A"/>
-                </a:solidFill>
-                <a:latin typeface="Calibri"/>
-              </a:rPr>
-              <a:t>Alert Generator</a:t>
-            </a:r>
-          </a:p>
-        </p:txBody>
-      </p:sp>
-      <p:sp>
-        <p:nvSpPr>
-          <p:cNvPr id="57" name="TextBox 56"/>
-          <p:cNvSpPr txBox="1"/>
-          <p:nvPr/>
-        </p:nvSpPr>
-        <p:spPr>
-          <a:xfrm>
-            <a:off x="5327396" y="5879592"/>
-            <a:ext cx="3106928" cy="292608"/>
-          </a:xfrm>
-          <a:prstGeom prst="rect">
-            <a:avLst/>
-          </a:prstGeom>
-          <a:noFill/>
-        </p:spPr>
-        <p:txBody>
-          <a:bodyPr wrap="square" lIns="0" tIns="0" rIns="0" bIns="0" anchor="t">
-            <a:spAutoFit/>
-          </a:bodyPr>
-          <a:lstStyle/>
-          <a:p>
-            <a:pPr algn="ctr">
-              <a:lnSpc>
-                <a:spcPct val="100000"/>
-              </a:lnSpc>
-            </a:pPr>
-            <a:r>
-              <a:rPr sz="800" b="1" i="0">
-                <a:solidFill>
-                  <a:srgbClr val="2E7D32"/>
-                </a:solidFill>
-                <a:latin typeface="Calibri"/>
-              </a:rPr>
-              <a:t>LIVE</a:t>
-            </a:r>
-          </a:p>
-        </p:txBody>
-      </p:sp>
-      <p:sp>
-        <p:nvSpPr>
-          <p:cNvPr id="58" name="Rounded Rectangle 57"/>
-          <p:cNvSpPr/>
-          <p:nvPr/>
-        </p:nvSpPr>
-        <p:spPr>
-          <a:xfrm>
-            <a:off x="8607552" y="5312664"/>
-            <a:ext cx="3233928" cy="914400"/>
-          </a:xfrm>
-          <a:prstGeom prst="roundRect">
-            <a:avLst>
-              <a:gd name="adj" fmla="val 8000"/>
-            </a:avLst>
-          </a:prstGeom>
-          <a:solidFill>
-            <a:srgbClr val="ECEFF1"/>
-          </a:solidFill>
-          <a:ln w="15875">
-            <a:solidFill>
-              <a:srgbClr val="646E82"/>
-            </a:solidFill>
-          </a:ln>
-          <a:effectLst/>
-        </p:spPr>
-        <p:style>
-          <a:lnRef idx="1">
-            <a:schemeClr val="accent1"/>
-          </a:lnRef>
-          <a:fillRef idx="3">
-            <a:schemeClr val="accent1"/>
-          </a:fillRef>
-          <a:effectRef idx="2">
-            <a:schemeClr val="accent1"/>
-          </a:effectRef>
-          <a:fontRef idx="minor">
-            <a:schemeClr val="lt1"/>
-          </a:fontRef>
-        </p:style>
-        <p:txBody>
-          <a:bodyPr rtlCol="0" anchor="ctr"/>
-          <a:lstStyle/>
-          <a:p>
-            <a:pPr algn="ctr"/>
-            <a:endParaRPr/>
           </a:p>
         </p:txBody>
       </p:sp>
@@ -17085,7 +16916,7 @@
           <a:noFill/>
         </p:spPr>
         <p:txBody>
-          <a:bodyPr wrap="square" lIns="0" tIns="0" rIns="0" bIns="0" anchor="ctr">
+          <a:bodyPr wrap="square" anchor="ctr" lIns="0" rIns="0" tIns="0" bIns="0">
             <a:spAutoFit/>
           </a:bodyPr>
           <a:lstStyle/>
@@ -17124,7 +16955,7 @@
           <a:noFill/>
         </p:spPr>
         <p:txBody>
-          <a:bodyPr wrap="square" lIns="0" tIns="0" rIns="0" bIns="0" anchor="t">
+          <a:bodyPr wrap="square" anchor="t" lIns="0" rIns="0" tIns="0" bIns="0">
             <a:spAutoFit/>
           </a:bodyPr>
           <a:lstStyle/>
@@ -17189,7 +17020,6 @@
           <a:lstStyle/>
           <a:p>
             <a:pPr algn="ctr"/>
-            <a:endParaRPr/>
           </a:p>
         </p:txBody>
       </p:sp>
@@ -17210,7 +17040,7 @@
           <a:noFill/>
         </p:spPr>
         <p:txBody>
-          <a:bodyPr wrap="square" lIns="0" tIns="0" rIns="0" bIns="0" anchor="t">
+          <a:bodyPr wrap="square" anchor="t" lIns="0" rIns="0" tIns="0" bIns="0">
             <a:spAutoFit/>
           </a:bodyPr>
           <a:lstStyle/>
@@ -17227,7 +17057,7 @@
                 </a:solidFill>
                 <a:latin typeface="Calibri"/>
               </a:rPr>
-              <a:t>Live today</a:t>
+              <a:t>Live, real data</a:t>
             </a:r>
           </a:p>
         </p:txBody>
@@ -17275,7 +17105,6 @@
           <a:lstStyle/>
           <a:p>
             <a:pPr algn="ctr"/>
-            <a:endParaRPr/>
           </a:p>
         </p:txBody>
       </p:sp>
@@ -17296,7 +17125,7 @@
           <a:noFill/>
         </p:spPr>
         <p:txBody>
-          <a:bodyPr wrap="square" lIns="0" tIns="0" rIns="0" bIns="0" anchor="t">
+          <a:bodyPr wrap="square" anchor="t" lIns="0" rIns="0" tIns="0" bIns="0">
             <a:spAutoFit/>
           </a:bodyPr>
           <a:lstStyle/>
@@ -17313,7 +17142,7 @@
                 </a:solidFill>
                 <a:latin typeface="Calibri"/>
               </a:rPr>
-              <a:t>Needs data / scaffolded</a:t>
+              <a:t>Accessible, sparse/scaffolded</a:t>
             </a:r>
           </a:p>
         </p:txBody>
@@ -17361,7 +17190,6 @@
           <a:lstStyle/>
           <a:p>
             <a:pPr algn="ctr"/>
-            <a:endParaRPr/>
           </a:p>
         </p:txBody>
       </p:sp>
@@ -17382,7 +17210,7 @@
           <a:noFill/>
         </p:spPr>
         <p:txBody>
-          <a:bodyPr wrap="square" lIns="0" tIns="0" rIns="0" bIns="0" anchor="t">
+          <a:bodyPr wrap="square" anchor="t" lIns="0" rIns="0" tIns="0" bIns="0">
             <a:spAutoFit/>
           </a:bodyPr>
           <a:lstStyle/>
@@ -17399,7 +17227,7 @@
                 </a:solidFill>
                 <a:latin typeface="Calibri"/>
               </a:rPr>
-              <a:t>Teammate's track / not built</a:t>
+              <a:t>Teammate's track / not built / site down</a:t>
             </a:r>
           </a:p>
         </p:txBody>
@@ -17421,7 +17249,7 @@
           <a:noFill/>
         </p:spPr>
         <p:txBody>
-          <a:bodyPr wrap="square" lIns="0" tIns="0" rIns="0" bIns="0" anchor="t">
+          <a:bodyPr wrap="square" anchor="t" lIns="0" rIns="0" tIns="0" bIns="0">
             <a:spAutoFit/>
           </a:bodyPr>
           <a:lstStyle/>
@@ -17460,7 +17288,7 @@
           <a:noFill/>
         </p:spPr>
         <p:txBody>
-          <a:bodyPr wrap="square" lIns="0" tIns="0" rIns="0" bIns="0" anchor="t">
+          <a:bodyPr wrap="square" anchor="t" lIns="0" rIns="0" tIns="0" bIns="0">
             <a:spAutoFit/>
           </a:bodyPr>
           <a:lstStyle/>
@@ -17491,7 +17319,7 @@
 </file>
 
 <file path=ppt/slides/slide8.xml><?xml version="1.0" encoding="utf-8"?>
-<p:sld xmlns:a="http://schemas.openxmlformats.org/drawingml/2006/main" xmlns:r="http://schemas.openxmlformats.org/officeDocument/2006/relationships" xmlns:p="http://schemas.openxmlformats.org/presentationml/2006/main">
+<p:sld xmlns:a="http://schemas.openxmlformats.org/drawingml/2006/main" xmlns:p="http://schemas.openxmlformats.org/presentationml/2006/main" xmlns:r="http://schemas.openxmlformats.org/officeDocument/2006/relationships">
   <p:cSld>
     <p:spTree>
       <p:nvGrpSpPr>
@@ -17499,14 +17327,7 @@
         <p:cNvGrpSpPr/>
         <p:nvPr/>
       </p:nvGrpSpPr>
-      <p:grpSpPr>
-        <a:xfrm>
-          <a:off x="0" y="0"/>
-          <a:ext cx="0" cy="0"/>
-          <a:chOff x="0" y="0"/>
-          <a:chExt cx="0" cy="0"/>
-        </a:xfrm>
-      </p:grpSpPr>
+      <p:grpSpPr/>
       <p:sp>
         <p:nvSpPr>
           <p:cNvPr id="2" name="Rectangle 1"/>
@@ -17548,7 +17369,6 @@
           <a:lstStyle/>
           <a:p>
             <a:pPr algn="ctr"/>
-            <a:endParaRPr/>
           </a:p>
         </p:txBody>
       </p:sp>
@@ -17569,7 +17389,7 @@
           <a:noFill/>
         </p:spPr>
         <p:txBody>
-          <a:bodyPr wrap="square" lIns="0" tIns="0" rIns="0" bIns="0" anchor="t">
+          <a:bodyPr wrap="square" anchor="t" lIns="0" rIns="0" tIns="0" bIns="0">
             <a:spAutoFit/>
           </a:bodyPr>
           <a:lstStyle/>
@@ -17608,7 +17428,7 @@
           <a:noFill/>
         </p:spPr>
         <p:txBody>
-          <a:bodyPr wrap="square" lIns="0" tIns="0" rIns="0" bIns="0" anchor="t">
+          <a:bodyPr wrap="square" anchor="t" lIns="0" rIns="0" tIns="0" bIns="0">
             <a:spAutoFit/>
           </a:bodyPr>
           <a:lstStyle/>
@@ -17639,15 +17459,15 @@
         <p:spPr>
           <a:xfrm>
             <a:off x="548640" y="1097280"/>
-            <a:ext cx="7315200" cy="274320"/>
-          </a:xfrm>
-          <a:prstGeom prst="rect">
-            <a:avLst/>
-          </a:prstGeom>
-          <a:noFill/>
-        </p:spPr>
-        <p:txBody>
-          <a:bodyPr wrap="square" lIns="0" tIns="0" rIns="0" bIns="0" anchor="t">
+            <a:ext cx="9052560" cy="274320"/>
+          </a:xfrm>
+          <a:prstGeom prst="rect">
+            <a:avLst/>
+          </a:prstGeom>
+          <a:noFill/>
+        </p:spPr>
+        <p:txBody>
+          <a:bodyPr wrap="square" anchor="t" lIns="0" rIns="0" tIns="0" bIns="0">
             <a:spAutoFit/>
           </a:bodyPr>
           <a:lstStyle/>
@@ -17658,13 +17478,13 @@
               </a:lnSpc>
             </a:pPr>
             <a:r>
-              <a:rPr sz="1150" b="0" i="1">
+              <a:rPr sz="1050" b="0" i="1">
                 <a:solidFill>
                   <a:srgbClr val="646E82"/>
                 </a:solidFill>
                 <a:latin typeface="Calibri"/>
               </a:rPr>
-              <a:t>This is the ACTUAL dashboard.html output, this session's real data — not a mockup.</a:t>
+              <a:t>The ACTUAL dashboard.html output, this session's real run — real VAHAN vehicle data now, not a placeholder.</a:t>
             </a:r>
           </a:p>
         </p:txBody>
@@ -17708,7 +17528,7 @@
           </a:fontRef>
         </p:style>
         <p:txBody>
-          <a:bodyPr wrap="none" lIns="50800" tIns="12700" rIns="50800" bIns="12700" rtlCol="0" anchor="ctr"/>
+          <a:bodyPr rtlCol="0" anchor="ctr" wrap="none" lIns="50800" rIns="50800" tIns="12700" bIns="12700"/>
           <a:lstStyle/>
           <a:p>
             <a:pPr algn="ctr"/>
@@ -17763,7 +17583,7 @@
           </a:fontRef>
         </p:style>
         <p:txBody>
-          <a:bodyPr wrap="none" lIns="50800" tIns="12700" rIns="50800" bIns="12700" rtlCol="0" anchor="ctr"/>
+          <a:bodyPr rtlCol="0" anchor="ctr" wrap="none" lIns="50800" rIns="50800" tIns="12700" bIns="12700"/>
           <a:lstStyle/>
           <a:p>
             <a:pPr algn="ctr"/>
@@ -17788,7 +17608,7 @@
         <p:spPr>
           <a:xfrm>
             <a:off x="548640" y="1481328"/>
-            <a:ext cx="1874520" cy="292608"/>
+            <a:ext cx="1687982" cy="292608"/>
           </a:xfrm>
           <a:prstGeom prst="roundRect">
             <a:avLst>
@@ -17818,7 +17638,7 @@
           </a:fontRef>
         </p:style>
         <p:txBody>
-          <a:bodyPr wrap="none" lIns="50800" tIns="12700" rIns="50800" bIns="12700" rtlCol="0" anchor="ctr"/>
+          <a:bodyPr rtlCol="0" anchor="ctr" wrap="none" lIns="50800" rIns="50800" tIns="12700" bIns="12700"/>
           <a:lstStyle/>
           <a:p>
             <a:pPr algn="ctr"/>
@@ -17842,8 +17662,8 @@
         </p:nvSpPr>
         <p:spPr>
           <a:xfrm>
-            <a:off x="2532888" y="1481328"/>
-            <a:ext cx="2148840" cy="292608"/>
+            <a:off x="2346350" y="1481328"/>
+            <a:ext cx="1929384" cy="292608"/>
           </a:xfrm>
           <a:prstGeom prst="roundRect">
             <a:avLst>
@@ -17873,7 +17693,7 @@
           </a:fontRef>
         </p:style>
         <p:txBody>
-          <a:bodyPr wrap="none" lIns="50800" tIns="12700" rIns="50800" bIns="12700" rtlCol="0" anchor="ctr"/>
+          <a:bodyPr rtlCol="0" anchor="ctr" wrap="none" lIns="50800" rIns="50800" tIns="12700" bIns="12700"/>
           <a:lstStyle/>
           <a:p>
             <a:pPr algn="ctr"/>
@@ -17897,8 +17717,63 @@
         </p:nvSpPr>
         <p:spPr>
           <a:xfrm>
-            <a:off x="4791456" y="1481328"/>
-            <a:ext cx="2697480" cy="292608"/>
+            <a:off x="4385462" y="1481328"/>
+            <a:ext cx="2170785" cy="292608"/>
+          </a:xfrm>
+          <a:prstGeom prst="roundRect">
+            <a:avLst>
+              <a:gd name="adj" fmla="val 50000"/>
+            </a:avLst>
+          </a:prstGeom>
+          <a:solidFill>
+            <a:srgbClr val="E8F5E9"/>
+          </a:solidFill>
+          <a:ln>
+            <a:noFill/>
+          </a:ln>
+          <a:effectLst/>
+        </p:spPr>
+        <p:style>
+          <a:lnRef idx="1">
+            <a:schemeClr val="accent1"/>
+          </a:lnRef>
+          <a:fillRef idx="3">
+            <a:schemeClr val="accent1"/>
+          </a:fillRef>
+          <a:effectRef idx="2">
+            <a:schemeClr val="accent1"/>
+          </a:effectRef>
+          <a:fontRef idx="minor">
+            <a:schemeClr val="lt1"/>
+          </a:fontRef>
+        </p:style>
+        <p:txBody>
+          <a:bodyPr rtlCol="0" anchor="ctr" wrap="none" lIns="50800" rIns="50800" tIns="12700" bIns="12700"/>
+          <a:lstStyle/>
+          <a:p>
+            <a:pPr algn="ctr"/>
+            <a:r>
+              <a:rPr sz="950" b="1">
+                <a:solidFill>
+                  <a:srgbClr val="2E7D32"/>
+                </a:solidFill>
+                <a:latin typeface="Calibri"/>
+              </a:rPr>
+              <a:t>vehicle emissions: live</a:t>
+            </a:r>
+          </a:p>
+        </p:txBody>
+      </p:sp>
+      <p:sp>
+        <p:nvSpPr>
+          <p:cNvPr id="11" name="Rounded Rectangle 10"/>
+          <p:cNvSpPr/>
+          <p:nvPr/>
+        </p:nvSpPr>
+        <p:spPr>
+          <a:xfrm>
+            <a:off x="6665975" y="1481328"/>
+            <a:ext cx="2734056" cy="292608"/>
           </a:xfrm>
           <a:prstGeom prst="roundRect">
             <a:avLst>
@@ -17928,62 +17803,7 @@
           </a:fontRef>
         </p:style>
         <p:txBody>
-          <a:bodyPr wrap="none" lIns="50800" tIns="12700" rIns="50800" bIns="12700" rtlCol="0" anchor="ctr"/>
-          <a:lstStyle/>
-          <a:p>
-            <a:pPr algn="ctr"/>
-            <a:r>
-              <a:rPr sz="950" b="1">
-                <a:solidFill>
-                  <a:srgbClr val="646E82"/>
-                </a:solidFill>
-                <a:latin typeface="Calibri"/>
-              </a:rPr>
-              <a:t>vehicle emissions: pending</a:t>
-            </a:r>
-          </a:p>
-        </p:txBody>
-      </p:sp>
-      <p:sp>
-        <p:nvSpPr>
-          <p:cNvPr id="11" name="Rounded Rectangle 10"/>
-          <p:cNvSpPr/>
-          <p:nvPr/>
-        </p:nvSpPr>
-        <p:spPr>
-          <a:xfrm>
-            <a:off x="7598664" y="1481328"/>
-            <a:ext cx="3063240" cy="292608"/>
-          </a:xfrm>
-          <a:prstGeom prst="roundRect">
-            <a:avLst>
-              <a:gd name="adj" fmla="val 50000"/>
-            </a:avLst>
-          </a:prstGeom>
-          <a:solidFill>
-            <a:srgbClr val="ECEFF1"/>
-          </a:solidFill>
-          <a:ln>
-            <a:noFill/>
-          </a:ln>
-          <a:effectLst/>
-        </p:spPr>
-        <p:style>
-          <a:lnRef idx="1">
-            <a:schemeClr val="accent1"/>
-          </a:lnRef>
-          <a:fillRef idx="3">
-            <a:schemeClr val="accent1"/>
-          </a:fillRef>
-          <a:effectRef idx="2">
-            <a:schemeClr val="accent1"/>
-          </a:effectRef>
-          <a:fontRef idx="minor">
-            <a:schemeClr val="lt1"/>
-          </a:fontRef>
-        </p:style>
-        <p:txBody>
-          <a:bodyPr wrap="none" lIns="50800" tIns="12700" rIns="50800" bIns="12700" rtlCol="0" anchor="ctr"/>
+          <a:bodyPr rtlCol="0" anchor="ctr" wrap="none" lIns="50800" rIns="50800" tIns="12700" bIns="12700"/>
           <a:lstStyle/>
           <a:p>
             <a:pPr algn="ctr"/>
@@ -18044,7 +17864,6 @@
           <a:lstStyle/>
           <a:p>
             <a:pPr algn="ctr"/>
-            <a:endParaRPr/>
           </a:p>
         </p:txBody>
       </p:sp>
@@ -18065,7 +17884,7 @@
           <a:noFill/>
         </p:spPr>
         <p:txBody>
-          <a:bodyPr wrap="square" lIns="0" tIns="0" rIns="0" bIns="0" anchor="b">
+          <a:bodyPr wrap="square" anchor="b" lIns="0" rIns="0" tIns="0" bIns="0">
             <a:spAutoFit/>
           </a:bodyPr>
           <a:lstStyle/>
@@ -18104,7 +17923,7 @@
           <a:noFill/>
         </p:spPr>
         <p:txBody>
-          <a:bodyPr wrap="square" lIns="0" tIns="0" rIns="0" bIns="0" anchor="t">
+          <a:bodyPr wrap="square" anchor="t" lIns="0" rIns="0" tIns="0" bIns="0">
             <a:spAutoFit/>
           </a:bodyPr>
           <a:lstStyle/>
@@ -18187,7 +18006,6 @@
           <a:lstStyle/>
           <a:p>
             <a:pPr algn="ctr"/>
-            <a:endParaRPr/>
           </a:p>
         </p:txBody>
       </p:sp>
@@ -18208,7 +18026,7 @@
           <a:noFill/>
         </p:spPr>
         <p:txBody>
-          <a:bodyPr wrap="square" lIns="0" tIns="0" rIns="0" bIns="0" anchor="b">
+          <a:bodyPr wrap="square" anchor="b" lIns="0" rIns="0" tIns="0" bIns="0">
             <a:spAutoFit/>
           </a:bodyPr>
           <a:lstStyle/>
@@ -18247,7 +18065,7 @@
           <a:noFill/>
         </p:spPr>
         <p:txBody>
-          <a:bodyPr wrap="square" lIns="0" tIns="0" rIns="0" bIns="0" anchor="t">
+          <a:bodyPr wrap="square" anchor="t" lIns="0" rIns="0" tIns="0" bIns="0">
             <a:spAutoFit/>
           </a:bodyPr>
           <a:lstStyle/>
@@ -18314,7 +18132,6 @@
           <a:lstStyle/>
           <a:p>
             <a:pPr algn="ctr"/>
-            <a:endParaRPr/>
           </a:p>
         </p:txBody>
       </p:sp>
@@ -18335,7 +18152,7 @@
           <a:noFill/>
         </p:spPr>
         <p:txBody>
-          <a:bodyPr wrap="square" lIns="0" tIns="0" rIns="0" bIns="0" anchor="b">
+          <a:bodyPr wrap="square" anchor="b" lIns="0" rIns="0" tIns="0" bIns="0">
             <a:spAutoFit/>
           </a:bodyPr>
           <a:lstStyle/>
@@ -18374,7 +18191,7 @@
           <a:noFill/>
         </p:spPr>
         <p:txBody>
-          <a:bodyPr wrap="square" lIns="0" tIns="0" rIns="0" bIns="0" anchor="t">
+          <a:bodyPr wrap="square" anchor="t" lIns="0" rIns="0" tIns="0" bIns="0">
             <a:spAutoFit/>
           </a:bodyPr>
           <a:lstStyle/>
@@ -18441,7 +18258,6 @@
           <a:lstStyle/>
           <a:p>
             <a:pPr algn="ctr"/>
-            <a:endParaRPr/>
           </a:p>
         </p:txBody>
       </p:sp>
@@ -18462,7 +18278,7 @@
           <a:noFill/>
         </p:spPr>
         <p:txBody>
-          <a:bodyPr wrap="square" lIns="0" tIns="0" rIns="0" bIns="0" anchor="b">
+          <a:bodyPr wrap="square" anchor="b" lIns="0" rIns="0" tIns="0" bIns="0">
             <a:spAutoFit/>
           </a:bodyPr>
           <a:lstStyle/>
@@ -18501,7 +18317,7 @@
           <a:noFill/>
         </p:spPr>
         <p:txBody>
-          <a:bodyPr wrap="square" lIns="0" tIns="0" rIns="0" bIns="0" anchor="t">
+          <a:bodyPr wrap="square" anchor="t" lIns="0" rIns="0" tIns="0" bIns="0">
             <a:spAutoFit/>
           </a:bodyPr>
           <a:lstStyle/>
@@ -18568,7 +18384,6 @@
           <a:lstStyle/>
           <a:p>
             <a:pPr algn="ctr"/>
-            <a:endParaRPr/>
           </a:p>
         </p:txBody>
       </p:sp>
@@ -18589,7 +18404,7 @@
           <a:noFill/>
         </p:spPr>
         <p:txBody>
-          <a:bodyPr wrap="square" lIns="0" tIns="0" rIns="0" bIns="0" anchor="b">
+          <a:bodyPr wrap="square" anchor="b" lIns="0" rIns="0" tIns="0" bIns="0">
             <a:spAutoFit/>
           </a:bodyPr>
           <a:lstStyle/>
@@ -18628,7 +18443,7 @@
           <a:noFill/>
         </p:spPr>
         <p:txBody>
-          <a:bodyPr wrap="square" lIns="0" tIns="0" rIns="0" bIns="0" anchor="t">
+          <a:bodyPr wrap="square" anchor="t" lIns="0" rIns="0" tIns="0" bIns="0">
             <a:spAutoFit/>
           </a:bodyPr>
           <a:lstStyle/>
@@ -18667,7 +18482,7 @@
           <a:noFill/>
         </p:spPr>
         <p:txBody>
-          <a:bodyPr wrap="square" lIns="0" tIns="0" rIns="0" bIns="0" anchor="t">
+          <a:bodyPr wrap="square" anchor="t" lIns="0" rIns="0" tIns="0" bIns="0">
             <a:spAutoFit/>
           </a:bodyPr>
           <a:lstStyle/>
@@ -18730,7 +18545,6 @@
           <a:lstStyle/>
           <a:p>
             <a:pPr algn="ctr"/>
-            <a:endParaRPr/>
           </a:p>
         </p:txBody>
       </p:sp>
@@ -18751,7 +18565,7 @@
           <a:noFill/>
         </p:spPr>
         <p:txBody>
-          <a:bodyPr wrap="square" lIns="0" tIns="0" rIns="0" bIns="0" anchor="t">
+          <a:bodyPr wrap="square" anchor="t" lIns="0" rIns="0" tIns="0" bIns="0">
             <a:spAutoFit/>
           </a:bodyPr>
           <a:lstStyle/>
@@ -18790,7 +18604,7 @@
           <a:noFill/>
         </p:spPr>
         <p:txBody>
-          <a:bodyPr wrap="square" lIns="0" tIns="0" rIns="0" bIns="0" anchor="t">
+          <a:bodyPr wrap="square" anchor="t" lIns="0" rIns="0" tIns="0" bIns="0">
             <a:spAutoFit/>
           </a:bodyPr>
           <a:lstStyle/>
@@ -18829,7 +18643,7 @@
           <a:noFill/>
         </p:spPr>
         <p:txBody>
-          <a:bodyPr wrap="square" lIns="0" tIns="0" rIns="0" bIns="0" anchor="t">
+          <a:bodyPr wrap="square" anchor="t" lIns="0" rIns="0" tIns="0" bIns="0">
             <a:spAutoFit/>
           </a:bodyPr>
           <a:lstStyle/>
@@ -18868,7 +18682,7 @@
           <a:noFill/>
         </p:spPr>
         <p:txBody>
-          <a:bodyPr wrap="square" lIns="0" tIns="0" rIns="0" bIns="0" anchor="t">
+          <a:bodyPr wrap="square" anchor="t" lIns="0" rIns="0" tIns="0" bIns="0">
             <a:spAutoFit/>
           </a:bodyPr>
           <a:lstStyle/>
@@ -18907,7 +18721,7 @@
           <a:noFill/>
         </p:spPr>
         <p:txBody>
-          <a:bodyPr wrap="square" lIns="0" tIns="0" rIns="0" bIns="0" anchor="t">
+          <a:bodyPr wrap="square" anchor="t" lIns="0" rIns="0" tIns="0" bIns="0">
             <a:spAutoFit/>
           </a:bodyPr>
           <a:lstStyle/>
@@ -18946,7 +18760,7 @@
           <a:noFill/>
         </p:spPr>
         <p:txBody>
-          <a:bodyPr wrap="square" lIns="0" tIns="0" rIns="0" bIns="0" anchor="t">
+          <a:bodyPr wrap="square" anchor="t" lIns="0" rIns="0" tIns="0" bIns="0">
             <a:spAutoFit/>
           </a:bodyPr>
           <a:lstStyle/>
@@ -19011,7 +18825,6 @@
           <a:lstStyle/>
           <a:p>
             <a:pPr algn="ctr"/>
-            <a:endParaRPr/>
           </a:p>
         </p:txBody>
       </p:sp>
@@ -19032,7 +18845,7 @@
           <a:noFill/>
         </p:spPr>
         <p:txBody>
-          <a:bodyPr wrap="square" lIns="0" tIns="0" rIns="0" bIns="0" anchor="ctr">
+          <a:bodyPr wrap="square" anchor="ctr" lIns="0" rIns="0" tIns="0" bIns="0">
             <a:spAutoFit/>
           </a:bodyPr>
           <a:lstStyle/>
@@ -19071,7 +18884,7 @@
           <a:noFill/>
         </p:spPr>
         <p:txBody>
-          <a:bodyPr wrap="square" lIns="0" tIns="0" rIns="0" bIns="0" anchor="ctr">
+          <a:bodyPr wrap="square" anchor="ctr" lIns="0" rIns="0" tIns="0" bIns="0">
             <a:spAutoFit/>
           </a:bodyPr>
           <a:lstStyle/>
@@ -19110,7 +18923,7 @@
           <a:noFill/>
         </p:spPr>
         <p:txBody>
-          <a:bodyPr wrap="square" lIns="0" tIns="0" rIns="0" bIns="0" anchor="ctr">
+          <a:bodyPr wrap="square" anchor="ctr" lIns="0" rIns="0" tIns="0" bIns="0">
             <a:spAutoFit/>
           </a:bodyPr>
           <a:lstStyle/>
@@ -19171,7 +18984,7 @@
           </a:fontRef>
         </p:style>
         <p:txBody>
-          <a:bodyPr wrap="none" lIns="50800" tIns="12700" rIns="50800" bIns="12700" rtlCol="0" anchor="ctr"/>
+          <a:bodyPr rtlCol="0" anchor="ctr" wrap="none" lIns="50800" rIns="50800" tIns="12700" bIns="12700"/>
           <a:lstStyle/>
           <a:p>
             <a:pPr algn="ctr"/>
@@ -19204,7 +19017,7 @@
           <a:noFill/>
         </p:spPr>
         <p:txBody>
-          <a:bodyPr wrap="square" lIns="0" tIns="0" rIns="0" bIns="0" anchor="ctr">
+          <a:bodyPr wrap="square" anchor="ctr" lIns="0" rIns="0" tIns="0" bIns="0">
             <a:spAutoFit/>
           </a:bodyPr>
           <a:lstStyle/>
@@ -19215,13 +19028,13 @@
               </a:lnSpc>
             </a:pPr>
             <a:r>
-              <a:rPr sz="1050" b="0" i="1">
+              <a:rPr sz="1050" b="0" i="0">
                 <a:solidFill>
                   <a:srgbClr val="1A1A1A"/>
                 </a:solidFill>
                 <a:latin typeface="Calibri"/>
               </a:rPr>
-              <a:t>pending</a:t>
+              <a:t>0.31</a:t>
             </a:r>
           </a:p>
         </p:txBody>
@@ -19243,7 +19056,7 @@
           <a:noFill/>
         </p:spPr>
         <p:txBody>
-          <a:bodyPr wrap="square" lIns="0" tIns="0" rIns="0" bIns="0" anchor="ctr">
+          <a:bodyPr wrap="square" anchor="ctr" lIns="0" rIns="0" tIns="0" bIns="0">
             <a:spAutoFit/>
           </a:bodyPr>
           <a:lstStyle/>
@@ -19308,7 +19121,6 @@
           <a:lstStyle/>
           <a:p>
             <a:pPr algn="ctr"/>
-            <a:endParaRPr/>
           </a:p>
         </p:txBody>
       </p:sp>
@@ -19329,7 +19141,7 @@
           <a:noFill/>
         </p:spPr>
         <p:txBody>
-          <a:bodyPr wrap="square" lIns="0" tIns="0" rIns="0" bIns="0" anchor="ctr">
+          <a:bodyPr wrap="square" anchor="ctr" lIns="0" rIns="0" tIns="0" bIns="0">
             <a:spAutoFit/>
           </a:bodyPr>
           <a:lstStyle/>
@@ -19368,7 +19180,7 @@
           <a:noFill/>
         </p:spPr>
         <p:txBody>
-          <a:bodyPr wrap="square" lIns="0" tIns="0" rIns="0" bIns="0" anchor="ctr">
+          <a:bodyPr wrap="square" anchor="ctr" lIns="0" rIns="0" tIns="0" bIns="0">
             <a:spAutoFit/>
           </a:bodyPr>
           <a:lstStyle/>
@@ -19407,7 +19219,7 @@
           <a:noFill/>
         </p:spPr>
         <p:txBody>
-          <a:bodyPr wrap="square" lIns="0" tIns="0" rIns="0" bIns="0" anchor="ctr">
+          <a:bodyPr wrap="square" anchor="ctr" lIns="0" rIns="0" tIns="0" bIns="0">
             <a:spAutoFit/>
           </a:bodyPr>
           <a:lstStyle/>
@@ -19468,7 +19280,7 @@
           </a:fontRef>
         </p:style>
         <p:txBody>
-          <a:bodyPr wrap="none" lIns="50800" tIns="12700" rIns="50800" bIns="12700" rtlCol="0" anchor="ctr"/>
+          <a:bodyPr rtlCol="0" anchor="ctr" wrap="none" lIns="50800" rIns="50800" tIns="12700" bIns="12700"/>
           <a:lstStyle/>
           <a:p>
             <a:pPr algn="ctr"/>
@@ -19501,7 +19313,7 @@
           <a:noFill/>
         </p:spPr>
         <p:txBody>
-          <a:bodyPr wrap="square" lIns="0" tIns="0" rIns="0" bIns="0" anchor="ctr">
+          <a:bodyPr wrap="square" anchor="ctr" lIns="0" rIns="0" tIns="0" bIns="0">
             <a:spAutoFit/>
           </a:bodyPr>
           <a:lstStyle/>
@@ -19512,13 +19324,13 @@
               </a:lnSpc>
             </a:pPr>
             <a:r>
-              <a:rPr sz="1050" b="0" i="1">
+              <a:rPr sz="1050" b="0" i="0">
                 <a:solidFill>
                   <a:srgbClr val="1A1A1A"/>
                 </a:solidFill>
                 <a:latin typeface="Calibri"/>
               </a:rPr>
-              <a:t>pending</a:t>
+              <a:t>0.19</a:t>
             </a:r>
           </a:p>
         </p:txBody>
@@ -19540,7 +19352,7 @@
           <a:noFill/>
         </p:spPr>
         <p:txBody>
-          <a:bodyPr wrap="square" lIns="0" tIns="0" rIns="0" bIns="0" anchor="ctr">
+          <a:bodyPr wrap="square" anchor="ctr" lIns="0" rIns="0" tIns="0" bIns="0">
             <a:spAutoFit/>
           </a:bodyPr>
           <a:lstStyle/>
@@ -19605,7 +19417,6 @@
           <a:lstStyle/>
           <a:p>
             <a:pPr algn="ctr"/>
-            <a:endParaRPr/>
           </a:p>
         </p:txBody>
       </p:sp>
@@ -19626,7 +19437,7 @@
           <a:noFill/>
         </p:spPr>
         <p:txBody>
-          <a:bodyPr wrap="square" lIns="0" tIns="0" rIns="0" bIns="0" anchor="ctr">
+          <a:bodyPr wrap="square" anchor="ctr" lIns="0" rIns="0" tIns="0" bIns="0">
             <a:spAutoFit/>
           </a:bodyPr>
           <a:lstStyle/>
@@ -19665,7 +19476,7 @@
           <a:noFill/>
         </p:spPr>
         <p:txBody>
-          <a:bodyPr wrap="square" lIns="0" tIns="0" rIns="0" bIns="0" anchor="ctr">
+          <a:bodyPr wrap="square" anchor="ctr" lIns="0" rIns="0" tIns="0" bIns="0">
             <a:spAutoFit/>
           </a:bodyPr>
           <a:lstStyle/>
@@ -19704,7 +19515,7 @@
           <a:noFill/>
         </p:spPr>
         <p:txBody>
-          <a:bodyPr wrap="square" lIns="0" tIns="0" rIns="0" bIns="0" anchor="ctr">
+          <a:bodyPr wrap="square" anchor="ctr" lIns="0" rIns="0" tIns="0" bIns="0">
             <a:spAutoFit/>
           </a:bodyPr>
           <a:lstStyle/>
@@ -19765,7 +19576,7 @@
           </a:fontRef>
         </p:style>
         <p:txBody>
-          <a:bodyPr wrap="none" lIns="50800" tIns="12700" rIns="50800" bIns="12700" rtlCol="0" anchor="ctr"/>
+          <a:bodyPr rtlCol="0" anchor="ctr" wrap="none" lIns="50800" rIns="50800" tIns="12700" bIns="12700"/>
           <a:lstStyle/>
           <a:p>
             <a:pPr algn="ctr"/>
@@ -19798,7 +19609,7 @@
           <a:noFill/>
         </p:spPr>
         <p:txBody>
-          <a:bodyPr wrap="square" lIns="0" tIns="0" rIns="0" bIns="0" anchor="ctr">
+          <a:bodyPr wrap="square" anchor="ctr" lIns="0" rIns="0" tIns="0" bIns="0">
             <a:spAutoFit/>
           </a:bodyPr>
           <a:lstStyle/>
@@ -19809,13 +19620,13 @@
               </a:lnSpc>
             </a:pPr>
             <a:r>
-              <a:rPr sz="1050" b="0" i="1">
+              <a:rPr sz="1050" b="0" i="0">
                 <a:solidFill>
                   <a:srgbClr val="1A1A1A"/>
                 </a:solidFill>
                 <a:latin typeface="Calibri"/>
               </a:rPr>
-              <a:t>pending</a:t>
+              <a:t>0.19</a:t>
             </a:r>
           </a:p>
         </p:txBody>
@@ -19837,7 +19648,7 @@
           <a:noFill/>
         </p:spPr>
         <p:txBody>
-          <a:bodyPr wrap="square" lIns="0" tIns="0" rIns="0" bIns="0" anchor="ctr">
+          <a:bodyPr wrap="square" anchor="ctr" lIns="0" rIns="0" tIns="0" bIns="0">
             <a:spAutoFit/>
           </a:bodyPr>
           <a:lstStyle/>
@@ -19902,7 +19713,6 @@
           <a:lstStyle/>
           <a:p>
             <a:pPr algn="ctr"/>
-            <a:endParaRPr/>
           </a:p>
         </p:txBody>
       </p:sp>
@@ -19923,7 +19733,7 @@
           <a:noFill/>
         </p:spPr>
         <p:txBody>
-          <a:bodyPr wrap="square" lIns="0" tIns="0" rIns="0" bIns="0" anchor="ctr">
+          <a:bodyPr wrap="square" anchor="ctr" lIns="0" rIns="0" tIns="0" bIns="0">
             <a:spAutoFit/>
           </a:bodyPr>
           <a:lstStyle/>
@@ -19962,7 +19772,7 @@
           <a:noFill/>
         </p:spPr>
         <p:txBody>
-          <a:bodyPr wrap="square" lIns="0" tIns="0" rIns="0" bIns="0" anchor="ctr">
+          <a:bodyPr wrap="square" anchor="ctr" lIns="0" rIns="0" tIns="0" bIns="0">
             <a:spAutoFit/>
           </a:bodyPr>
           <a:lstStyle/>
@@ -20001,7 +19811,7 @@
           <a:noFill/>
         </p:spPr>
         <p:txBody>
-          <a:bodyPr wrap="square" lIns="0" tIns="0" rIns="0" bIns="0" anchor="ctr">
+          <a:bodyPr wrap="square" anchor="ctr" lIns="0" rIns="0" tIns="0" bIns="0">
             <a:spAutoFit/>
           </a:bodyPr>
           <a:lstStyle/>
@@ -20062,7 +19872,7 @@
           </a:fontRef>
         </p:style>
         <p:txBody>
-          <a:bodyPr wrap="none" lIns="50800" tIns="12700" rIns="50800" bIns="12700" rtlCol="0" anchor="ctr"/>
+          <a:bodyPr rtlCol="0" anchor="ctr" wrap="none" lIns="50800" rIns="50800" tIns="12700" bIns="12700"/>
           <a:lstStyle/>
           <a:p>
             <a:pPr algn="ctr"/>
@@ -20095,7 +19905,7 @@
           <a:noFill/>
         </p:spPr>
         <p:txBody>
-          <a:bodyPr wrap="square" lIns="0" tIns="0" rIns="0" bIns="0" anchor="ctr">
+          <a:bodyPr wrap="square" anchor="ctr" lIns="0" rIns="0" tIns="0" bIns="0">
             <a:spAutoFit/>
           </a:bodyPr>
           <a:lstStyle/>
@@ -20106,13 +19916,13 @@
               </a:lnSpc>
             </a:pPr>
             <a:r>
-              <a:rPr sz="1050" b="0" i="1">
+              <a:rPr sz="1050" b="0" i="0">
                 <a:solidFill>
                   <a:srgbClr val="1A1A1A"/>
                 </a:solidFill>
                 <a:latin typeface="Calibri"/>
               </a:rPr>
-              <a:t>pending</a:t>
+              <a:t>0.48</a:t>
             </a:r>
           </a:p>
         </p:txBody>
@@ -20134,7 +19944,7 @@
           <a:noFill/>
         </p:spPr>
         <p:txBody>
-          <a:bodyPr wrap="square" lIns="0" tIns="0" rIns="0" bIns="0" anchor="ctr">
+          <a:bodyPr wrap="square" anchor="ctr" lIns="0" rIns="0" tIns="0" bIns="0">
             <a:spAutoFit/>
           </a:bodyPr>
           <a:lstStyle/>
@@ -20199,7 +20009,6 @@
           <a:lstStyle/>
           <a:p>
             <a:pPr algn="ctr"/>
-            <a:endParaRPr/>
           </a:p>
         </p:txBody>
       </p:sp>
@@ -20220,7 +20029,7 @@
           <a:noFill/>
         </p:spPr>
         <p:txBody>
-          <a:bodyPr wrap="square" lIns="0" tIns="0" rIns="0" bIns="0" anchor="ctr">
+          <a:bodyPr wrap="square" anchor="ctr" lIns="0" rIns="0" tIns="0" bIns="0">
             <a:spAutoFit/>
           </a:bodyPr>
           <a:lstStyle/>
@@ -20259,7 +20068,7 @@
           <a:noFill/>
         </p:spPr>
         <p:txBody>
-          <a:bodyPr wrap="square" lIns="0" tIns="0" rIns="0" bIns="0" anchor="ctr">
+          <a:bodyPr wrap="square" anchor="ctr" lIns="0" rIns="0" tIns="0" bIns="0">
             <a:spAutoFit/>
           </a:bodyPr>
           <a:lstStyle/>
@@ -20298,7 +20107,7 @@
           <a:noFill/>
         </p:spPr>
         <p:txBody>
-          <a:bodyPr wrap="square" lIns="0" tIns="0" rIns="0" bIns="0" anchor="ctr">
+          <a:bodyPr wrap="square" anchor="ctr" lIns="0" rIns="0" tIns="0" bIns="0">
             <a:spAutoFit/>
           </a:bodyPr>
           <a:lstStyle/>
@@ -20359,7 +20168,7 @@
           </a:fontRef>
         </p:style>
         <p:txBody>
-          <a:bodyPr wrap="none" lIns="50800" tIns="12700" rIns="50800" bIns="12700" rtlCol="0" anchor="ctr"/>
+          <a:bodyPr rtlCol="0" anchor="ctr" wrap="none" lIns="50800" rIns="50800" tIns="12700" bIns="12700"/>
           <a:lstStyle/>
           <a:p>
             <a:pPr algn="ctr"/>
@@ -20392,7 +20201,7 @@
           <a:noFill/>
         </p:spPr>
         <p:txBody>
-          <a:bodyPr wrap="square" lIns="0" tIns="0" rIns="0" bIns="0" anchor="ctr">
+          <a:bodyPr wrap="square" anchor="ctr" lIns="0" rIns="0" tIns="0" bIns="0">
             <a:spAutoFit/>
           </a:bodyPr>
           <a:lstStyle/>
@@ -20403,13 +20212,13 @@
               </a:lnSpc>
             </a:pPr>
             <a:r>
-              <a:rPr sz="1050" b="0" i="1">
+              <a:rPr sz="1050" b="0" i="0">
                 <a:solidFill>
                   <a:srgbClr val="1A1A1A"/>
                 </a:solidFill>
                 <a:latin typeface="Calibri"/>
               </a:rPr>
-              <a:t>pending</a:t>
+              <a:t>0.29</a:t>
             </a:r>
           </a:p>
         </p:txBody>
@@ -20431,7 +20240,7 @@
           <a:noFill/>
         </p:spPr>
         <p:txBody>
-          <a:bodyPr wrap="square" lIns="0" tIns="0" rIns="0" bIns="0" anchor="ctr">
+          <a:bodyPr wrap="square" anchor="ctr" lIns="0" rIns="0" tIns="0" bIns="0">
             <a:spAutoFit/>
           </a:bodyPr>
           <a:lstStyle/>
@@ -20470,7 +20279,7 @@
           <a:noFill/>
         </p:spPr>
         <p:txBody>
-          <a:bodyPr wrap="square" lIns="0" tIns="0" rIns="0" bIns="0" anchor="t">
+          <a:bodyPr wrap="square" anchor="t" lIns="0" rIns="0" tIns="0" bIns="0">
             <a:spAutoFit/>
           </a:bodyPr>
           <a:lstStyle/>
@@ -20509,7 +20318,7 @@
           <a:noFill/>
         </p:spPr>
         <p:txBody>
-          <a:bodyPr wrap="square" lIns="0" tIns="0" rIns="0" bIns="0" anchor="t">
+          <a:bodyPr wrap="square" anchor="t" lIns="0" rIns="0" tIns="0" bIns="0">
             <a:spAutoFit/>
           </a:bodyPr>
           <a:lstStyle/>
@@ -20540,7 +20349,7 @@
 </file>
 
 <file path=ppt/slides/slide9.xml><?xml version="1.0" encoding="utf-8"?>
-<p:sld xmlns:a="http://schemas.openxmlformats.org/drawingml/2006/main" xmlns:r="http://schemas.openxmlformats.org/officeDocument/2006/relationships" xmlns:p="http://schemas.openxmlformats.org/presentationml/2006/main">
+<p:sld xmlns:a="http://schemas.openxmlformats.org/drawingml/2006/main" xmlns:p="http://schemas.openxmlformats.org/presentationml/2006/main" xmlns:r="http://schemas.openxmlformats.org/officeDocument/2006/relationships">
   <p:cSld>
     <p:spTree>
       <p:nvGrpSpPr>
@@ -20548,14 +20357,7 @@
         <p:cNvGrpSpPr/>
         <p:nvPr/>
       </p:nvGrpSpPr>
-      <p:grpSpPr>
-        <a:xfrm>
-          <a:off x="0" y="0"/>
-          <a:ext cx="0" cy="0"/>
-          <a:chOff x="0" y="0"/>
-          <a:chExt cx="0" cy="0"/>
-        </a:xfrm>
-      </p:grpSpPr>
+      <p:grpSpPr/>
       <p:sp>
         <p:nvSpPr>
           <p:cNvPr id="2" name="Rectangle 1"/>
@@ -20597,7 +20399,6 @@
           <a:lstStyle/>
           <a:p>
             <a:pPr algn="ctr"/>
-            <a:endParaRPr/>
           </a:p>
         </p:txBody>
       </p:sp>
@@ -20618,7 +20419,7 @@
           <a:noFill/>
         </p:spPr>
         <p:txBody>
-          <a:bodyPr wrap="square" lIns="0" tIns="0" rIns="0" bIns="0" anchor="t">
+          <a:bodyPr wrap="square" anchor="t" lIns="0" rIns="0" tIns="0" bIns="0">
             <a:spAutoFit/>
           </a:bodyPr>
           <a:lstStyle/>
@@ -20657,7 +20458,7 @@
           <a:noFill/>
         </p:spPr>
         <p:txBody>
-          <a:bodyPr wrap="square" lIns="0" tIns="0" rIns="0" bIns="0" anchor="t">
+          <a:bodyPr wrap="square" anchor="t" lIns="0" rIns="0" tIns="0" bIns="0">
             <a:spAutoFit/>
           </a:bodyPr>
           <a:lstStyle/>
@@ -20722,7 +20523,6 @@
           <a:lstStyle/>
           <a:p>
             <a:pPr algn="ctr"/>
-            <a:endParaRPr/>
           </a:p>
         </p:txBody>
       </p:sp>
@@ -20743,7 +20543,7 @@
           <a:noFill/>
         </p:spPr>
         <p:txBody>
-          <a:bodyPr wrap="square" lIns="0" tIns="0" rIns="0" bIns="0" anchor="ctr">
+          <a:bodyPr wrap="square" anchor="ctr" lIns="0" rIns="0" tIns="0" bIns="0">
             <a:spAutoFit/>
           </a:bodyPr>
           <a:lstStyle/>
@@ -20782,7 +20582,7 @@
           <a:noFill/>
         </p:spPr>
         <p:txBody>
-          <a:bodyPr wrap="square" lIns="0" tIns="0" rIns="0" bIns="0" anchor="ctr">
+          <a:bodyPr wrap="square" anchor="ctr" lIns="0" rIns="0" tIns="0" bIns="0">
             <a:spAutoFit/>
           </a:bodyPr>
           <a:lstStyle/>
@@ -20821,7 +20621,7 @@
           <a:noFill/>
         </p:spPr>
         <p:txBody>
-          <a:bodyPr wrap="square" lIns="0" tIns="0" rIns="0" bIns="0" anchor="ctr">
+          <a:bodyPr wrap="square" anchor="ctr" lIns="0" rIns="0" tIns="0" bIns="0">
             <a:spAutoFit/>
           </a:bodyPr>
           <a:lstStyle/>
@@ -20886,7 +20686,6 @@
           <a:lstStyle/>
           <a:p>
             <a:pPr algn="ctr"/>
-            <a:endParaRPr/>
           </a:p>
         </p:txBody>
       </p:sp>
@@ -20907,7 +20706,7 @@
           <a:noFill/>
         </p:spPr>
         <p:txBody>
-          <a:bodyPr wrap="square" lIns="0" tIns="0" rIns="0" bIns="0" anchor="ctr">
+          <a:bodyPr wrap="square" anchor="ctr" lIns="0" rIns="0" tIns="0" bIns="0">
             <a:spAutoFit/>
           </a:bodyPr>
           <a:lstStyle/>
@@ -20946,7 +20745,7 @@
           <a:noFill/>
         </p:spPr>
         <p:txBody>
-          <a:bodyPr wrap="square" lIns="0" tIns="0" rIns="0" bIns="0" anchor="ctr">
+          <a:bodyPr wrap="square" anchor="ctr" lIns="0" rIns="0" tIns="0" bIns="0">
             <a:spAutoFit/>
           </a:bodyPr>
           <a:lstStyle/>
@@ -20985,7 +20784,7 @@
           <a:noFill/>
         </p:spPr>
         <p:txBody>
-          <a:bodyPr wrap="square" lIns="0" tIns="0" rIns="0" bIns="0" anchor="ctr">
+          <a:bodyPr wrap="square" anchor="ctr" lIns="0" rIns="0" tIns="0" bIns="0">
             <a:spAutoFit/>
           </a:bodyPr>
           <a:lstStyle/>
@@ -21050,7 +20849,6 @@
           <a:lstStyle/>
           <a:p>
             <a:pPr algn="ctr"/>
-            <a:endParaRPr/>
           </a:p>
         </p:txBody>
       </p:sp>
@@ -21071,7 +20869,7 @@
           <a:noFill/>
         </p:spPr>
         <p:txBody>
-          <a:bodyPr wrap="square" lIns="0" tIns="0" rIns="0" bIns="0" anchor="ctr">
+          <a:bodyPr wrap="square" anchor="ctr" lIns="0" rIns="0" tIns="0" bIns="0">
             <a:spAutoFit/>
           </a:bodyPr>
           <a:lstStyle/>
@@ -21110,7 +20908,7 @@
           <a:noFill/>
         </p:spPr>
         <p:txBody>
-          <a:bodyPr wrap="square" lIns="0" tIns="0" rIns="0" bIns="0" anchor="ctr">
+          <a:bodyPr wrap="square" anchor="ctr" lIns="0" rIns="0" tIns="0" bIns="0">
             <a:spAutoFit/>
           </a:bodyPr>
           <a:lstStyle/>
@@ -21149,7 +20947,7 @@
           <a:noFill/>
         </p:spPr>
         <p:txBody>
-          <a:bodyPr wrap="square" lIns="0" tIns="0" rIns="0" bIns="0" anchor="ctr">
+          <a:bodyPr wrap="square" anchor="ctr" lIns="0" rIns="0" tIns="0" bIns="0">
             <a:spAutoFit/>
           </a:bodyPr>
           <a:lstStyle/>
@@ -21214,7 +21012,6 @@
           <a:lstStyle/>
           <a:p>
             <a:pPr algn="ctr"/>
-            <a:endParaRPr/>
           </a:p>
         </p:txBody>
       </p:sp>
@@ -21235,7 +21032,7 @@
           <a:noFill/>
         </p:spPr>
         <p:txBody>
-          <a:bodyPr wrap="square" lIns="0" tIns="0" rIns="0" bIns="0" anchor="ctr">
+          <a:bodyPr wrap="square" anchor="ctr" lIns="0" rIns="0" tIns="0" bIns="0">
             <a:spAutoFit/>
           </a:bodyPr>
           <a:lstStyle/>
@@ -21274,7 +21071,7 @@
           <a:noFill/>
         </p:spPr>
         <p:txBody>
-          <a:bodyPr wrap="square" lIns="0" tIns="0" rIns="0" bIns="0" anchor="ctr">
+          <a:bodyPr wrap="square" anchor="ctr" lIns="0" rIns="0" tIns="0" bIns="0">
             <a:spAutoFit/>
           </a:bodyPr>
           <a:lstStyle/>
@@ -21313,7 +21110,7 @@
           <a:noFill/>
         </p:spPr>
         <p:txBody>
-          <a:bodyPr wrap="square" lIns="0" tIns="0" rIns="0" bIns="0" anchor="ctr">
+          <a:bodyPr wrap="square" anchor="ctr" lIns="0" rIns="0" tIns="0" bIns="0">
             <a:spAutoFit/>
           </a:bodyPr>
           <a:lstStyle/>
@@ -21352,7 +21149,7 @@
           <a:noFill/>
         </p:spPr>
         <p:txBody>
-          <a:bodyPr wrap="square" lIns="0" tIns="0" rIns="0" bIns="0" anchor="t">
+          <a:bodyPr wrap="square" anchor="t" lIns="0" rIns="0" tIns="0" bIns="0">
             <a:spAutoFit/>
           </a:bodyPr>
           <a:lstStyle/>
@@ -21391,7 +21188,7 @@
           <a:noFill/>
         </p:spPr>
         <p:txBody>
-          <a:bodyPr wrap="square" lIns="0" tIns="0" rIns="0" bIns="0" anchor="t">
+          <a:bodyPr wrap="square" anchor="t" lIns="0" rIns="0" tIns="0" bIns="0">
             <a:spAutoFit/>
           </a:bodyPr>
           <a:lstStyle/>
